--- a/topics/ratio/Ratio_M04_questions.pptx
+++ b/topics/ratio/Ratio_M04_questions.pptx
@@ -4031,7 +4031,7 @@
 </p:sldMaster>
 </file>
 
-<file path=ppt/slides/slide1.xml><?xml version="1.0" encoding="utf-8"?>
+<file path=ppt/slides/slide1000.xml><?xml version="1.0" encoding="utf-8"?>
 <p:sld xmlns:a="http://schemas.openxmlformats.org/drawingml/2006/main" xmlns:p="http://schemas.openxmlformats.org/presentationml/2006/main" xmlns:r="http://schemas.openxmlformats.org/officeDocument/2006/relationships">
   <p:cSld>
     <p:bg>
@@ -4640,7 +4640,7 @@
 </p:sld>
 </file>
 
-<file path=ppt/slides/slide2.xml><?xml version="1.0" encoding="utf-8"?>
+<file path=ppt/slides/slide1001.xml><?xml version="1.0" encoding="utf-8"?>
 <p:sld xmlns:a="http://schemas.openxmlformats.org/drawingml/2006/main" xmlns:r="http://schemas.openxmlformats.org/officeDocument/2006/relationships" xmlns:p="http://schemas.openxmlformats.org/presentationml/2006/main">
   <p:cSld>
     <p:bg>
@@ -4973,7 +4973,7 @@
               </a:defRPr>
             </a:pPr>
             <a:r>
-              <a:t>Thread 1: Guided</a:t>
+              <a:t>Start</a:t>
             </a:r>
           </a:p>
         </p:txBody>
@@ -5062,7 +5062,7 @@
               </a:defRPr>
             </a:pPr>
             <a:r>
-              <a:t>Thread 2: Core</a:t>
+              <a:t>Build</a:t>
             </a:r>
           </a:p>
         </p:txBody>
@@ -5151,7 +5151,7 @@
               </a:defRPr>
             </a:pPr>
             <a:r>
-              <a:t>Thread 3: Depth</a:t>
+              <a:t>Confidence</a:t>
             </a:r>
           </a:p>
         </p:txBody>
@@ -8872,7 +8872,7 @@
 </p:sld>
 </file>
 
-<file path=ppt/slides/slide3.xml><?xml version="1.0" encoding="utf-8"?>
+<file path=ppt/slides/slide1002.xml><?xml version="1.0" encoding="utf-8"?>
 <p:sld xmlns:a="http://schemas.openxmlformats.org/drawingml/2006/main" xmlns:r="http://schemas.openxmlformats.org/officeDocument/2006/relationships" xmlns:p="http://schemas.openxmlformats.org/presentationml/2006/main">
   <p:cSld>
     <p:bg>
@@ -9205,7 +9205,7 @@
               </a:defRPr>
             </a:pPr>
             <a:r>
-              <a:t>Thread 1: Guided</a:t>
+              <a:t>Start</a:t>
             </a:r>
           </a:p>
         </p:txBody>
@@ -9294,7 +9294,7 @@
               </a:defRPr>
             </a:pPr>
             <a:r>
-              <a:t>Thread 2: Core</a:t>
+              <a:t>Build</a:t>
             </a:r>
           </a:p>
         </p:txBody>
@@ -9383,7 +9383,7 @@
               </a:defRPr>
             </a:pPr>
             <a:r>
-              <a:t>Thread 3: Depth</a:t>
+              <a:t>Confidence</a:t>
             </a:r>
           </a:p>
         </p:txBody>
@@ -11374,7 +11374,7 @@
 </p:sld>
 </file>
 
-<file path=ppt/slides/slide4.xml><?xml version="1.0" encoding="utf-8"?>
+<file path=ppt/slides/slide1003.xml><?xml version="1.0" encoding="utf-8"?>
 <p:sld xmlns:a="http://schemas.openxmlformats.org/drawingml/2006/main" xmlns:r="http://schemas.openxmlformats.org/officeDocument/2006/relationships" xmlns:p="http://schemas.openxmlformats.org/presentationml/2006/main">
   <p:cSld>
     <p:bg>
@@ -11707,7 +11707,7 @@
               </a:defRPr>
             </a:pPr>
             <a:r>
-              <a:t>Thread 1: Guided</a:t>
+              <a:t>Start</a:t>
             </a:r>
           </a:p>
         </p:txBody>
@@ -11796,7 +11796,7 @@
               </a:defRPr>
             </a:pPr>
             <a:r>
-              <a:t>Thread 2: Core</a:t>
+              <a:t>Build</a:t>
             </a:r>
           </a:p>
         </p:txBody>
@@ -11885,7 +11885,7 @@
               </a:defRPr>
             </a:pPr>
             <a:r>
-              <a:t>Thread 3: Depth</a:t>
+              <a:t>Confidence</a:t>
             </a:r>
           </a:p>
         </p:txBody>
@@ -13870,3355 +13870,7 @@
 </p:sld>
 </file>
 
-<file path=ppt/slides/slide5.xml><?xml version="1.0" encoding="utf-8"?>
-<p:sld xmlns:a="http://schemas.openxmlformats.org/drawingml/2006/main" xmlns:p="http://schemas.openxmlformats.org/presentationml/2006/main" xmlns:r="http://schemas.openxmlformats.org/officeDocument/2006/relationships">
-  <p:cSld>
-    <p:bg>
-      <p:bgPr>
-        <a:solidFill>
-          <a:srgbClr val="F7F8FA"/>
-        </a:solidFill>
-        <a:effectLst/>
-      </p:bgPr>
-    </p:bg>
-    <p:spTree>
-      <p:nvGrpSpPr>
-        <p:cNvPr id="1" name=""/>
-        <p:cNvGrpSpPr/>
-        <p:nvPr/>
-      </p:nvGrpSpPr>
-      <p:grpSpPr/>
-      <p:sp>
-        <p:nvSpPr>
-          <p:cNvPr id="2" name="Rectangle 1"/>
-          <p:cNvSpPr/>
-          <p:nvPr/>
-        </p:nvSpPr>
-        <p:spPr>
-          <a:xfrm>
-            <a:off x="0" y="0"/>
-            <a:ext cx="14630400" cy="91440"/>
-          </a:xfrm>
-          <a:prstGeom prst="rect">
-            <a:avLst/>
-          </a:prstGeom>
-          <a:solidFill>
-            <a:srgbClr val="176B73"/>
-          </a:solidFill>
-          <a:ln>
-            <a:noFill/>
-          </a:ln>
-        </p:spPr>
-        <p:style>
-          <a:lnRef idx="1">
-            <a:schemeClr val="accent1"/>
-          </a:lnRef>
-          <a:fillRef idx="3">
-            <a:schemeClr val="accent1"/>
-          </a:fillRef>
-          <a:effectRef idx="0">
-            <a:schemeClr val="accent1"/>
-          </a:effectRef>
-          <a:fontRef idx="minor">
-            <a:schemeClr val="lt1"/>
-          </a:fontRef>
-        </p:style>
-        <p:txBody>
-          <a:bodyPr rtlCol="0" anchor="ctr"/>
-          <a:lstStyle/>
-          <a:p>
-            <a:pPr algn="ctr"/>
-          </a:p>
-        </p:txBody>
-      </p:sp>
-      <p:sp>
-        <p:nvSpPr>
-          <p:cNvPr id="3" name="TextBox 2"/>
-          <p:cNvSpPr txBox="1"/>
-          <p:nvPr/>
-        </p:nvSpPr>
-        <p:spPr>
-          <a:xfrm>
-            <a:off x="384048" y="219456"/>
-            <a:ext cx="13807440" cy="457200"/>
-          </a:xfrm>
-          <a:prstGeom prst="rect">
-            <a:avLst/>
-          </a:prstGeom>
-          <a:noFill/>
-        </p:spPr>
-        <p:txBody>
-          <a:bodyPr wrap="square" tIns="36576" bIns="36576" anchor="t">
-            <a:spAutoFit/>
-          </a:bodyPr>
-          <a:lstStyle/>
-          <a:p>
-            <a:pPr>
-              <a:lnSpc>
-                <a:spcPts val="3132"/>
-              </a:lnSpc>
-              <a:spcBef>
-                <a:spcPts val="0"/>
-              </a:spcBef>
-              <a:spcAft>
-                <a:spcPts val="0"/>
-              </a:spcAft>
-              <a:defRPr sz="2900" b="1">
-                <a:solidFill>
-                  <a:srgbClr val="182B3A"/>
-                </a:solidFill>
-                <a:latin typeface="Arial"/>
-              </a:defRPr>
-            </a:pPr>
-            <a:r>
-              <a:t>Ratio: sharing and missing amounts — spot the errors</a:t>
-            </a:r>
-          </a:p>
-        </p:txBody>
-      </p:sp>
-      <p:sp>
-        <p:nvSpPr>
-          <p:cNvPr id="4" name="TextBox 3"/>
-          <p:cNvSpPr txBox="1"/>
-          <p:nvPr/>
-        </p:nvSpPr>
-        <p:spPr>
-          <a:xfrm>
-            <a:off x="384048" y="740664"/>
-            <a:ext cx="13807440" cy="411480"/>
-          </a:xfrm>
-          <a:prstGeom prst="rect">
-            <a:avLst/>
-          </a:prstGeom>
-          <a:noFill/>
-        </p:spPr>
-        <p:txBody>
-          <a:bodyPr wrap="square" tIns="36576" bIns="36576" anchor="t">
-            <a:spAutoFit/>
-          </a:bodyPr>
-          <a:lstStyle/>
-          <a:p>
-            <a:pPr>
-              <a:lnSpc>
-                <a:spcPts val="1836"/>
-              </a:lnSpc>
-              <a:spcBef>
-                <a:spcPts val="0"/>
-              </a:spcBef>
-              <a:spcAft>
-                <a:spcPts val="0"/>
-              </a:spcAft>
-              <a:defRPr sz="1700" b="0">
-                <a:solidFill>
-                  <a:srgbClr val="526472"/>
-                </a:solidFill>
-                <a:latin typeface="Arial"/>
-              </a:defRPr>
-            </a:pPr>
-            <a:r>
-              <a:t>Each student’s working contains a mistake. Find it, correct the working and give the right answer.</a:t>
-            </a:r>
-          </a:p>
-        </p:txBody>
-      </p:sp>
-      <p:sp>
-        <p:nvSpPr>
-          <p:cNvPr id="5" name="TextBox 4"/>
-          <p:cNvSpPr txBox="1"/>
-          <p:nvPr/>
-        </p:nvSpPr>
-        <p:spPr>
-          <a:xfrm>
-            <a:off x="384048" y="7863840"/>
-            <a:ext cx="13716000" cy="256032"/>
-          </a:xfrm>
-          <a:prstGeom prst="rect">
-            <a:avLst/>
-          </a:prstGeom>
-          <a:noFill/>
-        </p:spPr>
-        <p:txBody>
-          <a:bodyPr wrap="square" tIns="36576" bIns="36576" anchor="t">
-            <a:spAutoFit/>
-          </a:bodyPr>
-          <a:lstStyle/>
-          <a:p>
-            <a:pPr>
-              <a:lnSpc>
-                <a:spcPts val="1188"/>
-              </a:lnSpc>
-              <a:spcBef>
-                <a:spcPts val="0"/>
-              </a:spcBef>
-              <a:spcAft>
-                <a:spcPts val="0"/>
-              </a:spcAft>
-              <a:defRPr sz="1100" b="0">
-                <a:solidFill>
-                  <a:srgbClr val="526472"/>
-                </a:solidFill>
-                <a:latin typeface="Arial"/>
-              </a:defRPr>
-            </a:pPr>
-            <a:r>
-              <a:t>M04-SE  •  Record your working in your booklet or webapp.</a:t>
-            </a:r>
-          </a:p>
-        </p:txBody>
-      </p:sp>
-      <p:sp>
-        <p:nvSpPr>
-          <p:cNvPr id="6" name="Rectangle 5"/>
-          <p:cNvSpPr/>
-          <p:nvPr/>
-        </p:nvSpPr>
-        <p:spPr>
-          <a:xfrm>
-            <a:off x="384048" y="1234440"/>
-            <a:ext cx="4588764" cy="420624"/>
-          </a:xfrm>
-          <a:prstGeom prst="rect">
-            <a:avLst/>
-          </a:prstGeom>
-          <a:solidFill>
-            <a:srgbClr val="176B73"/>
-          </a:solidFill>
-          <a:ln>
-            <a:noFill/>
-          </a:ln>
-        </p:spPr>
-        <p:style>
-          <a:lnRef idx="1">
-            <a:schemeClr val="accent1"/>
-          </a:lnRef>
-          <a:fillRef idx="3">
-            <a:schemeClr val="accent1"/>
-          </a:fillRef>
-          <a:effectRef idx="0">
-            <a:schemeClr val="accent1"/>
-          </a:effectRef>
-          <a:fontRef idx="minor">
-            <a:schemeClr val="lt1"/>
-          </a:fontRef>
-        </p:style>
-        <p:txBody>
-          <a:bodyPr rtlCol="0" anchor="ctr"/>
-          <a:lstStyle/>
-          <a:p>
-            <a:pPr algn="ctr"/>
-          </a:p>
-        </p:txBody>
-      </p:sp>
-      <p:sp>
-        <p:nvSpPr>
-          <p:cNvPr id="7" name="TextBox 6"/>
-          <p:cNvSpPr txBox="1"/>
-          <p:nvPr/>
-        </p:nvSpPr>
-        <p:spPr>
-          <a:xfrm>
-            <a:off x="448056" y="1261872"/>
-            <a:ext cx="4474464" cy="347472"/>
-          </a:xfrm>
-          <a:prstGeom prst="rect">
-            <a:avLst/>
-          </a:prstGeom>
-          <a:noFill/>
-        </p:spPr>
-        <p:txBody>
-          <a:bodyPr wrap="square" tIns="36576" bIns="36576" anchor="t">
-            <a:spAutoFit/>
-          </a:bodyPr>
-          <a:lstStyle/>
-          <a:p>
-            <a:pPr>
-              <a:lnSpc>
-                <a:spcPts val="2160"/>
-              </a:lnSpc>
-              <a:spcBef>
-                <a:spcPts val="0"/>
-              </a:spcBef>
-              <a:spcAft>
-                <a:spcPts val="0"/>
-              </a:spcAft>
-              <a:defRPr sz="2000" b="1">
-                <a:solidFill>
-                  <a:srgbClr val="FFFFFF"/>
-                </a:solidFill>
-                <a:latin typeface="Arial"/>
-              </a:defRPr>
-            </a:pPr>
-            <a:r>
-              <a:t>Thread 1: Guided</a:t>
-            </a:r>
-          </a:p>
-        </p:txBody>
-      </p:sp>
-      <p:sp>
-        <p:nvSpPr>
-          <p:cNvPr id="8" name="Rectangle 7"/>
-          <p:cNvSpPr/>
-          <p:nvPr/>
-        </p:nvSpPr>
-        <p:spPr>
-          <a:xfrm>
-            <a:off x="384048" y="1719072"/>
-            <a:ext cx="4588764" cy="1929384"/>
-          </a:xfrm>
-          <a:prstGeom prst="rect">
-            <a:avLst/>
-          </a:prstGeom>
-          <a:solidFill>
-            <a:srgbClr val="FFFFFF"/>
-          </a:solidFill>
-          <a:ln w="7620">
-            <a:solidFill>
-              <a:srgbClr val="D8E0E6"/>
-            </a:solidFill>
-          </a:ln>
-        </p:spPr>
-        <p:style>
-          <a:lnRef idx="1">
-            <a:schemeClr val="accent1"/>
-          </a:lnRef>
-          <a:fillRef idx="3">
-            <a:schemeClr val="accent1"/>
-          </a:fillRef>
-          <a:effectRef idx="0">
-            <a:schemeClr val="accent1"/>
-          </a:effectRef>
-          <a:fontRef idx="minor">
-            <a:schemeClr val="lt1"/>
-          </a:fontRef>
-        </p:style>
-        <p:txBody>
-          <a:bodyPr rtlCol="0" anchor="ctr"/>
-          <a:lstStyle/>
-          <a:p>
-            <a:pPr algn="ctr"/>
-          </a:p>
-        </p:txBody>
-      </p:sp>
-      <p:sp>
-        <p:nvSpPr>
-          <p:cNvPr id="9" name="TextBox 8"/>
-          <p:cNvSpPr txBox="1"/>
-          <p:nvPr/>
-        </p:nvSpPr>
-        <p:spPr>
-          <a:xfrm>
-            <a:off x="475488" y="1755648"/>
-            <a:ext cx="4392168" cy="841248"/>
-          </a:xfrm>
-          <a:prstGeom prst="rect">
-            <a:avLst/>
-          </a:prstGeom>
-          <a:noFill/>
-        </p:spPr>
-        <p:txBody>
-          <a:bodyPr wrap="square" tIns="36576" bIns="36576" anchor="t">
-            <a:spAutoFit/>
-          </a:bodyPr>
-          <a:lstStyle/>
-          <a:p>
-            <a:pPr>
-              <a:lnSpc>
-                <a:spcPts val="1944"/>
-              </a:lnSpc>
-              <a:spcBef>
-                <a:spcPts val="0"/>
-              </a:spcBef>
-              <a:spcAft>
-                <a:spcPts val="0"/>
-              </a:spcAft>
-              <a:defRPr sz="1800" b="1">
-                <a:solidFill>
-                  <a:srgbClr val="182B3A"/>
-                </a:solidFill>
-                <a:latin typeface="Arial"/>
-              </a:defRPr>
-            </a:pPr>
-            <a:r>
-              <a:t>1.  Share £35 between A and B in ratio 2:5. How much does A get?</a:t>
-            </a:r>
-          </a:p>
-        </p:txBody>
-      </p:sp>
-      <p:sp>
-        <p:nvSpPr>
-          <p:cNvPr id="10" name="TextBox 9"/>
-          <p:cNvSpPr txBox="1"/>
-          <p:nvPr/>
-        </p:nvSpPr>
-        <p:spPr>
-          <a:xfrm>
-            <a:off x="594360" y="2578608"/>
-            <a:ext cx="2029968" cy="310896"/>
-          </a:xfrm>
-          <a:prstGeom prst="rect">
-            <a:avLst/>
-          </a:prstGeom>
-          <a:noFill/>
-        </p:spPr>
-        <p:txBody>
-          <a:bodyPr wrap="none" lIns="0" rIns="0" tIns="0" bIns="0">
-            <a:spAutoFit/>
-          </a:bodyPr>
-          <a:lstStyle/>
-          <a:p>
-            <a:pPr algn="l">
-              <a:lnSpc>
-                <a:spcPts val="2128"/>
-              </a:lnSpc>
-              <a:spcBef>
-                <a:spcPts val="0"/>
-              </a:spcBef>
-              <a:spcAft>
-                <a:spcPts val="0"/>
-              </a:spcAft>
-              <a:defRPr sz="1900" b="0">
-                <a:solidFill>
-                  <a:srgbClr val="182B3A"/>
-                </a:solidFill>
-                <a:latin typeface="Arial"/>
-              </a:defRPr>
-            </a:pPr>
-            <a:r>
-              <a:t>2 + 5 = 7 parts</a:t>
-            </a:r>
-          </a:p>
-        </p:txBody>
-      </p:sp>
-      <p:sp>
-        <p:nvSpPr>
-          <p:cNvPr id="11" name="TextBox 10"/>
-          <p:cNvSpPr txBox="1"/>
-          <p:nvPr/>
-        </p:nvSpPr>
-        <p:spPr>
-          <a:xfrm>
-            <a:off x="594360" y="2862072"/>
-            <a:ext cx="2029968" cy="310896"/>
-          </a:xfrm>
-          <a:prstGeom prst="rect">
-            <a:avLst/>
-          </a:prstGeom>
-          <a:noFill/>
-        </p:spPr>
-        <p:txBody>
-          <a:bodyPr wrap="none" lIns="0" rIns="0" tIns="0" bIns="0">
-            <a:spAutoFit/>
-          </a:bodyPr>
-          <a:lstStyle/>
-          <a:p>
-            <a:pPr algn="l">
-              <a:lnSpc>
-                <a:spcPts val="2128"/>
-              </a:lnSpc>
-              <a:spcBef>
-                <a:spcPts val="0"/>
-              </a:spcBef>
-              <a:spcAft>
-                <a:spcPts val="0"/>
-              </a:spcAft>
-              <a:defRPr sz="1900" b="0">
-                <a:solidFill>
-                  <a:srgbClr val="182B3A"/>
-                </a:solidFill>
-                <a:latin typeface="Arial"/>
-              </a:defRPr>
-            </a:pPr>
-            <a:r>
-              <a:t>35 ÷ 7 = 5</a:t>
-            </a:r>
-          </a:p>
-        </p:txBody>
-      </p:sp>
-      <p:sp>
-        <p:nvSpPr>
-          <p:cNvPr id="12" name="TextBox 11"/>
-          <p:cNvSpPr txBox="1"/>
-          <p:nvPr/>
-        </p:nvSpPr>
-        <p:spPr>
-          <a:xfrm>
-            <a:off x="2734056" y="2578608"/>
-            <a:ext cx="2029968" cy="310896"/>
-          </a:xfrm>
-          <a:prstGeom prst="rect">
-            <a:avLst/>
-          </a:prstGeom>
-          <a:noFill/>
-        </p:spPr>
-        <p:txBody>
-          <a:bodyPr wrap="none" lIns="0" rIns="0" tIns="0" bIns="0">
-            <a:spAutoFit/>
-          </a:bodyPr>
-          <a:lstStyle/>
-          <a:p>
-            <a:pPr algn="l">
-              <a:lnSpc>
-                <a:spcPts val="2128"/>
-              </a:lnSpc>
-              <a:spcBef>
-                <a:spcPts val="0"/>
-              </a:spcBef>
-              <a:spcAft>
-                <a:spcPts val="0"/>
-              </a:spcAft>
-              <a:defRPr sz="1900" b="0">
-                <a:solidFill>
-                  <a:srgbClr val="182B3A"/>
-                </a:solidFill>
-                <a:latin typeface="Arial"/>
-              </a:defRPr>
-            </a:pPr>
-            <a:r>
-              <a:t>A = 5 × 5</a:t>
-            </a:r>
-          </a:p>
-        </p:txBody>
-      </p:sp>
-      <p:sp>
-        <p:nvSpPr>
-          <p:cNvPr id="13" name="TextBox 12"/>
-          <p:cNvSpPr txBox="1"/>
-          <p:nvPr/>
-        </p:nvSpPr>
-        <p:spPr>
-          <a:xfrm>
-            <a:off x="2734056" y="2862072"/>
-            <a:ext cx="2029968" cy="310896"/>
-          </a:xfrm>
-          <a:prstGeom prst="rect">
-            <a:avLst/>
-          </a:prstGeom>
-          <a:noFill/>
-        </p:spPr>
-        <p:txBody>
-          <a:bodyPr wrap="none" lIns="0" rIns="0" tIns="0" bIns="0">
-            <a:spAutoFit/>
-          </a:bodyPr>
-          <a:lstStyle/>
-          <a:p>
-            <a:pPr algn="l">
-              <a:lnSpc>
-                <a:spcPts val="2128"/>
-              </a:lnSpc>
-              <a:spcBef>
-                <a:spcPts val="0"/>
-              </a:spcBef>
-              <a:spcAft>
-                <a:spcPts val="0"/>
-              </a:spcAft>
-              <a:defRPr sz="1900" b="0">
-                <a:solidFill>
-                  <a:srgbClr val="182B3A"/>
-                </a:solidFill>
-                <a:latin typeface="Arial"/>
-              </a:defRPr>
-            </a:pPr>
-            <a:r>
-              <a:t>A = £25</a:t>
-            </a:r>
-          </a:p>
-        </p:txBody>
-      </p:sp>
-      <p:sp>
-        <p:nvSpPr>
-          <p:cNvPr id="14" name="TextBox 13"/>
-          <p:cNvSpPr txBox="1"/>
-          <p:nvPr/>
-        </p:nvSpPr>
-        <p:spPr>
-          <a:xfrm>
-            <a:off x="594360" y="3392424"/>
-            <a:ext cx="4206240" cy="256032"/>
-          </a:xfrm>
-          <a:prstGeom prst="rect">
-            <a:avLst/>
-          </a:prstGeom>
-          <a:noFill/>
-        </p:spPr>
-        <p:txBody>
-          <a:bodyPr wrap="none" lIns="0" rIns="0" tIns="0" bIns="0">
-            <a:spAutoFit/>
-          </a:bodyPr>
-          <a:lstStyle/>
-          <a:p>
-            <a:pPr algn="l">
-              <a:lnSpc>
-                <a:spcPts val="2016"/>
-              </a:lnSpc>
-              <a:spcBef>
-                <a:spcPts val="0"/>
-              </a:spcBef>
-              <a:spcAft>
-                <a:spcPts val="0"/>
-              </a:spcAft>
-              <a:defRPr sz="1800" b="0">
-                <a:solidFill>
-                  <a:srgbClr val="182B3A"/>
-                </a:solidFill>
-                <a:latin typeface="Arial"/>
-              </a:defRPr>
-            </a:pPr>
-            <a:r>
-              <a:t>A receives £25</a:t>
-            </a:r>
-          </a:p>
-        </p:txBody>
-      </p:sp>
-      <p:sp>
-        <p:nvSpPr>
-          <p:cNvPr id="15" name="Rectangle 14"/>
-          <p:cNvSpPr/>
-          <p:nvPr/>
-        </p:nvSpPr>
-        <p:spPr>
-          <a:xfrm>
-            <a:off x="384048" y="3721608"/>
-            <a:ext cx="4588764" cy="1929384"/>
-          </a:xfrm>
-          <a:prstGeom prst="rect">
-            <a:avLst/>
-          </a:prstGeom>
-          <a:solidFill>
-            <a:srgbClr val="FFFFFF"/>
-          </a:solidFill>
-          <a:ln w="7620">
-            <a:solidFill>
-              <a:srgbClr val="D8E0E6"/>
-            </a:solidFill>
-          </a:ln>
-        </p:spPr>
-        <p:style>
-          <a:lnRef idx="1">
-            <a:schemeClr val="accent1"/>
-          </a:lnRef>
-          <a:fillRef idx="3">
-            <a:schemeClr val="accent1"/>
-          </a:fillRef>
-          <a:effectRef idx="0">
-            <a:schemeClr val="accent1"/>
-          </a:effectRef>
-          <a:fontRef idx="minor">
-            <a:schemeClr val="lt1"/>
-          </a:fontRef>
-        </p:style>
-        <p:txBody>
-          <a:bodyPr rtlCol="0" anchor="ctr"/>
-          <a:lstStyle/>
-          <a:p>
-            <a:pPr algn="ctr"/>
-          </a:p>
-        </p:txBody>
-      </p:sp>
-      <p:sp>
-        <p:nvSpPr>
-          <p:cNvPr id="16" name="TextBox 15"/>
-          <p:cNvSpPr txBox="1"/>
-          <p:nvPr/>
-        </p:nvSpPr>
-        <p:spPr>
-          <a:xfrm>
-            <a:off x="475488" y="3758184"/>
-            <a:ext cx="4392168" cy="841248"/>
-          </a:xfrm>
-          <a:prstGeom prst="rect">
-            <a:avLst/>
-          </a:prstGeom>
-          <a:noFill/>
-        </p:spPr>
-        <p:txBody>
-          <a:bodyPr wrap="square" tIns="36576" bIns="36576" anchor="t">
-            <a:spAutoFit/>
-          </a:bodyPr>
-          <a:lstStyle/>
-          <a:p>
-            <a:pPr>
-              <a:lnSpc>
-                <a:spcPts val="1944"/>
-              </a:lnSpc>
-              <a:spcBef>
-                <a:spcPts val="0"/>
-              </a:spcBef>
-              <a:spcAft>
-                <a:spcPts val="0"/>
-              </a:spcAft>
-              <a:defRPr sz="1800" b="1">
-                <a:solidFill>
-                  <a:srgbClr val="182B3A"/>
-                </a:solidFill>
-                <a:latin typeface="Arial"/>
-              </a:defRPr>
-            </a:pPr>
-            <a:r>
-              <a:t>2.  Red:blue = 3:4. There are 12 red counters. How many blue?</a:t>
-            </a:r>
-          </a:p>
-        </p:txBody>
-      </p:sp>
-      <p:sp>
-        <p:nvSpPr>
-          <p:cNvPr id="17" name="TextBox 16"/>
-          <p:cNvSpPr txBox="1"/>
-          <p:nvPr/>
-        </p:nvSpPr>
-        <p:spPr>
-          <a:xfrm>
-            <a:off x="594360" y="4581144"/>
-            <a:ext cx="2029968" cy="310896"/>
-          </a:xfrm>
-          <a:prstGeom prst="rect">
-            <a:avLst/>
-          </a:prstGeom>
-          <a:noFill/>
-        </p:spPr>
-        <p:txBody>
-          <a:bodyPr wrap="none" lIns="0" rIns="0" tIns="0" bIns="0">
-            <a:spAutoFit/>
-          </a:bodyPr>
-          <a:lstStyle/>
-          <a:p>
-            <a:pPr algn="l">
-              <a:lnSpc>
-                <a:spcPts val="2128"/>
-              </a:lnSpc>
-              <a:spcBef>
-                <a:spcPts val="0"/>
-              </a:spcBef>
-              <a:spcAft>
-                <a:spcPts val="0"/>
-              </a:spcAft>
-              <a:defRPr sz="1900" b="0">
-                <a:solidFill>
-                  <a:srgbClr val="182B3A"/>
-                </a:solidFill>
-                <a:latin typeface="Arial"/>
-              </a:defRPr>
-            </a:pPr>
-            <a:r>
-              <a:t>3 + 4 = 7 parts</a:t>
-            </a:r>
-          </a:p>
-        </p:txBody>
-      </p:sp>
-      <p:sp>
-        <p:nvSpPr>
-          <p:cNvPr id="18" name="TextBox 17"/>
-          <p:cNvSpPr txBox="1"/>
-          <p:nvPr/>
-        </p:nvSpPr>
-        <p:spPr>
-          <a:xfrm>
-            <a:off x="594360" y="4864608"/>
-            <a:ext cx="2029968" cy="310896"/>
-          </a:xfrm>
-          <a:prstGeom prst="rect">
-            <a:avLst/>
-          </a:prstGeom>
-          <a:noFill/>
-        </p:spPr>
-        <p:txBody>
-          <a:bodyPr wrap="none" lIns="0" rIns="0" tIns="0" bIns="0">
-            <a:spAutoFit/>
-          </a:bodyPr>
-          <a:lstStyle/>
-          <a:p>
-            <a:pPr algn="l">
-              <a:lnSpc>
-                <a:spcPts val="2128"/>
-              </a:lnSpc>
-              <a:spcBef>
-                <a:spcPts val="0"/>
-              </a:spcBef>
-              <a:spcAft>
-                <a:spcPts val="0"/>
-              </a:spcAft>
-              <a:defRPr sz="1900" b="0">
-                <a:solidFill>
-                  <a:srgbClr val="182B3A"/>
-                </a:solidFill>
-                <a:latin typeface="Arial"/>
-              </a:defRPr>
-            </a:pPr>
-            <a:r>
-              <a:t>12 ÷ 7 = 1 r 5</a:t>
-            </a:r>
-          </a:p>
-        </p:txBody>
-      </p:sp>
-      <p:sp>
-        <p:nvSpPr>
-          <p:cNvPr id="19" name="TextBox 18"/>
-          <p:cNvSpPr txBox="1"/>
-          <p:nvPr/>
-        </p:nvSpPr>
-        <p:spPr>
-          <a:xfrm>
-            <a:off x="2734056" y="4581144"/>
-            <a:ext cx="2029968" cy="310896"/>
-          </a:xfrm>
-          <a:prstGeom prst="rect">
-            <a:avLst/>
-          </a:prstGeom>
-          <a:noFill/>
-        </p:spPr>
-        <p:txBody>
-          <a:bodyPr wrap="none" lIns="0" rIns="0" tIns="0" bIns="0">
-            <a:spAutoFit/>
-          </a:bodyPr>
-          <a:lstStyle/>
-          <a:p>
-            <a:pPr algn="l">
-              <a:lnSpc>
-                <a:spcPts val="2128"/>
-              </a:lnSpc>
-              <a:spcBef>
-                <a:spcPts val="0"/>
-              </a:spcBef>
-              <a:spcAft>
-                <a:spcPts val="0"/>
-              </a:spcAft>
-              <a:defRPr sz="1900" b="0">
-                <a:solidFill>
-                  <a:srgbClr val="182B3A"/>
-                </a:solidFill>
-                <a:latin typeface="Arial"/>
-              </a:defRPr>
-            </a:pPr>
-            <a:r>
-              <a:t>Blue = 4 × 1</a:t>
-            </a:r>
-          </a:p>
-        </p:txBody>
-      </p:sp>
-      <p:sp>
-        <p:nvSpPr>
-          <p:cNvPr id="20" name="TextBox 19"/>
-          <p:cNvSpPr txBox="1"/>
-          <p:nvPr/>
-        </p:nvSpPr>
-        <p:spPr>
-          <a:xfrm>
-            <a:off x="2734056" y="4864608"/>
-            <a:ext cx="2029968" cy="310896"/>
-          </a:xfrm>
-          <a:prstGeom prst="rect">
-            <a:avLst/>
-          </a:prstGeom>
-          <a:noFill/>
-        </p:spPr>
-        <p:txBody>
-          <a:bodyPr wrap="none" lIns="0" rIns="0" tIns="0" bIns="0">
-            <a:spAutoFit/>
-          </a:bodyPr>
-          <a:lstStyle/>
-          <a:p>
-            <a:pPr algn="l">
-              <a:lnSpc>
-                <a:spcPts val="2128"/>
-              </a:lnSpc>
-              <a:spcBef>
-                <a:spcPts val="0"/>
-              </a:spcBef>
-              <a:spcAft>
-                <a:spcPts val="0"/>
-              </a:spcAft>
-              <a:defRPr sz="1900" b="0">
-                <a:solidFill>
-                  <a:srgbClr val="182B3A"/>
-                </a:solidFill>
-                <a:latin typeface="Arial"/>
-              </a:defRPr>
-            </a:pPr>
-            <a:r>
-              <a:t>Blue = 4</a:t>
-            </a:r>
-          </a:p>
-        </p:txBody>
-      </p:sp>
-      <p:sp>
-        <p:nvSpPr>
-          <p:cNvPr id="21" name="TextBox 20"/>
-          <p:cNvSpPr txBox="1"/>
-          <p:nvPr/>
-        </p:nvSpPr>
-        <p:spPr>
-          <a:xfrm>
-            <a:off x="594360" y="5394960"/>
-            <a:ext cx="4206240" cy="256032"/>
-          </a:xfrm>
-          <a:prstGeom prst="rect">
-            <a:avLst/>
-          </a:prstGeom>
-          <a:noFill/>
-        </p:spPr>
-        <p:txBody>
-          <a:bodyPr wrap="none" lIns="0" rIns="0" tIns="0" bIns="0">
-            <a:spAutoFit/>
-          </a:bodyPr>
-          <a:lstStyle/>
-          <a:p>
-            <a:pPr algn="l">
-              <a:lnSpc>
-                <a:spcPts val="2016"/>
-              </a:lnSpc>
-              <a:spcBef>
-                <a:spcPts val="0"/>
-              </a:spcBef>
-              <a:spcAft>
-                <a:spcPts val="0"/>
-              </a:spcAft>
-              <a:defRPr sz="1800" b="0">
-                <a:solidFill>
-                  <a:srgbClr val="182B3A"/>
-                </a:solidFill>
-                <a:latin typeface="Arial"/>
-              </a:defRPr>
-            </a:pPr>
-            <a:r>
-              <a:t>4 blue counters</a:t>
-            </a:r>
-          </a:p>
-        </p:txBody>
-      </p:sp>
-      <p:sp>
-        <p:nvSpPr>
-          <p:cNvPr id="22" name="Rectangle 21"/>
-          <p:cNvSpPr/>
-          <p:nvPr/>
-        </p:nvSpPr>
-        <p:spPr>
-          <a:xfrm>
-            <a:off x="384048" y="5724144"/>
-            <a:ext cx="4588764" cy="1929384"/>
-          </a:xfrm>
-          <a:prstGeom prst="rect">
-            <a:avLst/>
-          </a:prstGeom>
-          <a:solidFill>
-            <a:srgbClr val="FFFFFF"/>
-          </a:solidFill>
-          <a:ln w="7620">
-            <a:solidFill>
-              <a:srgbClr val="D8E0E6"/>
-            </a:solidFill>
-          </a:ln>
-        </p:spPr>
-        <p:style>
-          <a:lnRef idx="1">
-            <a:schemeClr val="accent1"/>
-          </a:lnRef>
-          <a:fillRef idx="3">
-            <a:schemeClr val="accent1"/>
-          </a:fillRef>
-          <a:effectRef idx="0">
-            <a:schemeClr val="accent1"/>
-          </a:effectRef>
-          <a:fontRef idx="minor">
-            <a:schemeClr val="lt1"/>
-          </a:fontRef>
-        </p:style>
-        <p:txBody>
-          <a:bodyPr rtlCol="0" anchor="ctr"/>
-          <a:lstStyle/>
-          <a:p>
-            <a:pPr algn="ctr"/>
-          </a:p>
-        </p:txBody>
-      </p:sp>
-      <p:sp>
-        <p:nvSpPr>
-          <p:cNvPr id="23" name="TextBox 22"/>
-          <p:cNvSpPr txBox="1"/>
-          <p:nvPr/>
-        </p:nvSpPr>
-        <p:spPr>
-          <a:xfrm>
-            <a:off x="475488" y="5760720"/>
-            <a:ext cx="4392168" cy="841248"/>
-          </a:xfrm>
-          <a:prstGeom prst="rect">
-            <a:avLst/>
-          </a:prstGeom>
-          <a:noFill/>
-        </p:spPr>
-        <p:txBody>
-          <a:bodyPr wrap="square" tIns="36576" bIns="36576" anchor="t">
-            <a:spAutoFit/>
-          </a:bodyPr>
-          <a:lstStyle/>
-          <a:p>
-            <a:pPr>
-              <a:lnSpc>
-                <a:spcPts val="1944"/>
-              </a:lnSpc>
-              <a:spcBef>
-                <a:spcPts val="0"/>
-              </a:spcBef>
-              <a:spcAft>
-                <a:spcPts val="0"/>
-              </a:spcAft>
-              <a:defRPr sz="1800" b="1">
-                <a:solidFill>
-                  <a:srgbClr val="182B3A"/>
-                </a:solidFill>
-                <a:latin typeface="Arial"/>
-              </a:defRPr>
-            </a:pPr>
-            <a:r>
-              <a:t>3.  Share 12 sweets between A and B in ratio 1:3. How many does B get?</a:t>
-            </a:r>
-          </a:p>
-        </p:txBody>
-      </p:sp>
-      <p:sp>
-        <p:nvSpPr>
-          <p:cNvPr id="24" name="TextBox 23"/>
-          <p:cNvSpPr txBox="1"/>
-          <p:nvPr/>
-        </p:nvSpPr>
-        <p:spPr>
-          <a:xfrm>
-            <a:off x="594360" y="6583679"/>
-            <a:ext cx="2029968" cy="310896"/>
-          </a:xfrm>
-          <a:prstGeom prst="rect">
-            <a:avLst/>
-          </a:prstGeom>
-          <a:noFill/>
-        </p:spPr>
-        <p:txBody>
-          <a:bodyPr wrap="none" lIns="0" rIns="0" tIns="0" bIns="0">
-            <a:spAutoFit/>
-          </a:bodyPr>
-          <a:lstStyle/>
-          <a:p>
-            <a:pPr algn="l">
-              <a:lnSpc>
-                <a:spcPts val="2128"/>
-              </a:lnSpc>
-              <a:spcBef>
-                <a:spcPts val="0"/>
-              </a:spcBef>
-              <a:spcAft>
-                <a:spcPts val="0"/>
-              </a:spcAft>
-              <a:defRPr sz="1900" b="0">
-                <a:solidFill>
-                  <a:srgbClr val="182B3A"/>
-                </a:solidFill>
-                <a:latin typeface="Arial"/>
-              </a:defRPr>
-            </a:pPr>
-            <a:r>
-              <a:t>1 + 3 = 4 parts</a:t>
-            </a:r>
-          </a:p>
-        </p:txBody>
-      </p:sp>
-      <p:sp>
-        <p:nvSpPr>
-          <p:cNvPr id="25" name="TextBox 24"/>
-          <p:cNvSpPr txBox="1"/>
-          <p:nvPr/>
-        </p:nvSpPr>
-        <p:spPr>
-          <a:xfrm>
-            <a:off x="594360" y="6867144"/>
-            <a:ext cx="2029968" cy="310896"/>
-          </a:xfrm>
-          <a:prstGeom prst="rect">
-            <a:avLst/>
-          </a:prstGeom>
-          <a:noFill/>
-        </p:spPr>
-        <p:txBody>
-          <a:bodyPr wrap="none" lIns="0" rIns="0" tIns="0" bIns="0">
-            <a:spAutoFit/>
-          </a:bodyPr>
-          <a:lstStyle/>
-          <a:p>
-            <a:pPr algn="l">
-              <a:lnSpc>
-                <a:spcPts val="2128"/>
-              </a:lnSpc>
-              <a:spcBef>
-                <a:spcPts val="0"/>
-              </a:spcBef>
-              <a:spcAft>
-                <a:spcPts val="0"/>
-              </a:spcAft>
-              <a:defRPr sz="1900" b="0">
-                <a:solidFill>
-                  <a:srgbClr val="182B3A"/>
-                </a:solidFill>
-                <a:latin typeface="Arial"/>
-              </a:defRPr>
-            </a:pPr>
-            <a:r>
-              <a:t>12 ÷ 4 = 3</a:t>
-            </a:r>
-          </a:p>
-        </p:txBody>
-      </p:sp>
-      <p:sp>
-        <p:nvSpPr>
-          <p:cNvPr id="26" name="TextBox 25"/>
-          <p:cNvSpPr txBox="1"/>
-          <p:nvPr/>
-        </p:nvSpPr>
-        <p:spPr>
-          <a:xfrm>
-            <a:off x="2734056" y="6583679"/>
-            <a:ext cx="2029968" cy="310896"/>
-          </a:xfrm>
-          <a:prstGeom prst="rect">
-            <a:avLst/>
-          </a:prstGeom>
-          <a:noFill/>
-        </p:spPr>
-        <p:txBody>
-          <a:bodyPr wrap="none" lIns="0" rIns="0" tIns="0" bIns="0">
-            <a:spAutoFit/>
-          </a:bodyPr>
-          <a:lstStyle/>
-          <a:p>
-            <a:pPr algn="l">
-              <a:lnSpc>
-                <a:spcPts val="2128"/>
-              </a:lnSpc>
-              <a:spcBef>
-                <a:spcPts val="0"/>
-              </a:spcBef>
-              <a:spcAft>
-                <a:spcPts val="0"/>
-              </a:spcAft>
-              <a:defRPr sz="1900" b="0">
-                <a:solidFill>
-                  <a:srgbClr val="182B3A"/>
-                </a:solidFill>
-                <a:latin typeface="Arial"/>
-              </a:defRPr>
-            </a:pPr>
-            <a:r>
-              <a:t>B = 3 + 3</a:t>
-            </a:r>
-          </a:p>
-        </p:txBody>
-      </p:sp>
-      <p:sp>
-        <p:nvSpPr>
-          <p:cNvPr id="27" name="TextBox 26"/>
-          <p:cNvSpPr txBox="1"/>
-          <p:nvPr/>
-        </p:nvSpPr>
-        <p:spPr>
-          <a:xfrm>
-            <a:off x="2734056" y="6867144"/>
-            <a:ext cx="2029968" cy="310896"/>
-          </a:xfrm>
-          <a:prstGeom prst="rect">
-            <a:avLst/>
-          </a:prstGeom>
-          <a:noFill/>
-        </p:spPr>
-        <p:txBody>
-          <a:bodyPr wrap="none" lIns="0" rIns="0" tIns="0" bIns="0">
-            <a:spAutoFit/>
-          </a:bodyPr>
-          <a:lstStyle/>
-          <a:p>
-            <a:pPr algn="l">
-              <a:lnSpc>
-                <a:spcPts val="2128"/>
-              </a:lnSpc>
-              <a:spcBef>
-                <a:spcPts val="0"/>
-              </a:spcBef>
-              <a:spcAft>
-                <a:spcPts val="0"/>
-              </a:spcAft>
-              <a:defRPr sz="1900" b="0">
-                <a:solidFill>
-                  <a:srgbClr val="182B3A"/>
-                </a:solidFill>
-                <a:latin typeface="Arial"/>
-              </a:defRPr>
-            </a:pPr>
-            <a:r>
-              <a:t>B = 6</a:t>
-            </a:r>
-          </a:p>
-        </p:txBody>
-      </p:sp>
-      <p:sp>
-        <p:nvSpPr>
-          <p:cNvPr id="28" name="TextBox 27"/>
-          <p:cNvSpPr txBox="1"/>
-          <p:nvPr/>
-        </p:nvSpPr>
-        <p:spPr>
-          <a:xfrm>
-            <a:off x="594360" y="7397496"/>
-            <a:ext cx="4206240" cy="256032"/>
-          </a:xfrm>
-          <a:prstGeom prst="rect">
-            <a:avLst/>
-          </a:prstGeom>
-          <a:noFill/>
-        </p:spPr>
-        <p:txBody>
-          <a:bodyPr wrap="none" lIns="0" rIns="0" tIns="0" bIns="0">
-            <a:spAutoFit/>
-          </a:bodyPr>
-          <a:lstStyle/>
-          <a:p>
-            <a:pPr algn="l">
-              <a:lnSpc>
-                <a:spcPts val="2016"/>
-              </a:lnSpc>
-              <a:spcBef>
-                <a:spcPts val="0"/>
-              </a:spcBef>
-              <a:spcAft>
-                <a:spcPts val="0"/>
-              </a:spcAft>
-              <a:defRPr sz="1800" b="0">
-                <a:solidFill>
-                  <a:srgbClr val="182B3A"/>
-                </a:solidFill>
-                <a:latin typeface="Arial"/>
-              </a:defRPr>
-            </a:pPr>
-            <a:r>
-              <a:t>B receives 6 sweets</a:t>
-            </a:r>
-          </a:p>
-        </p:txBody>
-      </p:sp>
-      <p:sp>
-        <p:nvSpPr>
-          <p:cNvPr id="29" name="Rectangle 28"/>
-          <p:cNvSpPr/>
-          <p:nvPr/>
-        </p:nvSpPr>
-        <p:spPr>
-          <a:xfrm>
-            <a:off x="5004816" y="1234440"/>
-            <a:ext cx="4588764" cy="420624"/>
-          </a:xfrm>
-          <a:prstGeom prst="rect">
-            <a:avLst/>
-          </a:prstGeom>
-          <a:solidFill>
-            <a:srgbClr val="3559A2"/>
-          </a:solidFill>
-          <a:ln>
-            <a:noFill/>
-          </a:ln>
-        </p:spPr>
-        <p:style>
-          <a:lnRef idx="1">
-            <a:schemeClr val="accent1"/>
-          </a:lnRef>
-          <a:fillRef idx="3">
-            <a:schemeClr val="accent1"/>
-          </a:fillRef>
-          <a:effectRef idx="0">
-            <a:schemeClr val="accent1"/>
-          </a:effectRef>
-          <a:fontRef idx="minor">
-            <a:schemeClr val="lt1"/>
-          </a:fontRef>
-        </p:style>
-        <p:txBody>
-          <a:bodyPr rtlCol="0" anchor="ctr"/>
-          <a:lstStyle/>
-          <a:p>
-            <a:pPr algn="ctr"/>
-          </a:p>
-        </p:txBody>
-      </p:sp>
-      <p:sp>
-        <p:nvSpPr>
-          <p:cNvPr id="30" name="TextBox 29"/>
-          <p:cNvSpPr txBox="1"/>
-          <p:nvPr/>
-        </p:nvSpPr>
-        <p:spPr>
-          <a:xfrm>
-            <a:off x="5068824" y="1261872"/>
-            <a:ext cx="4474464" cy="347472"/>
-          </a:xfrm>
-          <a:prstGeom prst="rect">
-            <a:avLst/>
-          </a:prstGeom>
-          <a:noFill/>
-        </p:spPr>
-        <p:txBody>
-          <a:bodyPr wrap="square" tIns="36576" bIns="36576" anchor="t">
-            <a:spAutoFit/>
-          </a:bodyPr>
-          <a:lstStyle/>
-          <a:p>
-            <a:pPr>
-              <a:lnSpc>
-                <a:spcPts val="2160"/>
-              </a:lnSpc>
-              <a:spcBef>
-                <a:spcPts val="0"/>
-              </a:spcBef>
-              <a:spcAft>
-                <a:spcPts val="0"/>
-              </a:spcAft>
-              <a:defRPr sz="2000" b="1">
-                <a:solidFill>
-                  <a:srgbClr val="FFFFFF"/>
-                </a:solidFill>
-                <a:latin typeface="Arial"/>
-              </a:defRPr>
-            </a:pPr>
-            <a:r>
-              <a:t>Thread 2: Core</a:t>
-            </a:r>
-          </a:p>
-        </p:txBody>
-      </p:sp>
-      <p:sp>
-        <p:nvSpPr>
-          <p:cNvPr id="31" name="Rectangle 30"/>
-          <p:cNvSpPr/>
-          <p:nvPr/>
-        </p:nvSpPr>
-        <p:spPr>
-          <a:xfrm>
-            <a:off x="5004816" y="1719072"/>
-            <a:ext cx="4588764" cy="1929384"/>
-          </a:xfrm>
-          <a:prstGeom prst="rect">
-            <a:avLst/>
-          </a:prstGeom>
-          <a:solidFill>
-            <a:srgbClr val="FFFFFF"/>
-          </a:solidFill>
-          <a:ln w="7620">
-            <a:solidFill>
-              <a:srgbClr val="D8E0E6"/>
-            </a:solidFill>
-          </a:ln>
-        </p:spPr>
-        <p:style>
-          <a:lnRef idx="1">
-            <a:schemeClr val="accent1"/>
-          </a:lnRef>
-          <a:fillRef idx="3">
-            <a:schemeClr val="accent1"/>
-          </a:fillRef>
-          <a:effectRef idx="0">
-            <a:schemeClr val="accent1"/>
-          </a:effectRef>
-          <a:fontRef idx="minor">
-            <a:schemeClr val="lt1"/>
-          </a:fontRef>
-        </p:style>
-        <p:txBody>
-          <a:bodyPr rtlCol="0" anchor="ctr"/>
-          <a:lstStyle/>
-          <a:p>
-            <a:pPr algn="ctr"/>
-          </a:p>
-        </p:txBody>
-      </p:sp>
-      <p:sp>
-        <p:nvSpPr>
-          <p:cNvPr id="32" name="TextBox 31"/>
-          <p:cNvSpPr txBox="1"/>
-          <p:nvPr/>
-        </p:nvSpPr>
-        <p:spPr>
-          <a:xfrm>
-            <a:off x="5096256" y="1755648"/>
-            <a:ext cx="4392168" cy="841248"/>
-          </a:xfrm>
-          <a:prstGeom prst="rect">
-            <a:avLst/>
-          </a:prstGeom>
-          <a:noFill/>
-        </p:spPr>
-        <p:txBody>
-          <a:bodyPr wrap="square" tIns="36576" bIns="36576" anchor="t">
-            <a:spAutoFit/>
-          </a:bodyPr>
-          <a:lstStyle/>
-          <a:p>
-            <a:pPr>
-              <a:lnSpc>
-                <a:spcPts val="1944"/>
-              </a:lnSpc>
-              <a:spcBef>
-                <a:spcPts val="0"/>
-              </a:spcBef>
-              <a:spcAft>
-                <a:spcPts val="0"/>
-              </a:spcAft>
-              <a:defRPr sz="1800" b="1">
-                <a:solidFill>
-                  <a:srgbClr val="182B3A"/>
-                </a:solidFill>
-                <a:latin typeface="Arial"/>
-              </a:defRPr>
-            </a:pPr>
-            <a:r>
-              <a:t>1.  A and B share counters in ratio 2:7. B has 30 more than A. How many does A have?</a:t>
-            </a:r>
-          </a:p>
-        </p:txBody>
-      </p:sp>
-      <p:sp>
-        <p:nvSpPr>
-          <p:cNvPr id="33" name="TextBox 32"/>
-          <p:cNvSpPr txBox="1"/>
-          <p:nvPr/>
-        </p:nvSpPr>
-        <p:spPr>
-          <a:xfrm>
-            <a:off x="5215128" y="2578608"/>
-            <a:ext cx="2029968" cy="310896"/>
-          </a:xfrm>
-          <a:prstGeom prst="rect">
-            <a:avLst/>
-          </a:prstGeom>
-          <a:noFill/>
-        </p:spPr>
-        <p:txBody>
-          <a:bodyPr wrap="none" lIns="0" rIns="0" tIns="0" bIns="0">
-            <a:spAutoFit/>
-          </a:bodyPr>
-          <a:lstStyle/>
-          <a:p>
-            <a:pPr algn="l">
-              <a:lnSpc>
-                <a:spcPts val="2128"/>
-              </a:lnSpc>
-              <a:spcBef>
-                <a:spcPts val="0"/>
-              </a:spcBef>
-              <a:spcAft>
-                <a:spcPts val="0"/>
-              </a:spcAft>
-              <a:defRPr sz="1900" b="0">
-                <a:solidFill>
-                  <a:srgbClr val="182B3A"/>
-                </a:solidFill>
-                <a:latin typeface="Arial"/>
-              </a:defRPr>
-            </a:pPr>
-            <a:r>
-              <a:t>7 − 2 = 5 parts</a:t>
-            </a:r>
-          </a:p>
-        </p:txBody>
-      </p:sp>
-      <p:sp>
-        <p:nvSpPr>
-          <p:cNvPr id="34" name="TextBox 33"/>
-          <p:cNvSpPr txBox="1"/>
-          <p:nvPr/>
-        </p:nvSpPr>
-        <p:spPr>
-          <a:xfrm>
-            <a:off x="5215128" y="2862072"/>
-            <a:ext cx="2029968" cy="310896"/>
-          </a:xfrm>
-          <a:prstGeom prst="rect">
-            <a:avLst/>
-          </a:prstGeom>
-          <a:noFill/>
-        </p:spPr>
-        <p:txBody>
-          <a:bodyPr wrap="none" lIns="0" rIns="0" tIns="0" bIns="0">
-            <a:spAutoFit/>
-          </a:bodyPr>
-          <a:lstStyle/>
-          <a:p>
-            <a:pPr algn="l">
-              <a:lnSpc>
-                <a:spcPts val="2128"/>
-              </a:lnSpc>
-              <a:spcBef>
-                <a:spcPts val="0"/>
-              </a:spcBef>
-              <a:spcAft>
-                <a:spcPts val="0"/>
-              </a:spcAft>
-              <a:defRPr sz="1900" b="0">
-                <a:solidFill>
-                  <a:srgbClr val="182B3A"/>
-                </a:solidFill>
-                <a:latin typeface="Arial"/>
-              </a:defRPr>
-            </a:pPr>
-            <a:r>
-              <a:t>30 ÷ 5 = 6</a:t>
-            </a:r>
-          </a:p>
-        </p:txBody>
-      </p:sp>
-      <p:sp>
-        <p:nvSpPr>
-          <p:cNvPr id="35" name="TextBox 34"/>
-          <p:cNvSpPr txBox="1"/>
-          <p:nvPr/>
-        </p:nvSpPr>
-        <p:spPr>
-          <a:xfrm>
-            <a:off x="7354824" y="2578608"/>
-            <a:ext cx="2029968" cy="310896"/>
-          </a:xfrm>
-          <a:prstGeom prst="rect">
-            <a:avLst/>
-          </a:prstGeom>
-          <a:noFill/>
-        </p:spPr>
-        <p:txBody>
-          <a:bodyPr wrap="none" lIns="0" rIns="0" tIns="0" bIns="0">
-            <a:spAutoFit/>
-          </a:bodyPr>
-          <a:lstStyle/>
-          <a:p>
-            <a:pPr algn="l">
-              <a:lnSpc>
-                <a:spcPts val="2128"/>
-              </a:lnSpc>
-              <a:spcBef>
-                <a:spcPts val="0"/>
-              </a:spcBef>
-              <a:spcAft>
-                <a:spcPts val="0"/>
-              </a:spcAft>
-              <a:defRPr sz="1900" b="0">
-                <a:solidFill>
-                  <a:srgbClr val="182B3A"/>
-                </a:solidFill>
-                <a:latin typeface="Arial"/>
-              </a:defRPr>
-            </a:pPr>
-            <a:r>
-              <a:t>A = 2 + 6</a:t>
-            </a:r>
-          </a:p>
-        </p:txBody>
-      </p:sp>
-      <p:sp>
-        <p:nvSpPr>
-          <p:cNvPr id="36" name="TextBox 35"/>
-          <p:cNvSpPr txBox="1"/>
-          <p:nvPr/>
-        </p:nvSpPr>
-        <p:spPr>
-          <a:xfrm>
-            <a:off x="7354824" y="2862072"/>
-            <a:ext cx="2029968" cy="310896"/>
-          </a:xfrm>
-          <a:prstGeom prst="rect">
-            <a:avLst/>
-          </a:prstGeom>
-          <a:noFill/>
-        </p:spPr>
-        <p:txBody>
-          <a:bodyPr wrap="none" lIns="0" rIns="0" tIns="0" bIns="0">
-            <a:spAutoFit/>
-          </a:bodyPr>
-          <a:lstStyle/>
-          <a:p>
-            <a:pPr algn="l">
-              <a:lnSpc>
-                <a:spcPts val="2128"/>
-              </a:lnSpc>
-              <a:spcBef>
-                <a:spcPts val="0"/>
-              </a:spcBef>
-              <a:spcAft>
-                <a:spcPts val="0"/>
-              </a:spcAft>
-              <a:defRPr sz="1900" b="0">
-                <a:solidFill>
-                  <a:srgbClr val="182B3A"/>
-                </a:solidFill>
-                <a:latin typeface="Arial"/>
-              </a:defRPr>
-            </a:pPr>
-            <a:r>
-              <a:t>A = 8</a:t>
-            </a:r>
-          </a:p>
-        </p:txBody>
-      </p:sp>
-      <p:sp>
-        <p:nvSpPr>
-          <p:cNvPr id="37" name="TextBox 36"/>
-          <p:cNvSpPr txBox="1"/>
-          <p:nvPr/>
-        </p:nvSpPr>
-        <p:spPr>
-          <a:xfrm>
-            <a:off x="5215128" y="3392424"/>
-            <a:ext cx="4206240" cy="256032"/>
-          </a:xfrm>
-          <a:prstGeom prst="rect">
-            <a:avLst/>
-          </a:prstGeom>
-          <a:noFill/>
-        </p:spPr>
-        <p:txBody>
-          <a:bodyPr wrap="none" lIns="0" rIns="0" tIns="0" bIns="0">
-            <a:spAutoFit/>
-          </a:bodyPr>
-          <a:lstStyle/>
-          <a:p>
-            <a:pPr algn="l">
-              <a:lnSpc>
-                <a:spcPts val="2016"/>
-              </a:lnSpc>
-              <a:spcBef>
-                <a:spcPts val="0"/>
-              </a:spcBef>
-              <a:spcAft>
-                <a:spcPts val="0"/>
-              </a:spcAft>
-              <a:defRPr sz="1800" b="0">
-                <a:solidFill>
-                  <a:srgbClr val="182B3A"/>
-                </a:solidFill>
-                <a:latin typeface="Arial"/>
-              </a:defRPr>
-            </a:pPr>
-            <a:r>
-              <a:t>A has 8 counters</a:t>
-            </a:r>
-          </a:p>
-        </p:txBody>
-      </p:sp>
-      <p:sp>
-        <p:nvSpPr>
-          <p:cNvPr id="38" name="Rectangle 37"/>
-          <p:cNvSpPr/>
-          <p:nvPr/>
-        </p:nvSpPr>
-        <p:spPr>
-          <a:xfrm>
-            <a:off x="5004816" y="3721608"/>
-            <a:ext cx="4588764" cy="1929384"/>
-          </a:xfrm>
-          <a:prstGeom prst="rect">
-            <a:avLst/>
-          </a:prstGeom>
-          <a:solidFill>
-            <a:srgbClr val="FFFFFF"/>
-          </a:solidFill>
-          <a:ln w="7620">
-            <a:solidFill>
-              <a:srgbClr val="D8E0E6"/>
-            </a:solidFill>
-          </a:ln>
-        </p:spPr>
-        <p:style>
-          <a:lnRef idx="1">
-            <a:schemeClr val="accent1"/>
-          </a:lnRef>
-          <a:fillRef idx="3">
-            <a:schemeClr val="accent1"/>
-          </a:fillRef>
-          <a:effectRef idx="0">
-            <a:schemeClr val="accent1"/>
-          </a:effectRef>
-          <a:fontRef idx="minor">
-            <a:schemeClr val="lt1"/>
-          </a:fontRef>
-        </p:style>
-        <p:txBody>
-          <a:bodyPr rtlCol="0" anchor="ctr"/>
-          <a:lstStyle/>
-          <a:p>
-            <a:pPr algn="ctr"/>
-          </a:p>
-        </p:txBody>
-      </p:sp>
-      <p:sp>
-        <p:nvSpPr>
-          <p:cNvPr id="39" name="TextBox 38"/>
-          <p:cNvSpPr txBox="1"/>
-          <p:nvPr/>
-        </p:nvSpPr>
-        <p:spPr>
-          <a:xfrm>
-            <a:off x="5096256" y="3758184"/>
-            <a:ext cx="4392168" cy="841248"/>
-          </a:xfrm>
-          <a:prstGeom prst="rect">
-            <a:avLst/>
-          </a:prstGeom>
-          <a:noFill/>
-        </p:spPr>
-        <p:txBody>
-          <a:bodyPr wrap="square" tIns="36576" bIns="36576" anchor="t">
-            <a:spAutoFit/>
-          </a:bodyPr>
-          <a:lstStyle/>
-          <a:p>
-            <a:pPr>
-              <a:lnSpc>
-                <a:spcPts val="1944"/>
-              </a:lnSpc>
-              <a:spcBef>
-                <a:spcPts val="0"/>
-              </a:spcBef>
-              <a:spcAft>
-                <a:spcPts val="0"/>
-              </a:spcAft>
-              <a:defRPr sz="1800" b="1">
-                <a:solidFill>
-                  <a:srgbClr val="182B3A"/>
-                </a:solidFill>
-                <a:latin typeface="Arial"/>
-              </a:defRPr>
-            </a:pPr>
-            <a:r>
-              <a:t>2.  Red:blue = 4:3. There are 15 blue counters. How many red counters?</a:t>
-            </a:r>
-          </a:p>
-        </p:txBody>
-      </p:sp>
-      <p:sp>
-        <p:nvSpPr>
-          <p:cNvPr id="40" name="TextBox 39"/>
-          <p:cNvSpPr txBox="1"/>
-          <p:nvPr/>
-        </p:nvSpPr>
-        <p:spPr>
-          <a:xfrm>
-            <a:off x="5215128" y="4581144"/>
-            <a:ext cx="2029968" cy="310896"/>
-          </a:xfrm>
-          <a:prstGeom prst="rect">
-            <a:avLst/>
-          </a:prstGeom>
-          <a:noFill/>
-        </p:spPr>
-        <p:txBody>
-          <a:bodyPr wrap="none" lIns="0" rIns="0" tIns="0" bIns="0">
-            <a:spAutoFit/>
-          </a:bodyPr>
-          <a:lstStyle/>
-          <a:p>
-            <a:pPr algn="l">
-              <a:lnSpc>
-                <a:spcPts val="2128"/>
-              </a:lnSpc>
-              <a:spcBef>
-                <a:spcPts val="0"/>
-              </a:spcBef>
-              <a:spcAft>
-                <a:spcPts val="0"/>
-              </a:spcAft>
-              <a:defRPr sz="1900" b="0">
-                <a:solidFill>
-                  <a:srgbClr val="182B3A"/>
-                </a:solidFill>
-                <a:latin typeface="Arial"/>
-              </a:defRPr>
-            </a:pPr>
-            <a:r>
-              <a:t>15 ÷ 4 = 3.75</a:t>
-            </a:r>
-          </a:p>
-        </p:txBody>
-      </p:sp>
-      <p:sp>
-        <p:nvSpPr>
-          <p:cNvPr id="41" name="TextBox 40"/>
-          <p:cNvSpPr txBox="1"/>
-          <p:nvPr/>
-        </p:nvSpPr>
-        <p:spPr>
-          <a:xfrm>
-            <a:off x="7354824" y="4581144"/>
-            <a:ext cx="2029968" cy="310896"/>
-          </a:xfrm>
-          <a:prstGeom prst="rect">
-            <a:avLst/>
-          </a:prstGeom>
-          <a:noFill/>
-        </p:spPr>
-        <p:txBody>
-          <a:bodyPr wrap="none" lIns="0" rIns="0" tIns="0" bIns="0">
-            <a:spAutoFit/>
-          </a:bodyPr>
-          <a:lstStyle/>
-          <a:p>
-            <a:pPr algn="l">
-              <a:lnSpc>
-                <a:spcPts val="2128"/>
-              </a:lnSpc>
-              <a:spcBef>
-                <a:spcPts val="0"/>
-              </a:spcBef>
-              <a:spcAft>
-                <a:spcPts val="0"/>
-              </a:spcAft>
-              <a:defRPr sz="1900" b="0">
-                <a:solidFill>
-                  <a:srgbClr val="182B3A"/>
-                </a:solidFill>
-                <a:latin typeface="Arial"/>
-              </a:defRPr>
-            </a:pPr>
-            <a:r>
-              <a:t>Red = 3 × 3.75</a:t>
-            </a:r>
-          </a:p>
-        </p:txBody>
-      </p:sp>
-      <p:sp>
-        <p:nvSpPr>
-          <p:cNvPr id="42" name="TextBox 41"/>
-          <p:cNvSpPr txBox="1"/>
-          <p:nvPr/>
-        </p:nvSpPr>
-        <p:spPr>
-          <a:xfrm>
-            <a:off x="7354824" y="4864608"/>
-            <a:ext cx="2029968" cy="310896"/>
-          </a:xfrm>
-          <a:prstGeom prst="rect">
-            <a:avLst/>
-          </a:prstGeom>
-          <a:noFill/>
-        </p:spPr>
-        <p:txBody>
-          <a:bodyPr wrap="none" lIns="0" rIns="0" tIns="0" bIns="0">
-            <a:spAutoFit/>
-          </a:bodyPr>
-          <a:lstStyle/>
-          <a:p>
-            <a:pPr algn="l">
-              <a:lnSpc>
-                <a:spcPts val="2128"/>
-              </a:lnSpc>
-              <a:spcBef>
-                <a:spcPts val="0"/>
-              </a:spcBef>
-              <a:spcAft>
-                <a:spcPts val="0"/>
-              </a:spcAft>
-              <a:defRPr sz="1900" b="0">
-                <a:solidFill>
-                  <a:srgbClr val="182B3A"/>
-                </a:solidFill>
-                <a:latin typeface="Arial"/>
-              </a:defRPr>
-            </a:pPr>
-            <a:r>
-              <a:t>Red = 11.25</a:t>
-            </a:r>
-          </a:p>
-        </p:txBody>
-      </p:sp>
-      <p:sp>
-        <p:nvSpPr>
-          <p:cNvPr id="43" name="TextBox 42"/>
-          <p:cNvSpPr txBox="1"/>
-          <p:nvPr/>
-        </p:nvSpPr>
-        <p:spPr>
-          <a:xfrm>
-            <a:off x="5215128" y="5394960"/>
-            <a:ext cx="4206240" cy="256032"/>
-          </a:xfrm>
-          <a:prstGeom prst="rect">
-            <a:avLst/>
-          </a:prstGeom>
-          <a:noFill/>
-        </p:spPr>
-        <p:txBody>
-          <a:bodyPr wrap="none" lIns="0" rIns="0" tIns="0" bIns="0">
-            <a:spAutoFit/>
-          </a:bodyPr>
-          <a:lstStyle/>
-          <a:p>
-            <a:pPr algn="l">
-              <a:lnSpc>
-                <a:spcPts val="2016"/>
-              </a:lnSpc>
-              <a:spcBef>
-                <a:spcPts val="0"/>
-              </a:spcBef>
-              <a:spcAft>
-                <a:spcPts val="0"/>
-              </a:spcAft>
-              <a:defRPr sz="1800" b="0">
-                <a:solidFill>
-                  <a:srgbClr val="182B3A"/>
-                </a:solidFill>
-                <a:latin typeface="Arial"/>
-              </a:defRPr>
-            </a:pPr>
-            <a:r>
-              <a:t>11.25 red counters</a:t>
-            </a:r>
-          </a:p>
-        </p:txBody>
-      </p:sp>
-      <p:sp>
-        <p:nvSpPr>
-          <p:cNvPr id="44" name="Rectangle 43"/>
-          <p:cNvSpPr/>
-          <p:nvPr/>
-        </p:nvSpPr>
-        <p:spPr>
-          <a:xfrm>
-            <a:off x="5004816" y="5724144"/>
-            <a:ext cx="4588764" cy="1929384"/>
-          </a:xfrm>
-          <a:prstGeom prst="rect">
-            <a:avLst/>
-          </a:prstGeom>
-          <a:solidFill>
-            <a:srgbClr val="FFFFFF"/>
-          </a:solidFill>
-          <a:ln w="7620">
-            <a:solidFill>
-              <a:srgbClr val="D8E0E6"/>
-            </a:solidFill>
-          </a:ln>
-        </p:spPr>
-        <p:style>
-          <a:lnRef idx="1">
-            <a:schemeClr val="accent1"/>
-          </a:lnRef>
-          <a:fillRef idx="3">
-            <a:schemeClr val="accent1"/>
-          </a:fillRef>
-          <a:effectRef idx="0">
-            <a:schemeClr val="accent1"/>
-          </a:effectRef>
-          <a:fontRef idx="minor">
-            <a:schemeClr val="lt1"/>
-          </a:fontRef>
-        </p:style>
-        <p:txBody>
-          <a:bodyPr rtlCol="0" anchor="ctr"/>
-          <a:lstStyle/>
-          <a:p>
-            <a:pPr algn="ctr"/>
-          </a:p>
-        </p:txBody>
-      </p:sp>
-      <p:sp>
-        <p:nvSpPr>
-          <p:cNvPr id="45" name="TextBox 44"/>
-          <p:cNvSpPr txBox="1"/>
-          <p:nvPr/>
-        </p:nvSpPr>
-        <p:spPr>
-          <a:xfrm>
-            <a:off x="5096256" y="5760720"/>
-            <a:ext cx="4392168" cy="841248"/>
-          </a:xfrm>
-          <a:prstGeom prst="rect">
-            <a:avLst/>
-          </a:prstGeom>
-          <a:noFill/>
-        </p:spPr>
-        <p:txBody>
-          <a:bodyPr wrap="square" tIns="36576" bIns="36576" anchor="t">
-            <a:spAutoFit/>
-          </a:bodyPr>
-          <a:lstStyle/>
-          <a:p>
-            <a:pPr>
-              <a:lnSpc>
-                <a:spcPts val="1944"/>
-              </a:lnSpc>
-              <a:spcBef>
-                <a:spcPts val="0"/>
-              </a:spcBef>
-              <a:spcAft>
-                <a:spcPts val="0"/>
-              </a:spcAft>
-              <a:defRPr sz="1800" b="1">
-                <a:solidFill>
-                  <a:srgbClr val="182B3A"/>
-                </a:solidFill>
-                <a:latin typeface="Arial"/>
-              </a:defRPr>
-            </a:pPr>
-            <a:r>
-              <a:t>3.  A and B share 56 counters in ratio 3:5. How many more does B get than A?</a:t>
-            </a:r>
-          </a:p>
-        </p:txBody>
-      </p:sp>
-      <p:sp>
-        <p:nvSpPr>
-          <p:cNvPr id="46" name="TextBox 45"/>
-          <p:cNvSpPr txBox="1"/>
-          <p:nvPr/>
-        </p:nvSpPr>
-        <p:spPr>
-          <a:xfrm>
-            <a:off x="5215128" y="6583679"/>
-            <a:ext cx="2029968" cy="310896"/>
-          </a:xfrm>
-          <a:prstGeom prst="rect">
-            <a:avLst/>
-          </a:prstGeom>
-          <a:noFill/>
-        </p:spPr>
-        <p:txBody>
-          <a:bodyPr wrap="none" lIns="0" rIns="0" tIns="0" bIns="0">
-            <a:spAutoFit/>
-          </a:bodyPr>
-          <a:lstStyle/>
-          <a:p>
-            <a:pPr algn="l">
-              <a:lnSpc>
-                <a:spcPts val="2128"/>
-              </a:lnSpc>
-              <a:spcBef>
-                <a:spcPts val="0"/>
-              </a:spcBef>
-              <a:spcAft>
-                <a:spcPts val="0"/>
-              </a:spcAft>
-              <a:defRPr sz="1900" b="0">
-                <a:solidFill>
-                  <a:srgbClr val="182B3A"/>
-                </a:solidFill>
-                <a:latin typeface="Arial"/>
-              </a:defRPr>
-            </a:pPr>
-            <a:r>
-              <a:t>3 + 5 = 8 parts</a:t>
-            </a:r>
-          </a:p>
-        </p:txBody>
-      </p:sp>
-      <p:sp>
-        <p:nvSpPr>
-          <p:cNvPr id="47" name="TextBox 46"/>
-          <p:cNvSpPr txBox="1"/>
-          <p:nvPr/>
-        </p:nvSpPr>
-        <p:spPr>
-          <a:xfrm>
-            <a:off x="5215128" y="6867144"/>
-            <a:ext cx="2029968" cy="310896"/>
-          </a:xfrm>
-          <a:prstGeom prst="rect">
-            <a:avLst/>
-          </a:prstGeom>
-          <a:noFill/>
-        </p:spPr>
-        <p:txBody>
-          <a:bodyPr wrap="none" lIns="0" rIns="0" tIns="0" bIns="0">
-            <a:spAutoFit/>
-          </a:bodyPr>
-          <a:lstStyle/>
-          <a:p>
-            <a:pPr algn="l">
-              <a:lnSpc>
-                <a:spcPts val="2128"/>
-              </a:lnSpc>
-              <a:spcBef>
-                <a:spcPts val="0"/>
-              </a:spcBef>
-              <a:spcAft>
-                <a:spcPts val="0"/>
-              </a:spcAft>
-              <a:defRPr sz="1900" b="0">
-                <a:solidFill>
-                  <a:srgbClr val="182B3A"/>
-                </a:solidFill>
-                <a:latin typeface="Arial"/>
-              </a:defRPr>
-            </a:pPr>
-            <a:r>
-              <a:t>56 ÷ 8 = 7</a:t>
-            </a:r>
-          </a:p>
-        </p:txBody>
-      </p:sp>
-      <p:sp>
-        <p:nvSpPr>
-          <p:cNvPr id="48" name="TextBox 47"/>
-          <p:cNvSpPr txBox="1"/>
-          <p:nvPr/>
-        </p:nvSpPr>
-        <p:spPr>
-          <a:xfrm>
-            <a:off x="5215128" y="7150608"/>
-            <a:ext cx="2029968" cy="310896"/>
-          </a:xfrm>
-          <a:prstGeom prst="rect">
-            <a:avLst/>
-          </a:prstGeom>
-          <a:noFill/>
-        </p:spPr>
-        <p:txBody>
-          <a:bodyPr wrap="none" lIns="0" rIns="0" tIns="0" bIns="0">
-            <a:spAutoFit/>
-          </a:bodyPr>
-          <a:lstStyle/>
-          <a:p>
-            <a:pPr algn="l">
-              <a:lnSpc>
-                <a:spcPts val="2128"/>
-              </a:lnSpc>
-              <a:spcBef>
-                <a:spcPts val="0"/>
-              </a:spcBef>
-              <a:spcAft>
-                <a:spcPts val="0"/>
-              </a:spcAft>
-              <a:defRPr sz="1900" b="0">
-                <a:solidFill>
-                  <a:srgbClr val="182B3A"/>
-                </a:solidFill>
-                <a:latin typeface="Arial"/>
-              </a:defRPr>
-            </a:pPr>
-            <a:r>
-              <a:t>A = 3 × 7 = 21</a:t>
-            </a:r>
-          </a:p>
-        </p:txBody>
-      </p:sp>
-      <p:sp>
-        <p:nvSpPr>
-          <p:cNvPr id="49" name="TextBox 48"/>
-          <p:cNvSpPr txBox="1"/>
-          <p:nvPr/>
-        </p:nvSpPr>
-        <p:spPr>
-          <a:xfrm>
-            <a:off x="7354824" y="6583679"/>
-            <a:ext cx="2029968" cy="310896"/>
-          </a:xfrm>
-          <a:prstGeom prst="rect">
-            <a:avLst/>
-          </a:prstGeom>
-          <a:noFill/>
-        </p:spPr>
-        <p:txBody>
-          <a:bodyPr wrap="none" lIns="0" rIns="0" tIns="0" bIns="0">
-            <a:spAutoFit/>
-          </a:bodyPr>
-          <a:lstStyle/>
-          <a:p>
-            <a:pPr algn="l">
-              <a:lnSpc>
-                <a:spcPts val="2128"/>
-              </a:lnSpc>
-              <a:spcBef>
-                <a:spcPts val="0"/>
-              </a:spcBef>
-              <a:spcAft>
-                <a:spcPts val="0"/>
-              </a:spcAft>
-              <a:defRPr sz="1900" b="0">
-                <a:solidFill>
-                  <a:srgbClr val="182B3A"/>
-                </a:solidFill>
-                <a:latin typeface="Arial"/>
-              </a:defRPr>
-            </a:pPr>
-            <a:r>
-              <a:t>B = 5 × 7 = 35</a:t>
-            </a:r>
-          </a:p>
-        </p:txBody>
-      </p:sp>
-      <p:sp>
-        <p:nvSpPr>
-          <p:cNvPr id="50" name="TextBox 49"/>
-          <p:cNvSpPr txBox="1"/>
-          <p:nvPr/>
-        </p:nvSpPr>
-        <p:spPr>
-          <a:xfrm>
-            <a:off x="7354824" y="6867144"/>
-            <a:ext cx="2029968" cy="310896"/>
-          </a:xfrm>
-          <a:prstGeom prst="rect">
-            <a:avLst/>
-          </a:prstGeom>
-          <a:noFill/>
-        </p:spPr>
-        <p:txBody>
-          <a:bodyPr wrap="none" lIns="0" rIns="0" tIns="0" bIns="0">
-            <a:spAutoFit/>
-          </a:bodyPr>
-          <a:lstStyle/>
-          <a:p>
-            <a:pPr algn="l">
-              <a:lnSpc>
-                <a:spcPts val="2128"/>
-              </a:lnSpc>
-              <a:spcBef>
-                <a:spcPts val="0"/>
-              </a:spcBef>
-              <a:spcAft>
-                <a:spcPts val="0"/>
-              </a:spcAft>
-              <a:defRPr sz="1900" b="0">
-                <a:solidFill>
-                  <a:srgbClr val="182B3A"/>
-                </a:solidFill>
-                <a:latin typeface="Arial"/>
-              </a:defRPr>
-            </a:pPr>
-            <a:r>
-              <a:t>21 + 35 = 56</a:t>
-            </a:r>
-          </a:p>
-        </p:txBody>
-      </p:sp>
-      <p:sp>
-        <p:nvSpPr>
-          <p:cNvPr id="51" name="TextBox 50"/>
-          <p:cNvSpPr txBox="1"/>
-          <p:nvPr/>
-        </p:nvSpPr>
-        <p:spPr>
-          <a:xfrm>
-            <a:off x="5215128" y="7397496"/>
-            <a:ext cx="4206240" cy="256032"/>
-          </a:xfrm>
-          <a:prstGeom prst="rect">
-            <a:avLst/>
-          </a:prstGeom>
-          <a:noFill/>
-        </p:spPr>
-        <p:txBody>
-          <a:bodyPr wrap="none" lIns="0" rIns="0" tIns="0" bIns="0">
-            <a:spAutoFit/>
-          </a:bodyPr>
-          <a:lstStyle/>
-          <a:p>
-            <a:pPr algn="l">
-              <a:lnSpc>
-                <a:spcPts val="2016"/>
-              </a:lnSpc>
-              <a:spcBef>
-                <a:spcPts val="0"/>
-              </a:spcBef>
-              <a:spcAft>
-                <a:spcPts val="0"/>
-              </a:spcAft>
-              <a:defRPr sz="1800" b="0">
-                <a:solidFill>
-                  <a:srgbClr val="182B3A"/>
-                </a:solidFill>
-                <a:latin typeface="Arial"/>
-              </a:defRPr>
-            </a:pPr>
-            <a:r>
-              <a:t>B gets 56 more counters</a:t>
-            </a:r>
-          </a:p>
-        </p:txBody>
-      </p:sp>
-      <p:sp>
-        <p:nvSpPr>
-          <p:cNvPr id="52" name="Rectangle 51"/>
-          <p:cNvSpPr/>
-          <p:nvPr/>
-        </p:nvSpPr>
-        <p:spPr>
-          <a:xfrm>
-            <a:off x="9625584" y="1234440"/>
-            <a:ext cx="4588764" cy="420624"/>
-          </a:xfrm>
-          <a:prstGeom prst="rect">
-            <a:avLst/>
-          </a:prstGeom>
-          <a:solidFill>
-            <a:srgbClr val="754B87"/>
-          </a:solidFill>
-          <a:ln>
-            <a:noFill/>
-          </a:ln>
-        </p:spPr>
-        <p:style>
-          <a:lnRef idx="1">
-            <a:schemeClr val="accent1"/>
-          </a:lnRef>
-          <a:fillRef idx="3">
-            <a:schemeClr val="accent1"/>
-          </a:fillRef>
-          <a:effectRef idx="0">
-            <a:schemeClr val="accent1"/>
-          </a:effectRef>
-          <a:fontRef idx="minor">
-            <a:schemeClr val="lt1"/>
-          </a:fontRef>
-        </p:style>
-        <p:txBody>
-          <a:bodyPr rtlCol="0" anchor="ctr"/>
-          <a:lstStyle/>
-          <a:p>
-            <a:pPr algn="ctr"/>
-          </a:p>
-        </p:txBody>
-      </p:sp>
-      <p:sp>
-        <p:nvSpPr>
-          <p:cNvPr id="53" name="TextBox 52"/>
-          <p:cNvSpPr txBox="1"/>
-          <p:nvPr/>
-        </p:nvSpPr>
-        <p:spPr>
-          <a:xfrm>
-            <a:off x="9689592" y="1261872"/>
-            <a:ext cx="4474464" cy="347472"/>
-          </a:xfrm>
-          <a:prstGeom prst="rect">
-            <a:avLst/>
-          </a:prstGeom>
-          <a:noFill/>
-        </p:spPr>
-        <p:txBody>
-          <a:bodyPr wrap="square" tIns="36576" bIns="36576" anchor="t">
-            <a:spAutoFit/>
-          </a:bodyPr>
-          <a:lstStyle/>
-          <a:p>
-            <a:pPr>
-              <a:lnSpc>
-                <a:spcPts val="2160"/>
-              </a:lnSpc>
-              <a:spcBef>
-                <a:spcPts val="0"/>
-              </a:spcBef>
-              <a:spcAft>
-                <a:spcPts val="0"/>
-              </a:spcAft>
-              <a:defRPr sz="2000" b="1">
-                <a:solidFill>
-                  <a:srgbClr val="FFFFFF"/>
-                </a:solidFill>
-                <a:latin typeface="Arial"/>
-              </a:defRPr>
-            </a:pPr>
-            <a:r>
-              <a:t>Thread 3: Depth</a:t>
-            </a:r>
-          </a:p>
-        </p:txBody>
-      </p:sp>
-      <p:sp>
-        <p:nvSpPr>
-          <p:cNvPr id="54" name="Rectangle 53"/>
-          <p:cNvSpPr/>
-          <p:nvPr/>
-        </p:nvSpPr>
-        <p:spPr>
-          <a:xfrm>
-            <a:off x="9625584" y="1719072"/>
-            <a:ext cx="4588764" cy="1929384"/>
-          </a:xfrm>
-          <a:prstGeom prst="rect">
-            <a:avLst/>
-          </a:prstGeom>
-          <a:solidFill>
-            <a:srgbClr val="FFFFFF"/>
-          </a:solidFill>
-          <a:ln w="7620">
-            <a:solidFill>
-              <a:srgbClr val="D8E0E6"/>
-            </a:solidFill>
-          </a:ln>
-        </p:spPr>
-        <p:style>
-          <a:lnRef idx="1">
-            <a:schemeClr val="accent1"/>
-          </a:lnRef>
-          <a:fillRef idx="3">
-            <a:schemeClr val="accent1"/>
-          </a:fillRef>
-          <a:effectRef idx="0">
-            <a:schemeClr val="accent1"/>
-          </a:effectRef>
-          <a:fontRef idx="minor">
-            <a:schemeClr val="lt1"/>
-          </a:fontRef>
-        </p:style>
-        <p:txBody>
-          <a:bodyPr rtlCol="0" anchor="ctr"/>
-          <a:lstStyle/>
-          <a:p>
-            <a:pPr algn="ctr"/>
-          </a:p>
-        </p:txBody>
-      </p:sp>
-      <p:sp>
-        <p:nvSpPr>
-          <p:cNvPr id="55" name="TextBox 54"/>
-          <p:cNvSpPr txBox="1"/>
-          <p:nvPr/>
-        </p:nvSpPr>
-        <p:spPr>
-          <a:xfrm>
-            <a:off x="9717024" y="1755648"/>
-            <a:ext cx="4392168" cy="841248"/>
-          </a:xfrm>
-          <a:prstGeom prst="rect">
-            <a:avLst/>
-          </a:prstGeom>
-          <a:noFill/>
-        </p:spPr>
-        <p:txBody>
-          <a:bodyPr wrap="square" tIns="36576" bIns="36576" anchor="t">
-            <a:spAutoFit/>
-          </a:bodyPr>
-          <a:lstStyle/>
-          <a:p>
-            <a:pPr>
-              <a:lnSpc>
-                <a:spcPts val="1944"/>
-              </a:lnSpc>
-              <a:spcBef>
-                <a:spcPts val="0"/>
-              </a:spcBef>
-              <a:spcAft>
-                <a:spcPts val="0"/>
-              </a:spcAft>
-              <a:defRPr sz="1800" b="1">
-                <a:solidFill>
-                  <a:srgbClr val="182B3A"/>
-                </a:solidFill>
-                <a:latin typeface="Arial"/>
-              </a:defRPr>
-            </a:pPr>
-            <a:r>
-              <a:t>1.  A group has 65 people. Adults:children = 5:8. How many more children than adults?</a:t>
-            </a:r>
-          </a:p>
-        </p:txBody>
-      </p:sp>
-      <p:sp>
-        <p:nvSpPr>
-          <p:cNvPr id="56" name="TextBox 55"/>
-          <p:cNvSpPr txBox="1"/>
-          <p:nvPr/>
-        </p:nvSpPr>
-        <p:spPr>
-          <a:xfrm>
-            <a:off x="9835896" y="2578608"/>
-            <a:ext cx="2029968" cy="310896"/>
-          </a:xfrm>
-          <a:prstGeom prst="rect">
-            <a:avLst/>
-          </a:prstGeom>
-          <a:noFill/>
-        </p:spPr>
-        <p:txBody>
-          <a:bodyPr wrap="none" lIns="0" rIns="0" tIns="0" bIns="0">
-            <a:spAutoFit/>
-          </a:bodyPr>
-          <a:lstStyle/>
-          <a:p>
-            <a:pPr algn="l">
-              <a:lnSpc>
-                <a:spcPts val="2128"/>
-              </a:lnSpc>
-              <a:spcBef>
-                <a:spcPts val="0"/>
-              </a:spcBef>
-              <a:spcAft>
-                <a:spcPts val="0"/>
-              </a:spcAft>
-              <a:defRPr sz="1900" b="0">
-                <a:solidFill>
-                  <a:srgbClr val="182B3A"/>
-                </a:solidFill>
-                <a:latin typeface="Arial"/>
-              </a:defRPr>
-            </a:pPr>
-            <a:r>
-              <a:t>5 + 8 = 13 parts</a:t>
-            </a:r>
-          </a:p>
-        </p:txBody>
-      </p:sp>
-      <p:sp>
-        <p:nvSpPr>
-          <p:cNvPr id="57" name="TextBox 56"/>
-          <p:cNvSpPr txBox="1"/>
-          <p:nvPr/>
-        </p:nvSpPr>
-        <p:spPr>
-          <a:xfrm>
-            <a:off x="9835896" y="2862072"/>
-            <a:ext cx="2029968" cy="310896"/>
-          </a:xfrm>
-          <a:prstGeom prst="rect">
-            <a:avLst/>
-          </a:prstGeom>
-          <a:noFill/>
-        </p:spPr>
-        <p:txBody>
-          <a:bodyPr wrap="none" lIns="0" rIns="0" tIns="0" bIns="0">
-            <a:spAutoFit/>
-          </a:bodyPr>
-          <a:lstStyle/>
-          <a:p>
-            <a:pPr algn="l">
-              <a:lnSpc>
-                <a:spcPts val="2128"/>
-              </a:lnSpc>
-              <a:spcBef>
-                <a:spcPts val="0"/>
-              </a:spcBef>
-              <a:spcAft>
-                <a:spcPts val="0"/>
-              </a:spcAft>
-              <a:defRPr sz="1900" b="0">
-                <a:solidFill>
-                  <a:srgbClr val="182B3A"/>
-                </a:solidFill>
-                <a:latin typeface="Arial"/>
-              </a:defRPr>
-            </a:pPr>
-            <a:r>
-              <a:t>65 ÷ 13 = 5</a:t>
-            </a:r>
-          </a:p>
-        </p:txBody>
-      </p:sp>
-      <p:sp>
-        <p:nvSpPr>
-          <p:cNvPr id="58" name="TextBox 57"/>
-          <p:cNvSpPr txBox="1"/>
-          <p:nvPr/>
-        </p:nvSpPr>
-        <p:spPr>
-          <a:xfrm>
-            <a:off x="9835896" y="3145536"/>
-            <a:ext cx="2029968" cy="310896"/>
-          </a:xfrm>
-          <a:prstGeom prst="rect">
-            <a:avLst/>
-          </a:prstGeom>
-          <a:noFill/>
-        </p:spPr>
-        <p:txBody>
-          <a:bodyPr wrap="none" lIns="0" rIns="0" tIns="0" bIns="0">
-            <a:spAutoFit/>
-          </a:bodyPr>
-          <a:lstStyle/>
-          <a:p>
-            <a:pPr algn="l">
-              <a:lnSpc>
-                <a:spcPts val="2128"/>
-              </a:lnSpc>
-              <a:spcBef>
-                <a:spcPts val="0"/>
-              </a:spcBef>
-              <a:spcAft>
-                <a:spcPts val="0"/>
-              </a:spcAft>
-              <a:defRPr sz="1900" b="0">
-                <a:solidFill>
-                  <a:srgbClr val="182B3A"/>
-                </a:solidFill>
-                <a:latin typeface="Arial"/>
-              </a:defRPr>
-            </a:pPr>
-            <a:r>
-              <a:t>Adults = 5 × 5 = 25</a:t>
-            </a:r>
-          </a:p>
-        </p:txBody>
-      </p:sp>
-      <p:sp>
-        <p:nvSpPr>
-          <p:cNvPr id="59" name="TextBox 58"/>
-          <p:cNvSpPr txBox="1"/>
-          <p:nvPr/>
-        </p:nvSpPr>
-        <p:spPr>
-          <a:xfrm>
-            <a:off x="11975592" y="2578608"/>
-            <a:ext cx="2029968" cy="310896"/>
-          </a:xfrm>
-          <a:prstGeom prst="rect">
-            <a:avLst/>
-          </a:prstGeom>
-          <a:noFill/>
-        </p:spPr>
-        <p:txBody>
-          <a:bodyPr wrap="none" lIns="0" rIns="0" tIns="0" bIns="0">
-            <a:spAutoFit/>
-          </a:bodyPr>
-          <a:lstStyle/>
-          <a:p>
-            <a:pPr algn="l">
-              <a:lnSpc>
-                <a:spcPts val="2128"/>
-              </a:lnSpc>
-              <a:spcBef>
-                <a:spcPts val="0"/>
-              </a:spcBef>
-              <a:spcAft>
-                <a:spcPts val="0"/>
-              </a:spcAft>
-              <a:defRPr sz="1900" b="0">
-                <a:solidFill>
-                  <a:srgbClr val="182B3A"/>
-                </a:solidFill>
-                <a:latin typeface="Arial"/>
-              </a:defRPr>
-            </a:pPr>
-            <a:r>
-              <a:t>8 × 5 = 40</a:t>
-            </a:r>
-          </a:p>
-        </p:txBody>
-      </p:sp>
-      <p:sp>
-        <p:nvSpPr>
-          <p:cNvPr id="60" name="TextBox 59"/>
-          <p:cNvSpPr txBox="1"/>
-          <p:nvPr/>
-        </p:nvSpPr>
-        <p:spPr>
-          <a:xfrm>
-            <a:off x="11975592" y="2862072"/>
-            <a:ext cx="2029968" cy="310896"/>
-          </a:xfrm>
-          <a:prstGeom prst="rect">
-            <a:avLst/>
-          </a:prstGeom>
-          <a:noFill/>
-        </p:spPr>
-        <p:txBody>
-          <a:bodyPr wrap="none" lIns="0" rIns="0" tIns="0" bIns="0">
-            <a:spAutoFit/>
-          </a:bodyPr>
-          <a:lstStyle/>
-          <a:p>
-            <a:pPr algn="l">
-              <a:lnSpc>
-                <a:spcPts val="2128"/>
-              </a:lnSpc>
-              <a:spcBef>
-                <a:spcPts val="0"/>
-              </a:spcBef>
-              <a:spcAft>
-                <a:spcPts val="0"/>
-              </a:spcAft>
-              <a:defRPr sz="1900" b="0">
-                <a:solidFill>
-                  <a:srgbClr val="182B3A"/>
-                </a:solidFill>
-                <a:latin typeface="Arial"/>
-              </a:defRPr>
-            </a:pPr>
-            <a:r>
-              <a:t>8 − 5 = 3</a:t>
-            </a:r>
-          </a:p>
-        </p:txBody>
-      </p:sp>
-      <p:sp>
-        <p:nvSpPr>
-          <p:cNvPr id="61" name="TextBox 60"/>
-          <p:cNvSpPr txBox="1"/>
-          <p:nvPr/>
-        </p:nvSpPr>
-        <p:spPr>
-          <a:xfrm>
-            <a:off x="9835896" y="3392424"/>
-            <a:ext cx="4206240" cy="256032"/>
-          </a:xfrm>
-          <a:prstGeom prst="rect">
-            <a:avLst/>
-          </a:prstGeom>
-          <a:noFill/>
-        </p:spPr>
-        <p:txBody>
-          <a:bodyPr wrap="none" lIns="0" rIns="0" tIns="0" bIns="0">
-            <a:spAutoFit/>
-          </a:bodyPr>
-          <a:lstStyle/>
-          <a:p>
-            <a:pPr algn="l">
-              <a:lnSpc>
-                <a:spcPts val="2016"/>
-              </a:lnSpc>
-              <a:spcBef>
-                <a:spcPts val="0"/>
-              </a:spcBef>
-              <a:spcAft>
-                <a:spcPts val="0"/>
-              </a:spcAft>
-              <a:defRPr sz="1800" b="0">
-                <a:solidFill>
-                  <a:srgbClr val="182B3A"/>
-                </a:solidFill>
-                <a:latin typeface="Arial"/>
-              </a:defRPr>
-            </a:pPr>
-            <a:r>
-              <a:t>3 more children</a:t>
-            </a:r>
-          </a:p>
-        </p:txBody>
-      </p:sp>
-      <p:sp>
-        <p:nvSpPr>
-          <p:cNvPr id="62" name="Rectangle 61"/>
-          <p:cNvSpPr/>
-          <p:nvPr/>
-        </p:nvSpPr>
-        <p:spPr>
-          <a:xfrm>
-            <a:off x="9625584" y="3721608"/>
-            <a:ext cx="4588764" cy="1929384"/>
-          </a:xfrm>
-          <a:prstGeom prst="rect">
-            <a:avLst/>
-          </a:prstGeom>
-          <a:solidFill>
-            <a:srgbClr val="FFFFFF"/>
-          </a:solidFill>
-          <a:ln w="7620">
-            <a:solidFill>
-              <a:srgbClr val="D8E0E6"/>
-            </a:solidFill>
-          </a:ln>
-        </p:spPr>
-        <p:style>
-          <a:lnRef idx="1">
-            <a:schemeClr val="accent1"/>
-          </a:lnRef>
-          <a:fillRef idx="3">
-            <a:schemeClr val="accent1"/>
-          </a:fillRef>
-          <a:effectRef idx="0">
-            <a:schemeClr val="accent1"/>
-          </a:effectRef>
-          <a:fontRef idx="minor">
-            <a:schemeClr val="lt1"/>
-          </a:fontRef>
-        </p:style>
-        <p:txBody>
-          <a:bodyPr rtlCol="0" anchor="ctr"/>
-          <a:lstStyle/>
-          <a:p>
-            <a:pPr algn="ctr"/>
-          </a:p>
-        </p:txBody>
-      </p:sp>
-      <p:sp>
-        <p:nvSpPr>
-          <p:cNvPr id="63" name="TextBox 62"/>
-          <p:cNvSpPr txBox="1"/>
-          <p:nvPr/>
-        </p:nvSpPr>
-        <p:spPr>
-          <a:xfrm>
-            <a:off x="9717024" y="3758184"/>
-            <a:ext cx="4392168" cy="841248"/>
-          </a:xfrm>
-          <a:prstGeom prst="rect">
-            <a:avLst/>
-          </a:prstGeom>
-          <a:noFill/>
-        </p:spPr>
-        <p:txBody>
-          <a:bodyPr wrap="square" tIns="36576" bIns="36576" anchor="t">
-            <a:spAutoFit/>
-          </a:bodyPr>
-          <a:lstStyle/>
-          <a:p>
-            <a:pPr>
-              <a:lnSpc>
-                <a:spcPts val="1944"/>
-              </a:lnSpc>
-              <a:spcBef>
-                <a:spcPts val="0"/>
-              </a:spcBef>
-              <a:spcAft>
-                <a:spcPts val="0"/>
-              </a:spcAft>
-              <a:defRPr sz="1800" b="1">
-                <a:solidFill>
-                  <a:srgbClr val="182B3A"/>
-                </a:solidFill>
-                <a:latin typeface="Arial"/>
-              </a:defRPr>
-            </a:pPr>
-            <a:r>
-              <a:t>2.  Two ribbon lengths are in ratio 3:8 and differ by 35 cm. Find their total length.</a:t>
-            </a:r>
-          </a:p>
-        </p:txBody>
-      </p:sp>
-      <p:sp>
-        <p:nvSpPr>
-          <p:cNvPr id="64" name="TextBox 63"/>
-          <p:cNvSpPr txBox="1"/>
-          <p:nvPr/>
-        </p:nvSpPr>
-        <p:spPr>
-          <a:xfrm>
-            <a:off x="9835896" y="4581144"/>
-            <a:ext cx="2029968" cy="310896"/>
-          </a:xfrm>
-          <a:prstGeom prst="rect">
-            <a:avLst/>
-          </a:prstGeom>
-          <a:noFill/>
-        </p:spPr>
-        <p:txBody>
-          <a:bodyPr wrap="none" lIns="0" rIns="0" tIns="0" bIns="0">
-            <a:spAutoFit/>
-          </a:bodyPr>
-          <a:lstStyle/>
-          <a:p>
-            <a:pPr algn="l">
-              <a:lnSpc>
-                <a:spcPts val="2128"/>
-              </a:lnSpc>
-              <a:spcBef>
-                <a:spcPts val="0"/>
-              </a:spcBef>
-              <a:spcAft>
-                <a:spcPts val="0"/>
-              </a:spcAft>
-              <a:defRPr sz="1900" b="0">
-                <a:solidFill>
-                  <a:srgbClr val="182B3A"/>
-                </a:solidFill>
-                <a:latin typeface="Arial"/>
-              </a:defRPr>
-            </a:pPr>
-            <a:r>
-              <a:t>8 − 3 = 5 parts</a:t>
-            </a:r>
-          </a:p>
-        </p:txBody>
-      </p:sp>
-      <p:sp>
-        <p:nvSpPr>
-          <p:cNvPr id="65" name="TextBox 64"/>
-          <p:cNvSpPr txBox="1"/>
-          <p:nvPr/>
-        </p:nvSpPr>
-        <p:spPr>
-          <a:xfrm>
-            <a:off x="9835896" y="4864608"/>
-            <a:ext cx="2029968" cy="310896"/>
-          </a:xfrm>
-          <a:prstGeom prst="rect">
-            <a:avLst/>
-          </a:prstGeom>
-          <a:noFill/>
-        </p:spPr>
-        <p:txBody>
-          <a:bodyPr wrap="none" lIns="0" rIns="0" tIns="0" bIns="0">
-            <a:spAutoFit/>
-          </a:bodyPr>
-          <a:lstStyle/>
-          <a:p>
-            <a:pPr algn="l">
-              <a:lnSpc>
-                <a:spcPts val="2128"/>
-              </a:lnSpc>
-              <a:spcBef>
-                <a:spcPts val="0"/>
-              </a:spcBef>
-              <a:spcAft>
-                <a:spcPts val="0"/>
-              </a:spcAft>
-              <a:defRPr sz="1900" b="0">
-                <a:solidFill>
-                  <a:srgbClr val="182B3A"/>
-                </a:solidFill>
-                <a:latin typeface="Arial"/>
-              </a:defRPr>
-            </a:pPr>
-            <a:r>
-              <a:t>35 ÷ 5 = 7</a:t>
-            </a:r>
-          </a:p>
-        </p:txBody>
-      </p:sp>
-      <p:sp>
-        <p:nvSpPr>
-          <p:cNvPr id="66" name="TextBox 65"/>
-          <p:cNvSpPr txBox="1"/>
-          <p:nvPr/>
-        </p:nvSpPr>
-        <p:spPr>
-          <a:xfrm>
-            <a:off x="9835896" y="5148072"/>
-            <a:ext cx="2029968" cy="310896"/>
-          </a:xfrm>
-          <a:prstGeom prst="rect">
-            <a:avLst/>
-          </a:prstGeom>
-          <a:noFill/>
-        </p:spPr>
-        <p:txBody>
-          <a:bodyPr wrap="none" lIns="0" rIns="0" tIns="0" bIns="0">
-            <a:spAutoFit/>
-          </a:bodyPr>
-          <a:lstStyle/>
-          <a:p>
-            <a:pPr algn="l">
-              <a:lnSpc>
-                <a:spcPts val="2128"/>
-              </a:lnSpc>
-              <a:spcBef>
-                <a:spcPts val="0"/>
-              </a:spcBef>
-              <a:spcAft>
-                <a:spcPts val="0"/>
-              </a:spcAft>
-              <a:defRPr sz="1900" b="0">
-                <a:solidFill>
-                  <a:srgbClr val="182B3A"/>
-                </a:solidFill>
-                <a:latin typeface="Arial"/>
-              </a:defRPr>
-            </a:pPr>
-            <a:r>
-              <a:t>Short = 3 × 7 = 21</a:t>
-            </a:r>
-          </a:p>
-        </p:txBody>
-      </p:sp>
-      <p:sp>
-        <p:nvSpPr>
-          <p:cNvPr id="67" name="TextBox 66"/>
-          <p:cNvSpPr txBox="1"/>
-          <p:nvPr/>
-        </p:nvSpPr>
-        <p:spPr>
-          <a:xfrm>
-            <a:off x="11975592" y="4581144"/>
-            <a:ext cx="2029968" cy="310896"/>
-          </a:xfrm>
-          <a:prstGeom prst="rect">
-            <a:avLst/>
-          </a:prstGeom>
-          <a:noFill/>
-        </p:spPr>
-        <p:txBody>
-          <a:bodyPr wrap="none" lIns="0" rIns="0" tIns="0" bIns="0">
-            <a:spAutoFit/>
-          </a:bodyPr>
-          <a:lstStyle/>
-          <a:p>
-            <a:pPr algn="l">
-              <a:lnSpc>
-                <a:spcPts val="2128"/>
-              </a:lnSpc>
-              <a:spcBef>
-                <a:spcPts val="0"/>
-              </a:spcBef>
-              <a:spcAft>
-                <a:spcPts val="0"/>
-              </a:spcAft>
-              <a:defRPr sz="1900" b="0">
-                <a:solidFill>
-                  <a:srgbClr val="182B3A"/>
-                </a:solidFill>
-                <a:latin typeface="Arial"/>
-              </a:defRPr>
-            </a:pPr>
-            <a:r>
-              <a:t>Long = 8 × 7 = 56</a:t>
-            </a:r>
-          </a:p>
-        </p:txBody>
-      </p:sp>
-      <p:sp>
-        <p:nvSpPr>
-          <p:cNvPr id="68" name="TextBox 67"/>
-          <p:cNvSpPr txBox="1"/>
-          <p:nvPr/>
-        </p:nvSpPr>
-        <p:spPr>
-          <a:xfrm>
-            <a:off x="11975592" y="4864608"/>
-            <a:ext cx="2029968" cy="310896"/>
-          </a:xfrm>
-          <a:prstGeom prst="rect">
-            <a:avLst/>
-          </a:prstGeom>
-          <a:noFill/>
-        </p:spPr>
-        <p:txBody>
-          <a:bodyPr wrap="none" lIns="0" rIns="0" tIns="0" bIns="0">
-            <a:spAutoFit/>
-          </a:bodyPr>
-          <a:lstStyle/>
-          <a:p>
-            <a:pPr algn="l">
-              <a:lnSpc>
-                <a:spcPts val="2128"/>
-              </a:lnSpc>
-              <a:spcBef>
-                <a:spcPts val="0"/>
-              </a:spcBef>
-              <a:spcAft>
-                <a:spcPts val="0"/>
-              </a:spcAft>
-              <a:defRPr sz="1900" b="0">
-                <a:solidFill>
-                  <a:srgbClr val="182B3A"/>
-                </a:solidFill>
-                <a:latin typeface="Arial"/>
-              </a:defRPr>
-            </a:pPr>
-            <a:r>
-              <a:t>56 − 21 = 35</a:t>
-            </a:r>
-          </a:p>
-        </p:txBody>
-      </p:sp>
-      <p:sp>
-        <p:nvSpPr>
-          <p:cNvPr id="69" name="TextBox 68"/>
-          <p:cNvSpPr txBox="1"/>
-          <p:nvPr/>
-        </p:nvSpPr>
-        <p:spPr>
-          <a:xfrm>
-            <a:off x="9835896" y="5394960"/>
-            <a:ext cx="4206240" cy="256032"/>
-          </a:xfrm>
-          <a:prstGeom prst="rect">
-            <a:avLst/>
-          </a:prstGeom>
-          <a:noFill/>
-        </p:spPr>
-        <p:txBody>
-          <a:bodyPr wrap="none" lIns="0" rIns="0" tIns="0" bIns="0">
-            <a:spAutoFit/>
-          </a:bodyPr>
-          <a:lstStyle/>
-          <a:p>
-            <a:pPr algn="l">
-              <a:lnSpc>
-                <a:spcPts val="2016"/>
-              </a:lnSpc>
-              <a:spcBef>
-                <a:spcPts val="0"/>
-              </a:spcBef>
-              <a:spcAft>
-                <a:spcPts val="0"/>
-              </a:spcAft>
-              <a:defRPr sz="1800" b="0">
-                <a:solidFill>
-                  <a:srgbClr val="182B3A"/>
-                </a:solidFill>
-                <a:latin typeface="Arial"/>
-              </a:defRPr>
-            </a:pPr>
-            <a:r>
-              <a:t>Total length = 35 cm</a:t>
-            </a:r>
-          </a:p>
-        </p:txBody>
-      </p:sp>
-      <p:sp>
-        <p:nvSpPr>
-          <p:cNvPr id="70" name="Rectangle 69"/>
-          <p:cNvSpPr/>
-          <p:nvPr/>
-        </p:nvSpPr>
-        <p:spPr>
-          <a:xfrm>
-            <a:off x="9625584" y="5724144"/>
-            <a:ext cx="4588764" cy="1929384"/>
-          </a:xfrm>
-          <a:prstGeom prst="rect">
-            <a:avLst/>
-          </a:prstGeom>
-          <a:solidFill>
-            <a:srgbClr val="FFFFFF"/>
-          </a:solidFill>
-          <a:ln w="7620">
-            <a:solidFill>
-              <a:srgbClr val="D8E0E6"/>
-            </a:solidFill>
-          </a:ln>
-        </p:spPr>
-        <p:style>
-          <a:lnRef idx="1">
-            <a:schemeClr val="accent1"/>
-          </a:lnRef>
-          <a:fillRef idx="3">
-            <a:schemeClr val="accent1"/>
-          </a:fillRef>
-          <a:effectRef idx="0">
-            <a:schemeClr val="accent1"/>
-          </a:effectRef>
-          <a:fontRef idx="minor">
-            <a:schemeClr val="lt1"/>
-          </a:fontRef>
-        </p:style>
-        <p:txBody>
-          <a:bodyPr rtlCol="0" anchor="ctr"/>
-          <a:lstStyle/>
-          <a:p>
-            <a:pPr algn="ctr"/>
-          </a:p>
-        </p:txBody>
-      </p:sp>
-      <p:sp>
-        <p:nvSpPr>
-          <p:cNvPr id="71" name="TextBox 70"/>
-          <p:cNvSpPr txBox="1"/>
-          <p:nvPr/>
-        </p:nvSpPr>
-        <p:spPr>
-          <a:xfrm>
-            <a:off x="9717024" y="5760720"/>
-            <a:ext cx="4392168" cy="841248"/>
-          </a:xfrm>
-          <a:prstGeom prst="rect">
-            <a:avLst/>
-          </a:prstGeom>
-          <a:noFill/>
-        </p:spPr>
-        <p:txBody>
-          <a:bodyPr wrap="square" tIns="36576" bIns="36576" anchor="t">
-            <a:spAutoFit/>
-          </a:bodyPr>
-          <a:lstStyle/>
-          <a:p>
-            <a:pPr>
-              <a:lnSpc>
-                <a:spcPts val="1944"/>
-              </a:lnSpc>
-              <a:spcBef>
-                <a:spcPts val="0"/>
-              </a:spcBef>
-              <a:spcAft>
-                <a:spcPts val="0"/>
-              </a:spcAft>
-              <a:defRPr sz="1800" b="1">
-                <a:solidFill>
-                  <a:srgbClr val="182B3A"/>
-                </a:solidFill>
-                <a:latin typeface="Arial"/>
-              </a:defRPr>
-            </a:pPr>
-            <a:r>
-              <a:t>3.  A and B have tokens in ratio 7:4. A has 42. How many tokens in total?</a:t>
-            </a:r>
-          </a:p>
-        </p:txBody>
-      </p:sp>
-      <p:sp>
-        <p:nvSpPr>
-          <p:cNvPr id="72" name="TextBox 71"/>
-          <p:cNvSpPr txBox="1"/>
-          <p:nvPr/>
-        </p:nvSpPr>
-        <p:spPr>
-          <a:xfrm>
-            <a:off x="9835896" y="6583679"/>
-            <a:ext cx="2029968" cy="310896"/>
-          </a:xfrm>
-          <a:prstGeom prst="rect">
-            <a:avLst/>
-          </a:prstGeom>
-          <a:noFill/>
-        </p:spPr>
-        <p:txBody>
-          <a:bodyPr wrap="none" lIns="0" rIns="0" tIns="0" bIns="0">
-            <a:spAutoFit/>
-          </a:bodyPr>
-          <a:lstStyle/>
-          <a:p>
-            <a:pPr algn="l">
-              <a:lnSpc>
-                <a:spcPts val="2128"/>
-              </a:lnSpc>
-              <a:spcBef>
-                <a:spcPts val="0"/>
-              </a:spcBef>
-              <a:spcAft>
-                <a:spcPts val="0"/>
-              </a:spcAft>
-              <a:defRPr sz="1900" b="0">
-                <a:solidFill>
-                  <a:srgbClr val="182B3A"/>
-                </a:solidFill>
-                <a:latin typeface="Arial"/>
-              </a:defRPr>
-            </a:pPr>
-            <a:r>
-              <a:t>42 ÷ 7 = 6</a:t>
-            </a:r>
-          </a:p>
-        </p:txBody>
-      </p:sp>
-      <p:sp>
-        <p:nvSpPr>
-          <p:cNvPr id="73" name="TextBox 72"/>
-          <p:cNvSpPr txBox="1"/>
-          <p:nvPr/>
-        </p:nvSpPr>
-        <p:spPr>
-          <a:xfrm>
-            <a:off x="9835896" y="6867144"/>
-            <a:ext cx="2029968" cy="310896"/>
-          </a:xfrm>
-          <a:prstGeom prst="rect">
-            <a:avLst/>
-          </a:prstGeom>
-          <a:noFill/>
-        </p:spPr>
-        <p:txBody>
-          <a:bodyPr wrap="none" lIns="0" rIns="0" tIns="0" bIns="0">
-            <a:spAutoFit/>
-          </a:bodyPr>
-          <a:lstStyle/>
-          <a:p>
-            <a:pPr algn="l">
-              <a:lnSpc>
-                <a:spcPts val="2128"/>
-              </a:lnSpc>
-              <a:spcBef>
-                <a:spcPts val="0"/>
-              </a:spcBef>
-              <a:spcAft>
-                <a:spcPts val="0"/>
-              </a:spcAft>
-              <a:defRPr sz="1900" b="0">
-                <a:solidFill>
-                  <a:srgbClr val="182B3A"/>
-                </a:solidFill>
-                <a:latin typeface="Arial"/>
-              </a:defRPr>
-            </a:pPr>
-            <a:r>
-              <a:t>B = 4 × 6 = 24</a:t>
-            </a:r>
-          </a:p>
-        </p:txBody>
-      </p:sp>
-      <p:sp>
-        <p:nvSpPr>
-          <p:cNvPr id="74" name="TextBox 73"/>
-          <p:cNvSpPr txBox="1"/>
-          <p:nvPr/>
-        </p:nvSpPr>
-        <p:spPr>
-          <a:xfrm>
-            <a:off x="11975592" y="6583679"/>
-            <a:ext cx="2029968" cy="310896"/>
-          </a:xfrm>
-          <a:prstGeom prst="rect">
-            <a:avLst/>
-          </a:prstGeom>
-          <a:noFill/>
-        </p:spPr>
-        <p:txBody>
-          <a:bodyPr wrap="none" lIns="0" rIns="0" tIns="0" bIns="0">
-            <a:spAutoFit/>
-          </a:bodyPr>
-          <a:lstStyle/>
-          <a:p>
-            <a:pPr algn="l">
-              <a:lnSpc>
-                <a:spcPts val="2128"/>
-              </a:lnSpc>
-              <a:spcBef>
-                <a:spcPts val="0"/>
-              </a:spcBef>
-              <a:spcAft>
-                <a:spcPts val="0"/>
-              </a:spcAft>
-              <a:defRPr sz="1900" b="0">
-                <a:solidFill>
-                  <a:srgbClr val="182B3A"/>
-                </a:solidFill>
-                <a:latin typeface="Arial"/>
-              </a:defRPr>
-            </a:pPr>
-            <a:r>
-              <a:t>42 + 4 = 46</a:t>
-            </a:r>
-          </a:p>
-        </p:txBody>
-      </p:sp>
-      <p:sp>
-        <p:nvSpPr>
-          <p:cNvPr id="75" name="TextBox 74"/>
-          <p:cNvSpPr txBox="1"/>
-          <p:nvPr/>
-        </p:nvSpPr>
-        <p:spPr>
-          <a:xfrm>
-            <a:off x="9835896" y="7397496"/>
-            <a:ext cx="4206240" cy="256032"/>
-          </a:xfrm>
-          <a:prstGeom prst="rect">
-            <a:avLst/>
-          </a:prstGeom>
-          <a:noFill/>
-        </p:spPr>
-        <p:txBody>
-          <a:bodyPr wrap="none" lIns="0" rIns="0" tIns="0" bIns="0">
-            <a:spAutoFit/>
-          </a:bodyPr>
-          <a:lstStyle/>
-          <a:p>
-            <a:pPr algn="l">
-              <a:lnSpc>
-                <a:spcPts val="2016"/>
-              </a:lnSpc>
-              <a:spcBef>
-                <a:spcPts val="0"/>
-              </a:spcBef>
-              <a:spcAft>
-                <a:spcPts val="0"/>
-              </a:spcAft>
-              <a:defRPr sz="1800" b="0">
-                <a:solidFill>
-                  <a:srgbClr val="182B3A"/>
-                </a:solidFill>
-                <a:latin typeface="Arial"/>
-              </a:defRPr>
-            </a:pPr>
-            <a:r>
-              <a:t>Total = 46 tokens</a:t>
-            </a:r>
-          </a:p>
-        </p:txBody>
-      </p:sp>
-    </p:spTree>
-  </p:cSld>
-  <p:clrMapOvr>
-    <a:masterClrMapping/>
-  </p:clrMapOvr>
-</p:sld>
-</file>
-
-<file path=ppt/slides/slide6.xml><?xml version="1.0" encoding="utf-8"?>
+<file path=ppt/slides/slide1004.xml><?xml version="1.0" encoding="utf-8"?>
 <p:sld xmlns:a="http://schemas.openxmlformats.org/drawingml/2006/main" xmlns:r="http://schemas.openxmlformats.org/officeDocument/2006/relationships" xmlns:p="http://schemas.openxmlformats.org/presentationml/2006/main">
   <p:cSld>
     <p:bg>
@@ -17551,7 +14203,7 @@
               </a:defRPr>
             </a:pPr>
             <a:r>
-              <a:t>Thread 1: Guided</a:t>
+              <a:t>Start</a:t>
             </a:r>
           </a:p>
         </p:txBody>
@@ -17640,7 +14292,7 @@
               </a:defRPr>
             </a:pPr>
             <a:r>
-              <a:t>Thread 2: Core</a:t>
+              <a:t>Build</a:t>
             </a:r>
           </a:p>
         </p:txBody>
@@ -17729,7 +14381,7 @@
               </a:defRPr>
             </a:pPr>
             <a:r>
-              <a:t>Thread 3: Depth</a:t>
+              <a:t>Confidence</a:t>
             </a:r>
           </a:p>
         </p:txBody>
@@ -20340,7 +16992,7 @@
 </p:sld>
 </file>
 
-<file path=ppt/slides/slide7.xml><?xml version="1.0" encoding="utf-8"?>
+<file path=ppt/slides/slide1005.xml><?xml version="1.0" encoding="utf-8"?>
 <p:sld xmlns:a="http://schemas.openxmlformats.org/drawingml/2006/main" xmlns:r="http://schemas.openxmlformats.org/officeDocument/2006/relationships" xmlns:p="http://schemas.openxmlformats.org/presentationml/2006/main">
   <p:cSld>
     <p:bg>
@@ -20673,7 +17325,7 @@
               </a:defRPr>
             </a:pPr>
             <a:r>
-              <a:t>Thread 1: Guided</a:t>
+              <a:t>Start</a:t>
             </a:r>
           </a:p>
         </p:txBody>
@@ -20762,7 +17414,7 @@
               </a:defRPr>
             </a:pPr>
             <a:r>
-              <a:t>Thread 2: Core</a:t>
+              <a:t>Build</a:t>
             </a:r>
           </a:p>
         </p:txBody>
@@ -20851,7 +17503,7 @@
               </a:defRPr>
             </a:pPr>
             <a:r>
-              <a:t>Thread 3: Depth</a:t>
+              <a:t>Confidence</a:t>
             </a:r>
           </a:p>
         </p:txBody>
@@ -23462,7 +20114,7 @@
 </p:sld>
 </file>
 
-<file path=ppt/slides/slide8.xml><?xml version="1.0" encoding="utf-8"?>
+<file path=ppt/slides/slide1006.xml><?xml version="1.0" encoding="utf-8"?>
 <p:sld xmlns:a="http://schemas.openxmlformats.org/drawingml/2006/main" xmlns:r="http://schemas.openxmlformats.org/officeDocument/2006/relationships" xmlns:p="http://schemas.openxmlformats.org/presentationml/2006/main">
   <p:cSld>
     <p:bg>
@@ -23795,7 +20447,7 @@
               </a:defRPr>
             </a:pPr>
             <a:r>
-              <a:t>Thread 1: Guided</a:t>
+              <a:t>Start</a:t>
             </a:r>
           </a:p>
         </p:txBody>
@@ -23884,7 +20536,7 @@
               </a:defRPr>
             </a:pPr>
             <a:r>
-              <a:t>Thread 2: Core</a:t>
+              <a:t>Build</a:t>
             </a:r>
           </a:p>
         </p:txBody>
@@ -23973,7 +20625,7 @@
               </a:defRPr>
             </a:pPr>
             <a:r>
-              <a:t>Thread 3: Depth</a:t>
+              <a:t>Confidence</a:t>
             </a:r>
           </a:p>
         </p:txBody>
@@ -26584,7 +23236,7 @@
 </p:sld>
 </file>
 
-<file path=ppt/slides/slide9.xml><?xml version="1.0" encoding="utf-8"?>
+<file path=ppt/slides/slide1007.xml><?xml version="1.0" encoding="utf-8"?>
 <p:sld xmlns:a="http://schemas.openxmlformats.org/drawingml/2006/main" xmlns:r="http://schemas.openxmlformats.org/officeDocument/2006/relationships" xmlns:p="http://schemas.openxmlformats.org/presentationml/2006/main">
   <p:cSld>
     <p:bg>
@@ -26917,7 +23569,7 @@
               </a:defRPr>
             </a:pPr>
             <a:r>
-              <a:t>Thread 1: Guided</a:t>
+              <a:t>Start</a:t>
             </a:r>
           </a:p>
         </p:txBody>
@@ -27006,7 +23658,7 @@
               </a:defRPr>
             </a:pPr>
             <a:r>
-              <a:t>Thread 2: Core</a:t>
+              <a:t>Build</a:t>
             </a:r>
           </a:p>
         </p:txBody>
@@ -27095,7 +23747,7 @@
               </a:defRPr>
             </a:pPr>
             <a:r>
-              <a:t>Thread 3: Depth</a:t>
+              <a:t>Confidence</a:t>
             </a:r>
           </a:p>
         </p:txBody>
@@ -29695,6 +26347,3354 @@
           <a:lstStyle/>
           <a:p>
             <a:pPr algn="ctr"/>
+          </a:p>
+        </p:txBody>
+      </p:sp>
+    </p:spTree>
+  </p:cSld>
+  <p:clrMapOvr>
+    <a:masterClrMapping/>
+  </p:clrMapOvr>
+</p:sld>
+</file>
+
+<file path=ppt/slides/slide9.xml><?xml version="1.0" encoding="utf-8"?>
+<p:sld xmlns:a="http://schemas.openxmlformats.org/drawingml/2006/main" xmlns:p="http://schemas.openxmlformats.org/presentationml/2006/main" xmlns:r="http://schemas.openxmlformats.org/officeDocument/2006/relationships">
+  <p:cSld>
+    <p:bg>
+      <p:bgPr>
+        <a:solidFill>
+          <a:srgbClr val="F7F8FA"/>
+        </a:solidFill>
+        <a:effectLst/>
+      </p:bgPr>
+    </p:bg>
+    <p:spTree>
+      <p:nvGrpSpPr>
+        <p:cNvPr id="1" name=""/>
+        <p:cNvGrpSpPr/>
+        <p:nvPr/>
+      </p:nvGrpSpPr>
+      <p:grpSpPr/>
+      <p:sp>
+        <p:nvSpPr>
+          <p:cNvPr id="2" name="Rectangle 1"/>
+          <p:cNvSpPr/>
+          <p:nvPr/>
+        </p:nvSpPr>
+        <p:spPr>
+          <a:xfrm>
+            <a:off x="0" y="0"/>
+            <a:ext cx="14630400" cy="91440"/>
+          </a:xfrm>
+          <a:prstGeom prst="rect">
+            <a:avLst/>
+          </a:prstGeom>
+          <a:solidFill>
+            <a:srgbClr val="176B73"/>
+          </a:solidFill>
+          <a:ln>
+            <a:noFill/>
+          </a:ln>
+        </p:spPr>
+        <p:style>
+          <a:lnRef idx="1">
+            <a:schemeClr val="accent1"/>
+          </a:lnRef>
+          <a:fillRef idx="3">
+            <a:schemeClr val="accent1"/>
+          </a:fillRef>
+          <a:effectRef idx="0">
+            <a:schemeClr val="accent1"/>
+          </a:effectRef>
+          <a:fontRef idx="minor">
+            <a:schemeClr val="lt1"/>
+          </a:fontRef>
+        </p:style>
+        <p:txBody>
+          <a:bodyPr rtlCol="0" anchor="ctr"/>
+          <a:lstStyle/>
+          <a:p>
+            <a:pPr algn="ctr"/>
+          </a:p>
+        </p:txBody>
+      </p:sp>
+      <p:sp>
+        <p:nvSpPr>
+          <p:cNvPr id="3" name="TextBox 2"/>
+          <p:cNvSpPr txBox="1"/>
+          <p:nvPr/>
+        </p:nvSpPr>
+        <p:spPr>
+          <a:xfrm>
+            <a:off x="384048" y="219456"/>
+            <a:ext cx="13807440" cy="457200"/>
+          </a:xfrm>
+          <a:prstGeom prst="rect">
+            <a:avLst/>
+          </a:prstGeom>
+          <a:noFill/>
+        </p:spPr>
+        <p:txBody>
+          <a:bodyPr wrap="square" tIns="36576" bIns="36576" anchor="t">
+            <a:spAutoFit/>
+          </a:bodyPr>
+          <a:lstStyle/>
+          <a:p>
+            <a:pPr>
+              <a:lnSpc>
+                <a:spcPts val="3132"/>
+              </a:lnSpc>
+              <a:spcBef>
+                <a:spcPts val="0"/>
+              </a:spcBef>
+              <a:spcAft>
+                <a:spcPts val="0"/>
+              </a:spcAft>
+              <a:defRPr sz="2900" b="1">
+                <a:solidFill>
+                  <a:srgbClr val="182B3A"/>
+                </a:solidFill>
+                <a:latin typeface="Arial"/>
+              </a:defRPr>
+            </a:pPr>
+            <a:r>
+              <a:t>Ratio: sharing and missing amounts — spot the errors</a:t>
+            </a:r>
+          </a:p>
+        </p:txBody>
+      </p:sp>
+      <p:sp>
+        <p:nvSpPr>
+          <p:cNvPr id="4" name="TextBox 3"/>
+          <p:cNvSpPr txBox="1"/>
+          <p:nvPr/>
+        </p:nvSpPr>
+        <p:spPr>
+          <a:xfrm>
+            <a:off x="384048" y="740664"/>
+            <a:ext cx="13807440" cy="411480"/>
+          </a:xfrm>
+          <a:prstGeom prst="rect">
+            <a:avLst/>
+          </a:prstGeom>
+          <a:noFill/>
+        </p:spPr>
+        <p:txBody>
+          <a:bodyPr wrap="square" tIns="36576" bIns="36576" anchor="t">
+            <a:spAutoFit/>
+          </a:bodyPr>
+          <a:lstStyle/>
+          <a:p>
+            <a:pPr>
+              <a:lnSpc>
+                <a:spcPts val="1836"/>
+              </a:lnSpc>
+              <a:spcBef>
+                <a:spcPts val="0"/>
+              </a:spcBef>
+              <a:spcAft>
+                <a:spcPts val="0"/>
+              </a:spcAft>
+              <a:defRPr sz="1700" b="0">
+                <a:solidFill>
+                  <a:srgbClr val="526472"/>
+                </a:solidFill>
+                <a:latin typeface="Arial"/>
+              </a:defRPr>
+            </a:pPr>
+            <a:r>
+              <a:t>Each student’s working contains a mistake. Find it, correct the working and give the right answer.</a:t>
+            </a:r>
+          </a:p>
+        </p:txBody>
+      </p:sp>
+      <p:sp>
+        <p:nvSpPr>
+          <p:cNvPr id="5" name="TextBox 4"/>
+          <p:cNvSpPr txBox="1"/>
+          <p:nvPr/>
+        </p:nvSpPr>
+        <p:spPr>
+          <a:xfrm>
+            <a:off x="384048" y="7863840"/>
+            <a:ext cx="13716000" cy="256032"/>
+          </a:xfrm>
+          <a:prstGeom prst="rect">
+            <a:avLst/>
+          </a:prstGeom>
+          <a:noFill/>
+        </p:spPr>
+        <p:txBody>
+          <a:bodyPr wrap="square" tIns="36576" bIns="36576" anchor="t">
+            <a:spAutoFit/>
+          </a:bodyPr>
+          <a:lstStyle/>
+          <a:p>
+            <a:pPr>
+              <a:lnSpc>
+                <a:spcPts val="1188"/>
+              </a:lnSpc>
+              <a:spcBef>
+                <a:spcPts val="0"/>
+              </a:spcBef>
+              <a:spcAft>
+                <a:spcPts val="0"/>
+              </a:spcAft>
+              <a:defRPr sz="1100" b="0">
+                <a:solidFill>
+                  <a:srgbClr val="526472"/>
+                </a:solidFill>
+                <a:latin typeface="Arial"/>
+              </a:defRPr>
+            </a:pPr>
+            <a:r>
+              <a:t>M04-SE  •  Record your working in your booklet or webapp.</a:t>
+            </a:r>
+          </a:p>
+        </p:txBody>
+      </p:sp>
+      <p:sp>
+        <p:nvSpPr>
+          <p:cNvPr id="6" name="Rectangle 5"/>
+          <p:cNvSpPr/>
+          <p:nvPr/>
+        </p:nvSpPr>
+        <p:spPr>
+          <a:xfrm>
+            <a:off x="384048" y="1234440"/>
+            <a:ext cx="4588764" cy="420624"/>
+          </a:xfrm>
+          <a:prstGeom prst="rect">
+            <a:avLst/>
+          </a:prstGeom>
+          <a:solidFill>
+            <a:srgbClr val="176B73"/>
+          </a:solidFill>
+          <a:ln>
+            <a:noFill/>
+          </a:ln>
+        </p:spPr>
+        <p:style>
+          <a:lnRef idx="1">
+            <a:schemeClr val="accent1"/>
+          </a:lnRef>
+          <a:fillRef idx="3">
+            <a:schemeClr val="accent1"/>
+          </a:fillRef>
+          <a:effectRef idx="0">
+            <a:schemeClr val="accent1"/>
+          </a:effectRef>
+          <a:fontRef idx="minor">
+            <a:schemeClr val="lt1"/>
+          </a:fontRef>
+        </p:style>
+        <p:txBody>
+          <a:bodyPr rtlCol="0" anchor="ctr"/>
+          <a:lstStyle/>
+          <a:p>
+            <a:pPr algn="ctr"/>
+          </a:p>
+        </p:txBody>
+      </p:sp>
+      <p:sp>
+        <p:nvSpPr>
+          <p:cNvPr id="7" name="TextBox 6"/>
+          <p:cNvSpPr txBox="1"/>
+          <p:nvPr/>
+        </p:nvSpPr>
+        <p:spPr>
+          <a:xfrm>
+            <a:off x="448056" y="1261872"/>
+            <a:ext cx="4474464" cy="347472"/>
+          </a:xfrm>
+          <a:prstGeom prst="rect">
+            <a:avLst/>
+          </a:prstGeom>
+          <a:noFill/>
+        </p:spPr>
+        <p:txBody>
+          <a:bodyPr wrap="square" tIns="36576" bIns="36576" anchor="t">
+            <a:spAutoFit/>
+          </a:bodyPr>
+          <a:lstStyle/>
+          <a:p>
+            <a:pPr>
+              <a:lnSpc>
+                <a:spcPts val="2160"/>
+              </a:lnSpc>
+              <a:spcBef>
+                <a:spcPts val="0"/>
+              </a:spcBef>
+              <a:spcAft>
+                <a:spcPts val="0"/>
+              </a:spcAft>
+              <a:defRPr sz="2000" b="1">
+                <a:solidFill>
+                  <a:srgbClr val="FFFFFF"/>
+                </a:solidFill>
+                <a:latin typeface="Arial"/>
+              </a:defRPr>
+            </a:pPr>
+            <a:r>
+              <a:t>Start</a:t>
+            </a:r>
+          </a:p>
+        </p:txBody>
+      </p:sp>
+      <p:sp>
+        <p:nvSpPr>
+          <p:cNvPr id="8" name="Rectangle 7"/>
+          <p:cNvSpPr/>
+          <p:nvPr/>
+        </p:nvSpPr>
+        <p:spPr>
+          <a:xfrm>
+            <a:off x="384048" y="1719072"/>
+            <a:ext cx="4588764" cy="1929384"/>
+          </a:xfrm>
+          <a:prstGeom prst="rect">
+            <a:avLst/>
+          </a:prstGeom>
+          <a:solidFill>
+            <a:srgbClr val="FFFFFF"/>
+          </a:solidFill>
+          <a:ln w="7620">
+            <a:solidFill>
+              <a:srgbClr val="D8E0E6"/>
+            </a:solidFill>
+          </a:ln>
+        </p:spPr>
+        <p:style>
+          <a:lnRef idx="1">
+            <a:schemeClr val="accent1"/>
+          </a:lnRef>
+          <a:fillRef idx="3">
+            <a:schemeClr val="accent1"/>
+          </a:fillRef>
+          <a:effectRef idx="0">
+            <a:schemeClr val="accent1"/>
+          </a:effectRef>
+          <a:fontRef idx="minor">
+            <a:schemeClr val="lt1"/>
+          </a:fontRef>
+        </p:style>
+        <p:txBody>
+          <a:bodyPr rtlCol="0" anchor="ctr"/>
+          <a:lstStyle/>
+          <a:p>
+            <a:pPr algn="ctr"/>
+          </a:p>
+        </p:txBody>
+      </p:sp>
+      <p:sp>
+        <p:nvSpPr>
+          <p:cNvPr id="9" name="TextBox 8"/>
+          <p:cNvSpPr txBox="1"/>
+          <p:nvPr/>
+        </p:nvSpPr>
+        <p:spPr>
+          <a:xfrm>
+            <a:off x="475488" y="1755648"/>
+            <a:ext cx="4392168" cy="841248"/>
+          </a:xfrm>
+          <a:prstGeom prst="rect">
+            <a:avLst/>
+          </a:prstGeom>
+          <a:noFill/>
+        </p:spPr>
+        <p:txBody>
+          <a:bodyPr wrap="square" tIns="36576" bIns="36576" anchor="t">
+            <a:spAutoFit/>
+          </a:bodyPr>
+          <a:lstStyle/>
+          <a:p>
+            <a:pPr>
+              <a:lnSpc>
+                <a:spcPts val="1944"/>
+              </a:lnSpc>
+              <a:spcBef>
+                <a:spcPts val="0"/>
+              </a:spcBef>
+              <a:spcAft>
+                <a:spcPts val="0"/>
+              </a:spcAft>
+              <a:defRPr sz="1800" b="1">
+                <a:solidFill>
+                  <a:srgbClr val="182B3A"/>
+                </a:solidFill>
+                <a:latin typeface="Arial"/>
+              </a:defRPr>
+            </a:pPr>
+            <a:r>
+              <a:t>1.  Share £35 between A and B in ratio 2:5. How much does A get?</a:t>
+            </a:r>
+          </a:p>
+        </p:txBody>
+      </p:sp>
+      <p:sp>
+        <p:nvSpPr>
+          <p:cNvPr id="10" name="TextBox 9"/>
+          <p:cNvSpPr txBox="1"/>
+          <p:nvPr/>
+        </p:nvSpPr>
+        <p:spPr>
+          <a:xfrm>
+            <a:off x="594360" y="2578608"/>
+            <a:ext cx="2029968" cy="310896"/>
+          </a:xfrm>
+          <a:prstGeom prst="rect">
+            <a:avLst/>
+          </a:prstGeom>
+          <a:noFill/>
+        </p:spPr>
+        <p:txBody>
+          <a:bodyPr wrap="none" lIns="0" rIns="0" tIns="0" bIns="0">
+            <a:spAutoFit/>
+          </a:bodyPr>
+          <a:lstStyle/>
+          <a:p>
+            <a:pPr algn="l">
+              <a:lnSpc>
+                <a:spcPts val="2128"/>
+              </a:lnSpc>
+              <a:spcBef>
+                <a:spcPts val="0"/>
+              </a:spcBef>
+              <a:spcAft>
+                <a:spcPts val="0"/>
+              </a:spcAft>
+              <a:defRPr sz="1900" b="0">
+                <a:solidFill>
+                  <a:srgbClr val="182B3A"/>
+                </a:solidFill>
+                <a:latin typeface="Arial"/>
+              </a:defRPr>
+            </a:pPr>
+            <a:r>
+              <a:t>2 + 5 = 7 parts</a:t>
+            </a:r>
+          </a:p>
+        </p:txBody>
+      </p:sp>
+      <p:sp>
+        <p:nvSpPr>
+          <p:cNvPr id="11" name="TextBox 10"/>
+          <p:cNvSpPr txBox="1"/>
+          <p:nvPr/>
+        </p:nvSpPr>
+        <p:spPr>
+          <a:xfrm>
+            <a:off x="594360" y="2862072"/>
+            <a:ext cx="2029968" cy="310896"/>
+          </a:xfrm>
+          <a:prstGeom prst="rect">
+            <a:avLst/>
+          </a:prstGeom>
+          <a:noFill/>
+        </p:spPr>
+        <p:txBody>
+          <a:bodyPr wrap="none" lIns="0" rIns="0" tIns="0" bIns="0">
+            <a:spAutoFit/>
+          </a:bodyPr>
+          <a:lstStyle/>
+          <a:p>
+            <a:pPr algn="l">
+              <a:lnSpc>
+                <a:spcPts val="2128"/>
+              </a:lnSpc>
+              <a:spcBef>
+                <a:spcPts val="0"/>
+              </a:spcBef>
+              <a:spcAft>
+                <a:spcPts val="0"/>
+              </a:spcAft>
+              <a:defRPr sz="1900" b="0">
+                <a:solidFill>
+                  <a:srgbClr val="182B3A"/>
+                </a:solidFill>
+                <a:latin typeface="Arial"/>
+              </a:defRPr>
+            </a:pPr>
+            <a:r>
+              <a:t>35 ÷ 7 = 5</a:t>
+            </a:r>
+          </a:p>
+        </p:txBody>
+      </p:sp>
+      <p:sp>
+        <p:nvSpPr>
+          <p:cNvPr id="12" name="TextBox 11"/>
+          <p:cNvSpPr txBox="1"/>
+          <p:nvPr/>
+        </p:nvSpPr>
+        <p:spPr>
+          <a:xfrm>
+            <a:off x="2734056" y="2578608"/>
+            <a:ext cx="2029968" cy="310896"/>
+          </a:xfrm>
+          <a:prstGeom prst="rect">
+            <a:avLst/>
+          </a:prstGeom>
+          <a:noFill/>
+        </p:spPr>
+        <p:txBody>
+          <a:bodyPr wrap="none" lIns="0" rIns="0" tIns="0" bIns="0">
+            <a:spAutoFit/>
+          </a:bodyPr>
+          <a:lstStyle/>
+          <a:p>
+            <a:pPr algn="l">
+              <a:lnSpc>
+                <a:spcPts val="2128"/>
+              </a:lnSpc>
+              <a:spcBef>
+                <a:spcPts val="0"/>
+              </a:spcBef>
+              <a:spcAft>
+                <a:spcPts val="0"/>
+              </a:spcAft>
+              <a:defRPr sz="1900" b="0">
+                <a:solidFill>
+                  <a:srgbClr val="182B3A"/>
+                </a:solidFill>
+                <a:latin typeface="Arial"/>
+              </a:defRPr>
+            </a:pPr>
+            <a:r>
+              <a:t>A = 5 × 5</a:t>
+            </a:r>
+          </a:p>
+        </p:txBody>
+      </p:sp>
+      <p:sp>
+        <p:nvSpPr>
+          <p:cNvPr id="13" name="TextBox 12"/>
+          <p:cNvSpPr txBox="1"/>
+          <p:nvPr/>
+        </p:nvSpPr>
+        <p:spPr>
+          <a:xfrm>
+            <a:off x="2734056" y="2862072"/>
+            <a:ext cx="2029968" cy="310896"/>
+          </a:xfrm>
+          <a:prstGeom prst="rect">
+            <a:avLst/>
+          </a:prstGeom>
+          <a:noFill/>
+        </p:spPr>
+        <p:txBody>
+          <a:bodyPr wrap="none" lIns="0" rIns="0" tIns="0" bIns="0">
+            <a:spAutoFit/>
+          </a:bodyPr>
+          <a:lstStyle/>
+          <a:p>
+            <a:pPr algn="l">
+              <a:lnSpc>
+                <a:spcPts val="2128"/>
+              </a:lnSpc>
+              <a:spcBef>
+                <a:spcPts val="0"/>
+              </a:spcBef>
+              <a:spcAft>
+                <a:spcPts val="0"/>
+              </a:spcAft>
+              <a:defRPr sz="1900" b="0">
+                <a:solidFill>
+                  <a:srgbClr val="182B3A"/>
+                </a:solidFill>
+                <a:latin typeface="Arial"/>
+              </a:defRPr>
+            </a:pPr>
+            <a:r>
+              <a:t>A = £25</a:t>
+            </a:r>
+          </a:p>
+        </p:txBody>
+      </p:sp>
+      <p:sp>
+        <p:nvSpPr>
+          <p:cNvPr id="14" name="TextBox 13"/>
+          <p:cNvSpPr txBox="1"/>
+          <p:nvPr/>
+        </p:nvSpPr>
+        <p:spPr>
+          <a:xfrm>
+            <a:off x="594360" y="3392424"/>
+            <a:ext cx="4206240" cy="256032"/>
+          </a:xfrm>
+          <a:prstGeom prst="rect">
+            <a:avLst/>
+          </a:prstGeom>
+          <a:noFill/>
+        </p:spPr>
+        <p:txBody>
+          <a:bodyPr wrap="none" lIns="0" rIns="0" tIns="0" bIns="0">
+            <a:spAutoFit/>
+          </a:bodyPr>
+          <a:lstStyle/>
+          <a:p>
+            <a:pPr algn="l">
+              <a:lnSpc>
+                <a:spcPts val="2016"/>
+              </a:lnSpc>
+              <a:spcBef>
+                <a:spcPts val="0"/>
+              </a:spcBef>
+              <a:spcAft>
+                <a:spcPts val="0"/>
+              </a:spcAft>
+              <a:defRPr sz="1800" b="0">
+                <a:solidFill>
+                  <a:srgbClr val="182B3A"/>
+                </a:solidFill>
+                <a:latin typeface="Arial"/>
+              </a:defRPr>
+            </a:pPr>
+            <a:r>
+              <a:t>A receives £25</a:t>
+            </a:r>
+          </a:p>
+        </p:txBody>
+      </p:sp>
+      <p:sp>
+        <p:nvSpPr>
+          <p:cNvPr id="15" name="Rectangle 14"/>
+          <p:cNvSpPr/>
+          <p:nvPr/>
+        </p:nvSpPr>
+        <p:spPr>
+          <a:xfrm>
+            <a:off x="384048" y="3721608"/>
+            <a:ext cx="4588764" cy="1929384"/>
+          </a:xfrm>
+          <a:prstGeom prst="rect">
+            <a:avLst/>
+          </a:prstGeom>
+          <a:solidFill>
+            <a:srgbClr val="FFFFFF"/>
+          </a:solidFill>
+          <a:ln w="7620">
+            <a:solidFill>
+              <a:srgbClr val="D8E0E6"/>
+            </a:solidFill>
+          </a:ln>
+        </p:spPr>
+        <p:style>
+          <a:lnRef idx="1">
+            <a:schemeClr val="accent1"/>
+          </a:lnRef>
+          <a:fillRef idx="3">
+            <a:schemeClr val="accent1"/>
+          </a:fillRef>
+          <a:effectRef idx="0">
+            <a:schemeClr val="accent1"/>
+          </a:effectRef>
+          <a:fontRef idx="minor">
+            <a:schemeClr val="lt1"/>
+          </a:fontRef>
+        </p:style>
+        <p:txBody>
+          <a:bodyPr rtlCol="0" anchor="ctr"/>
+          <a:lstStyle/>
+          <a:p>
+            <a:pPr algn="ctr"/>
+          </a:p>
+        </p:txBody>
+      </p:sp>
+      <p:sp>
+        <p:nvSpPr>
+          <p:cNvPr id="16" name="TextBox 15"/>
+          <p:cNvSpPr txBox="1"/>
+          <p:nvPr/>
+        </p:nvSpPr>
+        <p:spPr>
+          <a:xfrm>
+            <a:off x="475488" y="3758184"/>
+            <a:ext cx="4392168" cy="841248"/>
+          </a:xfrm>
+          <a:prstGeom prst="rect">
+            <a:avLst/>
+          </a:prstGeom>
+          <a:noFill/>
+        </p:spPr>
+        <p:txBody>
+          <a:bodyPr wrap="square" tIns="36576" bIns="36576" anchor="t">
+            <a:spAutoFit/>
+          </a:bodyPr>
+          <a:lstStyle/>
+          <a:p>
+            <a:pPr>
+              <a:lnSpc>
+                <a:spcPts val="1944"/>
+              </a:lnSpc>
+              <a:spcBef>
+                <a:spcPts val="0"/>
+              </a:spcBef>
+              <a:spcAft>
+                <a:spcPts val="0"/>
+              </a:spcAft>
+              <a:defRPr sz="1800" b="1">
+                <a:solidFill>
+                  <a:srgbClr val="182B3A"/>
+                </a:solidFill>
+                <a:latin typeface="Arial"/>
+              </a:defRPr>
+            </a:pPr>
+            <a:r>
+              <a:t>2.  Red:blue = 3:4. There are 12 red counters. How many blue?</a:t>
+            </a:r>
+          </a:p>
+        </p:txBody>
+      </p:sp>
+      <p:sp>
+        <p:nvSpPr>
+          <p:cNvPr id="17" name="TextBox 16"/>
+          <p:cNvSpPr txBox="1"/>
+          <p:nvPr/>
+        </p:nvSpPr>
+        <p:spPr>
+          <a:xfrm>
+            <a:off x="594360" y="4581144"/>
+            <a:ext cx="2029968" cy="310896"/>
+          </a:xfrm>
+          <a:prstGeom prst="rect">
+            <a:avLst/>
+          </a:prstGeom>
+          <a:noFill/>
+        </p:spPr>
+        <p:txBody>
+          <a:bodyPr wrap="none" lIns="0" rIns="0" tIns="0" bIns="0">
+            <a:spAutoFit/>
+          </a:bodyPr>
+          <a:lstStyle/>
+          <a:p>
+            <a:pPr algn="l">
+              <a:lnSpc>
+                <a:spcPts val="2128"/>
+              </a:lnSpc>
+              <a:spcBef>
+                <a:spcPts val="0"/>
+              </a:spcBef>
+              <a:spcAft>
+                <a:spcPts val="0"/>
+              </a:spcAft>
+              <a:defRPr sz="1900" b="0">
+                <a:solidFill>
+                  <a:srgbClr val="182B3A"/>
+                </a:solidFill>
+                <a:latin typeface="Arial"/>
+              </a:defRPr>
+            </a:pPr>
+            <a:r>
+              <a:t>3 + 4 = 7 parts</a:t>
+            </a:r>
+          </a:p>
+        </p:txBody>
+      </p:sp>
+      <p:sp>
+        <p:nvSpPr>
+          <p:cNvPr id="18" name="TextBox 17"/>
+          <p:cNvSpPr txBox="1"/>
+          <p:nvPr/>
+        </p:nvSpPr>
+        <p:spPr>
+          <a:xfrm>
+            <a:off x="594360" y="4864608"/>
+            <a:ext cx="2029968" cy="310896"/>
+          </a:xfrm>
+          <a:prstGeom prst="rect">
+            <a:avLst/>
+          </a:prstGeom>
+          <a:noFill/>
+        </p:spPr>
+        <p:txBody>
+          <a:bodyPr wrap="none" lIns="0" rIns="0" tIns="0" bIns="0">
+            <a:spAutoFit/>
+          </a:bodyPr>
+          <a:lstStyle/>
+          <a:p>
+            <a:pPr algn="l">
+              <a:lnSpc>
+                <a:spcPts val="2128"/>
+              </a:lnSpc>
+              <a:spcBef>
+                <a:spcPts val="0"/>
+              </a:spcBef>
+              <a:spcAft>
+                <a:spcPts val="0"/>
+              </a:spcAft>
+              <a:defRPr sz="1900" b="0">
+                <a:solidFill>
+                  <a:srgbClr val="182B3A"/>
+                </a:solidFill>
+                <a:latin typeface="Arial"/>
+              </a:defRPr>
+            </a:pPr>
+            <a:r>
+              <a:t>12 ÷ 7 = 1 r 5</a:t>
+            </a:r>
+          </a:p>
+        </p:txBody>
+      </p:sp>
+      <p:sp>
+        <p:nvSpPr>
+          <p:cNvPr id="19" name="TextBox 18"/>
+          <p:cNvSpPr txBox="1"/>
+          <p:nvPr/>
+        </p:nvSpPr>
+        <p:spPr>
+          <a:xfrm>
+            <a:off x="2734056" y="4581144"/>
+            <a:ext cx="2029968" cy="310896"/>
+          </a:xfrm>
+          <a:prstGeom prst="rect">
+            <a:avLst/>
+          </a:prstGeom>
+          <a:noFill/>
+        </p:spPr>
+        <p:txBody>
+          <a:bodyPr wrap="none" lIns="0" rIns="0" tIns="0" bIns="0">
+            <a:spAutoFit/>
+          </a:bodyPr>
+          <a:lstStyle/>
+          <a:p>
+            <a:pPr algn="l">
+              <a:lnSpc>
+                <a:spcPts val="2128"/>
+              </a:lnSpc>
+              <a:spcBef>
+                <a:spcPts val="0"/>
+              </a:spcBef>
+              <a:spcAft>
+                <a:spcPts val="0"/>
+              </a:spcAft>
+              <a:defRPr sz="1900" b="0">
+                <a:solidFill>
+                  <a:srgbClr val="182B3A"/>
+                </a:solidFill>
+                <a:latin typeface="Arial"/>
+              </a:defRPr>
+            </a:pPr>
+            <a:r>
+              <a:t>Blue = 4 × 1</a:t>
+            </a:r>
+          </a:p>
+        </p:txBody>
+      </p:sp>
+      <p:sp>
+        <p:nvSpPr>
+          <p:cNvPr id="20" name="TextBox 19"/>
+          <p:cNvSpPr txBox="1"/>
+          <p:nvPr/>
+        </p:nvSpPr>
+        <p:spPr>
+          <a:xfrm>
+            <a:off x="2734056" y="4864608"/>
+            <a:ext cx="2029968" cy="310896"/>
+          </a:xfrm>
+          <a:prstGeom prst="rect">
+            <a:avLst/>
+          </a:prstGeom>
+          <a:noFill/>
+        </p:spPr>
+        <p:txBody>
+          <a:bodyPr wrap="none" lIns="0" rIns="0" tIns="0" bIns="0">
+            <a:spAutoFit/>
+          </a:bodyPr>
+          <a:lstStyle/>
+          <a:p>
+            <a:pPr algn="l">
+              <a:lnSpc>
+                <a:spcPts val="2128"/>
+              </a:lnSpc>
+              <a:spcBef>
+                <a:spcPts val="0"/>
+              </a:spcBef>
+              <a:spcAft>
+                <a:spcPts val="0"/>
+              </a:spcAft>
+              <a:defRPr sz="1900" b="0">
+                <a:solidFill>
+                  <a:srgbClr val="182B3A"/>
+                </a:solidFill>
+                <a:latin typeface="Arial"/>
+              </a:defRPr>
+            </a:pPr>
+            <a:r>
+              <a:t>Blue = 4</a:t>
+            </a:r>
+          </a:p>
+        </p:txBody>
+      </p:sp>
+      <p:sp>
+        <p:nvSpPr>
+          <p:cNvPr id="21" name="TextBox 20"/>
+          <p:cNvSpPr txBox="1"/>
+          <p:nvPr/>
+        </p:nvSpPr>
+        <p:spPr>
+          <a:xfrm>
+            <a:off x="594360" y="5394960"/>
+            <a:ext cx="4206240" cy="256032"/>
+          </a:xfrm>
+          <a:prstGeom prst="rect">
+            <a:avLst/>
+          </a:prstGeom>
+          <a:noFill/>
+        </p:spPr>
+        <p:txBody>
+          <a:bodyPr wrap="none" lIns="0" rIns="0" tIns="0" bIns="0">
+            <a:spAutoFit/>
+          </a:bodyPr>
+          <a:lstStyle/>
+          <a:p>
+            <a:pPr algn="l">
+              <a:lnSpc>
+                <a:spcPts val="2016"/>
+              </a:lnSpc>
+              <a:spcBef>
+                <a:spcPts val="0"/>
+              </a:spcBef>
+              <a:spcAft>
+                <a:spcPts val="0"/>
+              </a:spcAft>
+              <a:defRPr sz="1800" b="0">
+                <a:solidFill>
+                  <a:srgbClr val="182B3A"/>
+                </a:solidFill>
+                <a:latin typeface="Arial"/>
+              </a:defRPr>
+            </a:pPr>
+            <a:r>
+              <a:t>4 blue counters</a:t>
+            </a:r>
+          </a:p>
+        </p:txBody>
+      </p:sp>
+      <p:sp>
+        <p:nvSpPr>
+          <p:cNvPr id="22" name="Rectangle 21"/>
+          <p:cNvSpPr/>
+          <p:nvPr/>
+        </p:nvSpPr>
+        <p:spPr>
+          <a:xfrm>
+            <a:off x="384048" y="5724144"/>
+            <a:ext cx="4588764" cy="1929384"/>
+          </a:xfrm>
+          <a:prstGeom prst="rect">
+            <a:avLst/>
+          </a:prstGeom>
+          <a:solidFill>
+            <a:srgbClr val="FFFFFF"/>
+          </a:solidFill>
+          <a:ln w="7620">
+            <a:solidFill>
+              <a:srgbClr val="D8E0E6"/>
+            </a:solidFill>
+          </a:ln>
+        </p:spPr>
+        <p:style>
+          <a:lnRef idx="1">
+            <a:schemeClr val="accent1"/>
+          </a:lnRef>
+          <a:fillRef idx="3">
+            <a:schemeClr val="accent1"/>
+          </a:fillRef>
+          <a:effectRef idx="0">
+            <a:schemeClr val="accent1"/>
+          </a:effectRef>
+          <a:fontRef idx="minor">
+            <a:schemeClr val="lt1"/>
+          </a:fontRef>
+        </p:style>
+        <p:txBody>
+          <a:bodyPr rtlCol="0" anchor="ctr"/>
+          <a:lstStyle/>
+          <a:p>
+            <a:pPr algn="ctr"/>
+          </a:p>
+        </p:txBody>
+      </p:sp>
+      <p:sp>
+        <p:nvSpPr>
+          <p:cNvPr id="23" name="TextBox 22"/>
+          <p:cNvSpPr txBox="1"/>
+          <p:nvPr/>
+        </p:nvSpPr>
+        <p:spPr>
+          <a:xfrm>
+            <a:off x="475488" y="5760720"/>
+            <a:ext cx="4392168" cy="841248"/>
+          </a:xfrm>
+          <a:prstGeom prst="rect">
+            <a:avLst/>
+          </a:prstGeom>
+          <a:noFill/>
+        </p:spPr>
+        <p:txBody>
+          <a:bodyPr wrap="square" tIns="36576" bIns="36576" anchor="t">
+            <a:spAutoFit/>
+          </a:bodyPr>
+          <a:lstStyle/>
+          <a:p>
+            <a:pPr>
+              <a:lnSpc>
+                <a:spcPts val="1944"/>
+              </a:lnSpc>
+              <a:spcBef>
+                <a:spcPts val="0"/>
+              </a:spcBef>
+              <a:spcAft>
+                <a:spcPts val="0"/>
+              </a:spcAft>
+              <a:defRPr sz="1800" b="1">
+                <a:solidFill>
+                  <a:srgbClr val="182B3A"/>
+                </a:solidFill>
+                <a:latin typeface="Arial"/>
+              </a:defRPr>
+            </a:pPr>
+            <a:r>
+              <a:t>3.  Share 12 sweets between A and B in ratio 1:3. How many does B get?</a:t>
+            </a:r>
+          </a:p>
+        </p:txBody>
+      </p:sp>
+      <p:sp>
+        <p:nvSpPr>
+          <p:cNvPr id="24" name="TextBox 23"/>
+          <p:cNvSpPr txBox="1"/>
+          <p:nvPr/>
+        </p:nvSpPr>
+        <p:spPr>
+          <a:xfrm>
+            <a:off x="594360" y="6583679"/>
+            <a:ext cx="2029968" cy="310896"/>
+          </a:xfrm>
+          <a:prstGeom prst="rect">
+            <a:avLst/>
+          </a:prstGeom>
+          <a:noFill/>
+        </p:spPr>
+        <p:txBody>
+          <a:bodyPr wrap="none" lIns="0" rIns="0" tIns="0" bIns="0">
+            <a:spAutoFit/>
+          </a:bodyPr>
+          <a:lstStyle/>
+          <a:p>
+            <a:pPr algn="l">
+              <a:lnSpc>
+                <a:spcPts val="2128"/>
+              </a:lnSpc>
+              <a:spcBef>
+                <a:spcPts val="0"/>
+              </a:spcBef>
+              <a:spcAft>
+                <a:spcPts val="0"/>
+              </a:spcAft>
+              <a:defRPr sz="1900" b="0">
+                <a:solidFill>
+                  <a:srgbClr val="182B3A"/>
+                </a:solidFill>
+                <a:latin typeface="Arial"/>
+              </a:defRPr>
+            </a:pPr>
+            <a:r>
+              <a:t>1 + 3 = 4 parts</a:t>
+            </a:r>
+          </a:p>
+        </p:txBody>
+      </p:sp>
+      <p:sp>
+        <p:nvSpPr>
+          <p:cNvPr id="25" name="TextBox 24"/>
+          <p:cNvSpPr txBox="1"/>
+          <p:nvPr/>
+        </p:nvSpPr>
+        <p:spPr>
+          <a:xfrm>
+            <a:off x="594360" y="6867144"/>
+            <a:ext cx="2029968" cy="310896"/>
+          </a:xfrm>
+          <a:prstGeom prst="rect">
+            <a:avLst/>
+          </a:prstGeom>
+          <a:noFill/>
+        </p:spPr>
+        <p:txBody>
+          <a:bodyPr wrap="none" lIns="0" rIns="0" tIns="0" bIns="0">
+            <a:spAutoFit/>
+          </a:bodyPr>
+          <a:lstStyle/>
+          <a:p>
+            <a:pPr algn="l">
+              <a:lnSpc>
+                <a:spcPts val="2128"/>
+              </a:lnSpc>
+              <a:spcBef>
+                <a:spcPts val="0"/>
+              </a:spcBef>
+              <a:spcAft>
+                <a:spcPts val="0"/>
+              </a:spcAft>
+              <a:defRPr sz="1900" b="0">
+                <a:solidFill>
+                  <a:srgbClr val="182B3A"/>
+                </a:solidFill>
+                <a:latin typeface="Arial"/>
+              </a:defRPr>
+            </a:pPr>
+            <a:r>
+              <a:t>12 ÷ 4 = 3</a:t>
+            </a:r>
+          </a:p>
+        </p:txBody>
+      </p:sp>
+      <p:sp>
+        <p:nvSpPr>
+          <p:cNvPr id="26" name="TextBox 25"/>
+          <p:cNvSpPr txBox="1"/>
+          <p:nvPr/>
+        </p:nvSpPr>
+        <p:spPr>
+          <a:xfrm>
+            <a:off x="2734056" y="6583679"/>
+            <a:ext cx="2029968" cy="310896"/>
+          </a:xfrm>
+          <a:prstGeom prst="rect">
+            <a:avLst/>
+          </a:prstGeom>
+          <a:noFill/>
+        </p:spPr>
+        <p:txBody>
+          <a:bodyPr wrap="none" lIns="0" rIns="0" tIns="0" bIns="0">
+            <a:spAutoFit/>
+          </a:bodyPr>
+          <a:lstStyle/>
+          <a:p>
+            <a:pPr algn="l">
+              <a:lnSpc>
+                <a:spcPts val="2128"/>
+              </a:lnSpc>
+              <a:spcBef>
+                <a:spcPts val="0"/>
+              </a:spcBef>
+              <a:spcAft>
+                <a:spcPts val="0"/>
+              </a:spcAft>
+              <a:defRPr sz="1900" b="0">
+                <a:solidFill>
+                  <a:srgbClr val="182B3A"/>
+                </a:solidFill>
+                <a:latin typeface="Arial"/>
+              </a:defRPr>
+            </a:pPr>
+            <a:r>
+              <a:t>B = 3 + 3</a:t>
+            </a:r>
+          </a:p>
+        </p:txBody>
+      </p:sp>
+      <p:sp>
+        <p:nvSpPr>
+          <p:cNvPr id="27" name="TextBox 26"/>
+          <p:cNvSpPr txBox="1"/>
+          <p:nvPr/>
+        </p:nvSpPr>
+        <p:spPr>
+          <a:xfrm>
+            <a:off x="2734056" y="6867144"/>
+            <a:ext cx="2029968" cy="310896"/>
+          </a:xfrm>
+          <a:prstGeom prst="rect">
+            <a:avLst/>
+          </a:prstGeom>
+          <a:noFill/>
+        </p:spPr>
+        <p:txBody>
+          <a:bodyPr wrap="none" lIns="0" rIns="0" tIns="0" bIns="0">
+            <a:spAutoFit/>
+          </a:bodyPr>
+          <a:lstStyle/>
+          <a:p>
+            <a:pPr algn="l">
+              <a:lnSpc>
+                <a:spcPts val="2128"/>
+              </a:lnSpc>
+              <a:spcBef>
+                <a:spcPts val="0"/>
+              </a:spcBef>
+              <a:spcAft>
+                <a:spcPts val="0"/>
+              </a:spcAft>
+              <a:defRPr sz="1900" b="0">
+                <a:solidFill>
+                  <a:srgbClr val="182B3A"/>
+                </a:solidFill>
+                <a:latin typeface="Arial"/>
+              </a:defRPr>
+            </a:pPr>
+            <a:r>
+              <a:t>B = 6</a:t>
+            </a:r>
+          </a:p>
+        </p:txBody>
+      </p:sp>
+      <p:sp>
+        <p:nvSpPr>
+          <p:cNvPr id="28" name="TextBox 27"/>
+          <p:cNvSpPr txBox="1"/>
+          <p:nvPr/>
+        </p:nvSpPr>
+        <p:spPr>
+          <a:xfrm>
+            <a:off x="594360" y="7397496"/>
+            <a:ext cx="4206240" cy="256032"/>
+          </a:xfrm>
+          <a:prstGeom prst="rect">
+            <a:avLst/>
+          </a:prstGeom>
+          <a:noFill/>
+        </p:spPr>
+        <p:txBody>
+          <a:bodyPr wrap="none" lIns="0" rIns="0" tIns="0" bIns="0">
+            <a:spAutoFit/>
+          </a:bodyPr>
+          <a:lstStyle/>
+          <a:p>
+            <a:pPr algn="l">
+              <a:lnSpc>
+                <a:spcPts val="2016"/>
+              </a:lnSpc>
+              <a:spcBef>
+                <a:spcPts val="0"/>
+              </a:spcBef>
+              <a:spcAft>
+                <a:spcPts val="0"/>
+              </a:spcAft>
+              <a:defRPr sz="1800" b="0">
+                <a:solidFill>
+                  <a:srgbClr val="182B3A"/>
+                </a:solidFill>
+                <a:latin typeface="Arial"/>
+              </a:defRPr>
+            </a:pPr>
+            <a:r>
+              <a:t>B receives 6 sweets</a:t>
+            </a:r>
+          </a:p>
+        </p:txBody>
+      </p:sp>
+      <p:sp>
+        <p:nvSpPr>
+          <p:cNvPr id="29" name="Rectangle 28"/>
+          <p:cNvSpPr/>
+          <p:nvPr/>
+        </p:nvSpPr>
+        <p:spPr>
+          <a:xfrm>
+            <a:off x="5004816" y="1234440"/>
+            <a:ext cx="4588764" cy="420624"/>
+          </a:xfrm>
+          <a:prstGeom prst="rect">
+            <a:avLst/>
+          </a:prstGeom>
+          <a:solidFill>
+            <a:srgbClr val="3559A2"/>
+          </a:solidFill>
+          <a:ln>
+            <a:noFill/>
+          </a:ln>
+        </p:spPr>
+        <p:style>
+          <a:lnRef idx="1">
+            <a:schemeClr val="accent1"/>
+          </a:lnRef>
+          <a:fillRef idx="3">
+            <a:schemeClr val="accent1"/>
+          </a:fillRef>
+          <a:effectRef idx="0">
+            <a:schemeClr val="accent1"/>
+          </a:effectRef>
+          <a:fontRef idx="minor">
+            <a:schemeClr val="lt1"/>
+          </a:fontRef>
+        </p:style>
+        <p:txBody>
+          <a:bodyPr rtlCol="0" anchor="ctr"/>
+          <a:lstStyle/>
+          <a:p>
+            <a:pPr algn="ctr"/>
+          </a:p>
+        </p:txBody>
+      </p:sp>
+      <p:sp>
+        <p:nvSpPr>
+          <p:cNvPr id="30" name="TextBox 29"/>
+          <p:cNvSpPr txBox="1"/>
+          <p:nvPr/>
+        </p:nvSpPr>
+        <p:spPr>
+          <a:xfrm>
+            <a:off x="5068824" y="1261872"/>
+            <a:ext cx="4474464" cy="347472"/>
+          </a:xfrm>
+          <a:prstGeom prst="rect">
+            <a:avLst/>
+          </a:prstGeom>
+          <a:noFill/>
+        </p:spPr>
+        <p:txBody>
+          <a:bodyPr wrap="square" tIns="36576" bIns="36576" anchor="t">
+            <a:spAutoFit/>
+          </a:bodyPr>
+          <a:lstStyle/>
+          <a:p>
+            <a:pPr>
+              <a:lnSpc>
+                <a:spcPts val="2160"/>
+              </a:lnSpc>
+              <a:spcBef>
+                <a:spcPts val="0"/>
+              </a:spcBef>
+              <a:spcAft>
+                <a:spcPts val="0"/>
+              </a:spcAft>
+              <a:defRPr sz="2000" b="1">
+                <a:solidFill>
+                  <a:srgbClr val="FFFFFF"/>
+                </a:solidFill>
+                <a:latin typeface="Arial"/>
+              </a:defRPr>
+            </a:pPr>
+            <a:r>
+              <a:t>Build</a:t>
+            </a:r>
+          </a:p>
+        </p:txBody>
+      </p:sp>
+      <p:sp>
+        <p:nvSpPr>
+          <p:cNvPr id="31" name="Rectangle 30"/>
+          <p:cNvSpPr/>
+          <p:nvPr/>
+        </p:nvSpPr>
+        <p:spPr>
+          <a:xfrm>
+            <a:off x="5004816" y="1719072"/>
+            <a:ext cx="4588764" cy="1929384"/>
+          </a:xfrm>
+          <a:prstGeom prst="rect">
+            <a:avLst/>
+          </a:prstGeom>
+          <a:solidFill>
+            <a:srgbClr val="FFFFFF"/>
+          </a:solidFill>
+          <a:ln w="7620">
+            <a:solidFill>
+              <a:srgbClr val="D8E0E6"/>
+            </a:solidFill>
+          </a:ln>
+        </p:spPr>
+        <p:style>
+          <a:lnRef idx="1">
+            <a:schemeClr val="accent1"/>
+          </a:lnRef>
+          <a:fillRef idx="3">
+            <a:schemeClr val="accent1"/>
+          </a:fillRef>
+          <a:effectRef idx="0">
+            <a:schemeClr val="accent1"/>
+          </a:effectRef>
+          <a:fontRef idx="minor">
+            <a:schemeClr val="lt1"/>
+          </a:fontRef>
+        </p:style>
+        <p:txBody>
+          <a:bodyPr rtlCol="0" anchor="ctr"/>
+          <a:lstStyle/>
+          <a:p>
+            <a:pPr algn="ctr"/>
+          </a:p>
+        </p:txBody>
+      </p:sp>
+      <p:sp>
+        <p:nvSpPr>
+          <p:cNvPr id="32" name="TextBox 31"/>
+          <p:cNvSpPr txBox="1"/>
+          <p:nvPr/>
+        </p:nvSpPr>
+        <p:spPr>
+          <a:xfrm>
+            <a:off x="5096256" y="1755648"/>
+            <a:ext cx="4392168" cy="841248"/>
+          </a:xfrm>
+          <a:prstGeom prst="rect">
+            <a:avLst/>
+          </a:prstGeom>
+          <a:noFill/>
+        </p:spPr>
+        <p:txBody>
+          <a:bodyPr wrap="square" tIns="36576" bIns="36576" anchor="t">
+            <a:spAutoFit/>
+          </a:bodyPr>
+          <a:lstStyle/>
+          <a:p>
+            <a:pPr>
+              <a:lnSpc>
+                <a:spcPts val="1944"/>
+              </a:lnSpc>
+              <a:spcBef>
+                <a:spcPts val="0"/>
+              </a:spcBef>
+              <a:spcAft>
+                <a:spcPts val="0"/>
+              </a:spcAft>
+              <a:defRPr sz="1800" b="1">
+                <a:solidFill>
+                  <a:srgbClr val="182B3A"/>
+                </a:solidFill>
+                <a:latin typeface="Arial"/>
+              </a:defRPr>
+            </a:pPr>
+            <a:r>
+              <a:t>1.  A and B share counters in ratio 2:7. B has 30 more than A. How many does A have?</a:t>
+            </a:r>
+          </a:p>
+        </p:txBody>
+      </p:sp>
+      <p:sp>
+        <p:nvSpPr>
+          <p:cNvPr id="33" name="TextBox 32"/>
+          <p:cNvSpPr txBox="1"/>
+          <p:nvPr/>
+        </p:nvSpPr>
+        <p:spPr>
+          <a:xfrm>
+            <a:off x="5215128" y="2578608"/>
+            <a:ext cx="2029968" cy="310896"/>
+          </a:xfrm>
+          <a:prstGeom prst="rect">
+            <a:avLst/>
+          </a:prstGeom>
+          <a:noFill/>
+        </p:spPr>
+        <p:txBody>
+          <a:bodyPr wrap="none" lIns="0" rIns="0" tIns="0" bIns="0">
+            <a:spAutoFit/>
+          </a:bodyPr>
+          <a:lstStyle/>
+          <a:p>
+            <a:pPr algn="l">
+              <a:lnSpc>
+                <a:spcPts val="2128"/>
+              </a:lnSpc>
+              <a:spcBef>
+                <a:spcPts val="0"/>
+              </a:spcBef>
+              <a:spcAft>
+                <a:spcPts val="0"/>
+              </a:spcAft>
+              <a:defRPr sz="1900" b="0">
+                <a:solidFill>
+                  <a:srgbClr val="182B3A"/>
+                </a:solidFill>
+                <a:latin typeface="Arial"/>
+              </a:defRPr>
+            </a:pPr>
+            <a:r>
+              <a:t>7 − 2 = 5 parts</a:t>
+            </a:r>
+          </a:p>
+        </p:txBody>
+      </p:sp>
+      <p:sp>
+        <p:nvSpPr>
+          <p:cNvPr id="34" name="TextBox 33"/>
+          <p:cNvSpPr txBox="1"/>
+          <p:nvPr/>
+        </p:nvSpPr>
+        <p:spPr>
+          <a:xfrm>
+            <a:off x="5215128" y="2862072"/>
+            <a:ext cx="2029968" cy="310896"/>
+          </a:xfrm>
+          <a:prstGeom prst="rect">
+            <a:avLst/>
+          </a:prstGeom>
+          <a:noFill/>
+        </p:spPr>
+        <p:txBody>
+          <a:bodyPr wrap="none" lIns="0" rIns="0" tIns="0" bIns="0">
+            <a:spAutoFit/>
+          </a:bodyPr>
+          <a:lstStyle/>
+          <a:p>
+            <a:pPr algn="l">
+              <a:lnSpc>
+                <a:spcPts val="2128"/>
+              </a:lnSpc>
+              <a:spcBef>
+                <a:spcPts val="0"/>
+              </a:spcBef>
+              <a:spcAft>
+                <a:spcPts val="0"/>
+              </a:spcAft>
+              <a:defRPr sz="1900" b="0">
+                <a:solidFill>
+                  <a:srgbClr val="182B3A"/>
+                </a:solidFill>
+                <a:latin typeface="Arial"/>
+              </a:defRPr>
+            </a:pPr>
+            <a:r>
+              <a:t>30 ÷ 5 = 6</a:t>
+            </a:r>
+          </a:p>
+        </p:txBody>
+      </p:sp>
+      <p:sp>
+        <p:nvSpPr>
+          <p:cNvPr id="35" name="TextBox 34"/>
+          <p:cNvSpPr txBox="1"/>
+          <p:nvPr/>
+        </p:nvSpPr>
+        <p:spPr>
+          <a:xfrm>
+            <a:off x="7354824" y="2578608"/>
+            <a:ext cx="2029968" cy="310896"/>
+          </a:xfrm>
+          <a:prstGeom prst="rect">
+            <a:avLst/>
+          </a:prstGeom>
+          <a:noFill/>
+        </p:spPr>
+        <p:txBody>
+          <a:bodyPr wrap="none" lIns="0" rIns="0" tIns="0" bIns="0">
+            <a:spAutoFit/>
+          </a:bodyPr>
+          <a:lstStyle/>
+          <a:p>
+            <a:pPr algn="l">
+              <a:lnSpc>
+                <a:spcPts val="2128"/>
+              </a:lnSpc>
+              <a:spcBef>
+                <a:spcPts val="0"/>
+              </a:spcBef>
+              <a:spcAft>
+                <a:spcPts val="0"/>
+              </a:spcAft>
+              <a:defRPr sz="1900" b="0">
+                <a:solidFill>
+                  <a:srgbClr val="182B3A"/>
+                </a:solidFill>
+                <a:latin typeface="Arial"/>
+              </a:defRPr>
+            </a:pPr>
+            <a:r>
+              <a:t>A = 2 + 6</a:t>
+            </a:r>
+          </a:p>
+        </p:txBody>
+      </p:sp>
+      <p:sp>
+        <p:nvSpPr>
+          <p:cNvPr id="36" name="TextBox 35"/>
+          <p:cNvSpPr txBox="1"/>
+          <p:nvPr/>
+        </p:nvSpPr>
+        <p:spPr>
+          <a:xfrm>
+            <a:off x="7354824" y="2862072"/>
+            <a:ext cx="2029968" cy="310896"/>
+          </a:xfrm>
+          <a:prstGeom prst="rect">
+            <a:avLst/>
+          </a:prstGeom>
+          <a:noFill/>
+        </p:spPr>
+        <p:txBody>
+          <a:bodyPr wrap="none" lIns="0" rIns="0" tIns="0" bIns="0">
+            <a:spAutoFit/>
+          </a:bodyPr>
+          <a:lstStyle/>
+          <a:p>
+            <a:pPr algn="l">
+              <a:lnSpc>
+                <a:spcPts val="2128"/>
+              </a:lnSpc>
+              <a:spcBef>
+                <a:spcPts val="0"/>
+              </a:spcBef>
+              <a:spcAft>
+                <a:spcPts val="0"/>
+              </a:spcAft>
+              <a:defRPr sz="1900" b="0">
+                <a:solidFill>
+                  <a:srgbClr val="182B3A"/>
+                </a:solidFill>
+                <a:latin typeface="Arial"/>
+              </a:defRPr>
+            </a:pPr>
+            <a:r>
+              <a:t>A = 8</a:t>
+            </a:r>
+          </a:p>
+        </p:txBody>
+      </p:sp>
+      <p:sp>
+        <p:nvSpPr>
+          <p:cNvPr id="37" name="TextBox 36"/>
+          <p:cNvSpPr txBox="1"/>
+          <p:nvPr/>
+        </p:nvSpPr>
+        <p:spPr>
+          <a:xfrm>
+            <a:off x="5215128" y="3392424"/>
+            <a:ext cx="4206240" cy="256032"/>
+          </a:xfrm>
+          <a:prstGeom prst="rect">
+            <a:avLst/>
+          </a:prstGeom>
+          <a:noFill/>
+        </p:spPr>
+        <p:txBody>
+          <a:bodyPr wrap="none" lIns="0" rIns="0" tIns="0" bIns="0">
+            <a:spAutoFit/>
+          </a:bodyPr>
+          <a:lstStyle/>
+          <a:p>
+            <a:pPr algn="l">
+              <a:lnSpc>
+                <a:spcPts val="2016"/>
+              </a:lnSpc>
+              <a:spcBef>
+                <a:spcPts val="0"/>
+              </a:spcBef>
+              <a:spcAft>
+                <a:spcPts val="0"/>
+              </a:spcAft>
+              <a:defRPr sz="1800" b="0">
+                <a:solidFill>
+                  <a:srgbClr val="182B3A"/>
+                </a:solidFill>
+                <a:latin typeface="Arial"/>
+              </a:defRPr>
+            </a:pPr>
+            <a:r>
+              <a:t>A has 8 counters</a:t>
+            </a:r>
+          </a:p>
+        </p:txBody>
+      </p:sp>
+      <p:sp>
+        <p:nvSpPr>
+          <p:cNvPr id="38" name="Rectangle 37"/>
+          <p:cNvSpPr/>
+          <p:nvPr/>
+        </p:nvSpPr>
+        <p:spPr>
+          <a:xfrm>
+            <a:off x="5004816" y="3721608"/>
+            <a:ext cx="4588764" cy="1929384"/>
+          </a:xfrm>
+          <a:prstGeom prst="rect">
+            <a:avLst/>
+          </a:prstGeom>
+          <a:solidFill>
+            <a:srgbClr val="FFFFFF"/>
+          </a:solidFill>
+          <a:ln w="7620">
+            <a:solidFill>
+              <a:srgbClr val="D8E0E6"/>
+            </a:solidFill>
+          </a:ln>
+        </p:spPr>
+        <p:style>
+          <a:lnRef idx="1">
+            <a:schemeClr val="accent1"/>
+          </a:lnRef>
+          <a:fillRef idx="3">
+            <a:schemeClr val="accent1"/>
+          </a:fillRef>
+          <a:effectRef idx="0">
+            <a:schemeClr val="accent1"/>
+          </a:effectRef>
+          <a:fontRef idx="minor">
+            <a:schemeClr val="lt1"/>
+          </a:fontRef>
+        </p:style>
+        <p:txBody>
+          <a:bodyPr rtlCol="0" anchor="ctr"/>
+          <a:lstStyle/>
+          <a:p>
+            <a:pPr algn="ctr"/>
+          </a:p>
+        </p:txBody>
+      </p:sp>
+      <p:sp>
+        <p:nvSpPr>
+          <p:cNvPr id="39" name="TextBox 38"/>
+          <p:cNvSpPr txBox="1"/>
+          <p:nvPr/>
+        </p:nvSpPr>
+        <p:spPr>
+          <a:xfrm>
+            <a:off x="5096256" y="3758184"/>
+            <a:ext cx="4392168" cy="841248"/>
+          </a:xfrm>
+          <a:prstGeom prst="rect">
+            <a:avLst/>
+          </a:prstGeom>
+          <a:noFill/>
+        </p:spPr>
+        <p:txBody>
+          <a:bodyPr wrap="square" tIns="36576" bIns="36576" anchor="t">
+            <a:spAutoFit/>
+          </a:bodyPr>
+          <a:lstStyle/>
+          <a:p>
+            <a:pPr>
+              <a:lnSpc>
+                <a:spcPts val="1944"/>
+              </a:lnSpc>
+              <a:spcBef>
+                <a:spcPts val="0"/>
+              </a:spcBef>
+              <a:spcAft>
+                <a:spcPts val="0"/>
+              </a:spcAft>
+              <a:defRPr sz="1800" b="1">
+                <a:solidFill>
+                  <a:srgbClr val="182B3A"/>
+                </a:solidFill>
+                <a:latin typeface="Arial"/>
+              </a:defRPr>
+            </a:pPr>
+            <a:r>
+              <a:t>2.  Red:blue = 4:3. There are 15 blue counters. How many red counters?</a:t>
+            </a:r>
+          </a:p>
+        </p:txBody>
+      </p:sp>
+      <p:sp>
+        <p:nvSpPr>
+          <p:cNvPr id="40" name="TextBox 39"/>
+          <p:cNvSpPr txBox="1"/>
+          <p:nvPr/>
+        </p:nvSpPr>
+        <p:spPr>
+          <a:xfrm>
+            <a:off x="5215128" y="4581144"/>
+            <a:ext cx="2029968" cy="310896"/>
+          </a:xfrm>
+          <a:prstGeom prst="rect">
+            <a:avLst/>
+          </a:prstGeom>
+          <a:noFill/>
+        </p:spPr>
+        <p:txBody>
+          <a:bodyPr wrap="none" lIns="0" rIns="0" tIns="0" bIns="0">
+            <a:spAutoFit/>
+          </a:bodyPr>
+          <a:lstStyle/>
+          <a:p>
+            <a:pPr algn="l">
+              <a:lnSpc>
+                <a:spcPts val="2128"/>
+              </a:lnSpc>
+              <a:spcBef>
+                <a:spcPts val="0"/>
+              </a:spcBef>
+              <a:spcAft>
+                <a:spcPts val="0"/>
+              </a:spcAft>
+              <a:defRPr sz="1900" b="0">
+                <a:solidFill>
+                  <a:srgbClr val="182B3A"/>
+                </a:solidFill>
+                <a:latin typeface="Arial"/>
+              </a:defRPr>
+            </a:pPr>
+            <a:r>
+              <a:t>15 ÷ 4 = 3.75</a:t>
+            </a:r>
+          </a:p>
+        </p:txBody>
+      </p:sp>
+      <p:sp>
+        <p:nvSpPr>
+          <p:cNvPr id="41" name="TextBox 40"/>
+          <p:cNvSpPr txBox="1"/>
+          <p:nvPr/>
+        </p:nvSpPr>
+        <p:spPr>
+          <a:xfrm>
+            <a:off x="7354824" y="4581144"/>
+            <a:ext cx="2029968" cy="310896"/>
+          </a:xfrm>
+          <a:prstGeom prst="rect">
+            <a:avLst/>
+          </a:prstGeom>
+          <a:noFill/>
+        </p:spPr>
+        <p:txBody>
+          <a:bodyPr wrap="none" lIns="0" rIns="0" tIns="0" bIns="0">
+            <a:spAutoFit/>
+          </a:bodyPr>
+          <a:lstStyle/>
+          <a:p>
+            <a:pPr algn="l">
+              <a:lnSpc>
+                <a:spcPts val="2128"/>
+              </a:lnSpc>
+              <a:spcBef>
+                <a:spcPts val="0"/>
+              </a:spcBef>
+              <a:spcAft>
+                <a:spcPts val="0"/>
+              </a:spcAft>
+              <a:defRPr sz="1900" b="0">
+                <a:solidFill>
+                  <a:srgbClr val="182B3A"/>
+                </a:solidFill>
+                <a:latin typeface="Arial"/>
+              </a:defRPr>
+            </a:pPr>
+            <a:r>
+              <a:t>Red = 3 × 3.75</a:t>
+            </a:r>
+          </a:p>
+        </p:txBody>
+      </p:sp>
+      <p:sp>
+        <p:nvSpPr>
+          <p:cNvPr id="42" name="TextBox 41"/>
+          <p:cNvSpPr txBox="1"/>
+          <p:nvPr/>
+        </p:nvSpPr>
+        <p:spPr>
+          <a:xfrm>
+            <a:off x="7354824" y="4864608"/>
+            <a:ext cx="2029968" cy="310896"/>
+          </a:xfrm>
+          <a:prstGeom prst="rect">
+            <a:avLst/>
+          </a:prstGeom>
+          <a:noFill/>
+        </p:spPr>
+        <p:txBody>
+          <a:bodyPr wrap="none" lIns="0" rIns="0" tIns="0" bIns="0">
+            <a:spAutoFit/>
+          </a:bodyPr>
+          <a:lstStyle/>
+          <a:p>
+            <a:pPr algn="l">
+              <a:lnSpc>
+                <a:spcPts val="2128"/>
+              </a:lnSpc>
+              <a:spcBef>
+                <a:spcPts val="0"/>
+              </a:spcBef>
+              <a:spcAft>
+                <a:spcPts val="0"/>
+              </a:spcAft>
+              <a:defRPr sz="1900" b="0">
+                <a:solidFill>
+                  <a:srgbClr val="182B3A"/>
+                </a:solidFill>
+                <a:latin typeface="Arial"/>
+              </a:defRPr>
+            </a:pPr>
+            <a:r>
+              <a:t>Red = 11.25</a:t>
+            </a:r>
+          </a:p>
+        </p:txBody>
+      </p:sp>
+      <p:sp>
+        <p:nvSpPr>
+          <p:cNvPr id="43" name="TextBox 42"/>
+          <p:cNvSpPr txBox="1"/>
+          <p:nvPr/>
+        </p:nvSpPr>
+        <p:spPr>
+          <a:xfrm>
+            <a:off x="5215128" y="5394960"/>
+            <a:ext cx="4206240" cy="256032"/>
+          </a:xfrm>
+          <a:prstGeom prst="rect">
+            <a:avLst/>
+          </a:prstGeom>
+          <a:noFill/>
+        </p:spPr>
+        <p:txBody>
+          <a:bodyPr wrap="none" lIns="0" rIns="0" tIns="0" bIns="0">
+            <a:spAutoFit/>
+          </a:bodyPr>
+          <a:lstStyle/>
+          <a:p>
+            <a:pPr algn="l">
+              <a:lnSpc>
+                <a:spcPts val="2016"/>
+              </a:lnSpc>
+              <a:spcBef>
+                <a:spcPts val="0"/>
+              </a:spcBef>
+              <a:spcAft>
+                <a:spcPts val="0"/>
+              </a:spcAft>
+              <a:defRPr sz="1800" b="0">
+                <a:solidFill>
+                  <a:srgbClr val="182B3A"/>
+                </a:solidFill>
+                <a:latin typeface="Arial"/>
+              </a:defRPr>
+            </a:pPr>
+            <a:r>
+              <a:t>11.25 red counters</a:t>
+            </a:r>
+          </a:p>
+        </p:txBody>
+      </p:sp>
+      <p:sp>
+        <p:nvSpPr>
+          <p:cNvPr id="44" name="Rectangle 43"/>
+          <p:cNvSpPr/>
+          <p:nvPr/>
+        </p:nvSpPr>
+        <p:spPr>
+          <a:xfrm>
+            <a:off x="5004816" y="5724144"/>
+            <a:ext cx="4588764" cy="1929384"/>
+          </a:xfrm>
+          <a:prstGeom prst="rect">
+            <a:avLst/>
+          </a:prstGeom>
+          <a:solidFill>
+            <a:srgbClr val="FFFFFF"/>
+          </a:solidFill>
+          <a:ln w="7620">
+            <a:solidFill>
+              <a:srgbClr val="D8E0E6"/>
+            </a:solidFill>
+          </a:ln>
+        </p:spPr>
+        <p:style>
+          <a:lnRef idx="1">
+            <a:schemeClr val="accent1"/>
+          </a:lnRef>
+          <a:fillRef idx="3">
+            <a:schemeClr val="accent1"/>
+          </a:fillRef>
+          <a:effectRef idx="0">
+            <a:schemeClr val="accent1"/>
+          </a:effectRef>
+          <a:fontRef idx="minor">
+            <a:schemeClr val="lt1"/>
+          </a:fontRef>
+        </p:style>
+        <p:txBody>
+          <a:bodyPr rtlCol="0" anchor="ctr"/>
+          <a:lstStyle/>
+          <a:p>
+            <a:pPr algn="ctr"/>
+          </a:p>
+        </p:txBody>
+      </p:sp>
+      <p:sp>
+        <p:nvSpPr>
+          <p:cNvPr id="45" name="TextBox 44"/>
+          <p:cNvSpPr txBox="1"/>
+          <p:nvPr/>
+        </p:nvSpPr>
+        <p:spPr>
+          <a:xfrm>
+            <a:off x="5096256" y="5760720"/>
+            <a:ext cx="4392168" cy="841248"/>
+          </a:xfrm>
+          <a:prstGeom prst="rect">
+            <a:avLst/>
+          </a:prstGeom>
+          <a:noFill/>
+        </p:spPr>
+        <p:txBody>
+          <a:bodyPr wrap="square" tIns="36576" bIns="36576" anchor="t">
+            <a:spAutoFit/>
+          </a:bodyPr>
+          <a:lstStyle/>
+          <a:p>
+            <a:pPr>
+              <a:lnSpc>
+                <a:spcPts val="1944"/>
+              </a:lnSpc>
+              <a:spcBef>
+                <a:spcPts val="0"/>
+              </a:spcBef>
+              <a:spcAft>
+                <a:spcPts val="0"/>
+              </a:spcAft>
+              <a:defRPr sz="1800" b="1">
+                <a:solidFill>
+                  <a:srgbClr val="182B3A"/>
+                </a:solidFill>
+                <a:latin typeface="Arial"/>
+              </a:defRPr>
+            </a:pPr>
+            <a:r>
+              <a:t>3.  A and B share 56 counters in ratio 3:5. How many more does B get than A?</a:t>
+            </a:r>
+          </a:p>
+        </p:txBody>
+      </p:sp>
+      <p:sp>
+        <p:nvSpPr>
+          <p:cNvPr id="46" name="TextBox 45"/>
+          <p:cNvSpPr txBox="1"/>
+          <p:nvPr/>
+        </p:nvSpPr>
+        <p:spPr>
+          <a:xfrm>
+            <a:off x="5215128" y="6583679"/>
+            <a:ext cx="2029968" cy="310896"/>
+          </a:xfrm>
+          <a:prstGeom prst="rect">
+            <a:avLst/>
+          </a:prstGeom>
+          <a:noFill/>
+        </p:spPr>
+        <p:txBody>
+          <a:bodyPr wrap="none" lIns="0" rIns="0" tIns="0" bIns="0">
+            <a:spAutoFit/>
+          </a:bodyPr>
+          <a:lstStyle/>
+          <a:p>
+            <a:pPr algn="l">
+              <a:lnSpc>
+                <a:spcPts val="2128"/>
+              </a:lnSpc>
+              <a:spcBef>
+                <a:spcPts val="0"/>
+              </a:spcBef>
+              <a:spcAft>
+                <a:spcPts val="0"/>
+              </a:spcAft>
+              <a:defRPr sz="1900" b="0">
+                <a:solidFill>
+                  <a:srgbClr val="182B3A"/>
+                </a:solidFill>
+                <a:latin typeface="Arial"/>
+              </a:defRPr>
+            </a:pPr>
+            <a:r>
+              <a:t>3 + 5 = 8 parts</a:t>
+            </a:r>
+          </a:p>
+        </p:txBody>
+      </p:sp>
+      <p:sp>
+        <p:nvSpPr>
+          <p:cNvPr id="47" name="TextBox 46"/>
+          <p:cNvSpPr txBox="1"/>
+          <p:nvPr/>
+        </p:nvSpPr>
+        <p:spPr>
+          <a:xfrm>
+            <a:off x="5215128" y="6867144"/>
+            <a:ext cx="2029968" cy="310896"/>
+          </a:xfrm>
+          <a:prstGeom prst="rect">
+            <a:avLst/>
+          </a:prstGeom>
+          <a:noFill/>
+        </p:spPr>
+        <p:txBody>
+          <a:bodyPr wrap="none" lIns="0" rIns="0" tIns="0" bIns="0">
+            <a:spAutoFit/>
+          </a:bodyPr>
+          <a:lstStyle/>
+          <a:p>
+            <a:pPr algn="l">
+              <a:lnSpc>
+                <a:spcPts val="2128"/>
+              </a:lnSpc>
+              <a:spcBef>
+                <a:spcPts val="0"/>
+              </a:spcBef>
+              <a:spcAft>
+                <a:spcPts val="0"/>
+              </a:spcAft>
+              <a:defRPr sz="1900" b="0">
+                <a:solidFill>
+                  <a:srgbClr val="182B3A"/>
+                </a:solidFill>
+                <a:latin typeface="Arial"/>
+              </a:defRPr>
+            </a:pPr>
+            <a:r>
+              <a:t>56 ÷ 8 = 7</a:t>
+            </a:r>
+          </a:p>
+        </p:txBody>
+      </p:sp>
+      <p:sp>
+        <p:nvSpPr>
+          <p:cNvPr id="48" name="TextBox 47"/>
+          <p:cNvSpPr txBox="1"/>
+          <p:nvPr/>
+        </p:nvSpPr>
+        <p:spPr>
+          <a:xfrm>
+            <a:off x="5215128" y="7150608"/>
+            <a:ext cx="2029968" cy="310896"/>
+          </a:xfrm>
+          <a:prstGeom prst="rect">
+            <a:avLst/>
+          </a:prstGeom>
+          <a:noFill/>
+        </p:spPr>
+        <p:txBody>
+          <a:bodyPr wrap="none" lIns="0" rIns="0" tIns="0" bIns="0">
+            <a:spAutoFit/>
+          </a:bodyPr>
+          <a:lstStyle/>
+          <a:p>
+            <a:pPr algn="l">
+              <a:lnSpc>
+                <a:spcPts val="2128"/>
+              </a:lnSpc>
+              <a:spcBef>
+                <a:spcPts val="0"/>
+              </a:spcBef>
+              <a:spcAft>
+                <a:spcPts val="0"/>
+              </a:spcAft>
+              <a:defRPr sz="1900" b="0">
+                <a:solidFill>
+                  <a:srgbClr val="182B3A"/>
+                </a:solidFill>
+                <a:latin typeface="Arial"/>
+              </a:defRPr>
+            </a:pPr>
+            <a:r>
+              <a:t>A = 3 × 7 = 21</a:t>
+            </a:r>
+          </a:p>
+        </p:txBody>
+      </p:sp>
+      <p:sp>
+        <p:nvSpPr>
+          <p:cNvPr id="49" name="TextBox 48"/>
+          <p:cNvSpPr txBox="1"/>
+          <p:nvPr/>
+        </p:nvSpPr>
+        <p:spPr>
+          <a:xfrm>
+            <a:off x="7354824" y="6583679"/>
+            <a:ext cx="2029968" cy="310896"/>
+          </a:xfrm>
+          <a:prstGeom prst="rect">
+            <a:avLst/>
+          </a:prstGeom>
+          <a:noFill/>
+        </p:spPr>
+        <p:txBody>
+          <a:bodyPr wrap="none" lIns="0" rIns="0" tIns="0" bIns="0">
+            <a:spAutoFit/>
+          </a:bodyPr>
+          <a:lstStyle/>
+          <a:p>
+            <a:pPr algn="l">
+              <a:lnSpc>
+                <a:spcPts val="2128"/>
+              </a:lnSpc>
+              <a:spcBef>
+                <a:spcPts val="0"/>
+              </a:spcBef>
+              <a:spcAft>
+                <a:spcPts val="0"/>
+              </a:spcAft>
+              <a:defRPr sz="1900" b="0">
+                <a:solidFill>
+                  <a:srgbClr val="182B3A"/>
+                </a:solidFill>
+                <a:latin typeface="Arial"/>
+              </a:defRPr>
+            </a:pPr>
+            <a:r>
+              <a:t>B = 5 × 7 = 35</a:t>
+            </a:r>
+          </a:p>
+        </p:txBody>
+      </p:sp>
+      <p:sp>
+        <p:nvSpPr>
+          <p:cNvPr id="50" name="TextBox 49"/>
+          <p:cNvSpPr txBox="1"/>
+          <p:nvPr/>
+        </p:nvSpPr>
+        <p:spPr>
+          <a:xfrm>
+            <a:off x="7354824" y="6867144"/>
+            <a:ext cx="2029968" cy="310896"/>
+          </a:xfrm>
+          <a:prstGeom prst="rect">
+            <a:avLst/>
+          </a:prstGeom>
+          <a:noFill/>
+        </p:spPr>
+        <p:txBody>
+          <a:bodyPr wrap="none" lIns="0" rIns="0" tIns="0" bIns="0">
+            <a:spAutoFit/>
+          </a:bodyPr>
+          <a:lstStyle/>
+          <a:p>
+            <a:pPr algn="l">
+              <a:lnSpc>
+                <a:spcPts val="2128"/>
+              </a:lnSpc>
+              <a:spcBef>
+                <a:spcPts val="0"/>
+              </a:spcBef>
+              <a:spcAft>
+                <a:spcPts val="0"/>
+              </a:spcAft>
+              <a:defRPr sz="1900" b="0">
+                <a:solidFill>
+                  <a:srgbClr val="182B3A"/>
+                </a:solidFill>
+                <a:latin typeface="Arial"/>
+              </a:defRPr>
+            </a:pPr>
+            <a:r>
+              <a:t>21 + 35 = 56</a:t>
+            </a:r>
+          </a:p>
+        </p:txBody>
+      </p:sp>
+      <p:sp>
+        <p:nvSpPr>
+          <p:cNvPr id="51" name="TextBox 50"/>
+          <p:cNvSpPr txBox="1"/>
+          <p:nvPr/>
+        </p:nvSpPr>
+        <p:spPr>
+          <a:xfrm>
+            <a:off x="5215128" y="7397496"/>
+            <a:ext cx="4206240" cy="256032"/>
+          </a:xfrm>
+          <a:prstGeom prst="rect">
+            <a:avLst/>
+          </a:prstGeom>
+          <a:noFill/>
+        </p:spPr>
+        <p:txBody>
+          <a:bodyPr wrap="none" lIns="0" rIns="0" tIns="0" bIns="0">
+            <a:spAutoFit/>
+          </a:bodyPr>
+          <a:lstStyle/>
+          <a:p>
+            <a:pPr algn="l">
+              <a:lnSpc>
+                <a:spcPts val="2016"/>
+              </a:lnSpc>
+              <a:spcBef>
+                <a:spcPts val="0"/>
+              </a:spcBef>
+              <a:spcAft>
+                <a:spcPts val="0"/>
+              </a:spcAft>
+              <a:defRPr sz="1800" b="0">
+                <a:solidFill>
+                  <a:srgbClr val="182B3A"/>
+                </a:solidFill>
+                <a:latin typeface="Arial"/>
+              </a:defRPr>
+            </a:pPr>
+            <a:r>
+              <a:t>B gets 56 more counters</a:t>
+            </a:r>
+          </a:p>
+        </p:txBody>
+      </p:sp>
+      <p:sp>
+        <p:nvSpPr>
+          <p:cNvPr id="52" name="Rectangle 51"/>
+          <p:cNvSpPr/>
+          <p:nvPr/>
+        </p:nvSpPr>
+        <p:spPr>
+          <a:xfrm>
+            <a:off x="9625584" y="1234440"/>
+            <a:ext cx="4588764" cy="420624"/>
+          </a:xfrm>
+          <a:prstGeom prst="rect">
+            <a:avLst/>
+          </a:prstGeom>
+          <a:solidFill>
+            <a:srgbClr val="754B87"/>
+          </a:solidFill>
+          <a:ln>
+            <a:noFill/>
+          </a:ln>
+        </p:spPr>
+        <p:style>
+          <a:lnRef idx="1">
+            <a:schemeClr val="accent1"/>
+          </a:lnRef>
+          <a:fillRef idx="3">
+            <a:schemeClr val="accent1"/>
+          </a:fillRef>
+          <a:effectRef idx="0">
+            <a:schemeClr val="accent1"/>
+          </a:effectRef>
+          <a:fontRef idx="minor">
+            <a:schemeClr val="lt1"/>
+          </a:fontRef>
+        </p:style>
+        <p:txBody>
+          <a:bodyPr rtlCol="0" anchor="ctr"/>
+          <a:lstStyle/>
+          <a:p>
+            <a:pPr algn="ctr"/>
+          </a:p>
+        </p:txBody>
+      </p:sp>
+      <p:sp>
+        <p:nvSpPr>
+          <p:cNvPr id="53" name="TextBox 52"/>
+          <p:cNvSpPr txBox="1"/>
+          <p:nvPr/>
+        </p:nvSpPr>
+        <p:spPr>
+          <a:xfrm>
+            <a:off x="9689592" y="1261872"/>
+            <a:ext cx="4474464" cy="347472"/>
+          </a:xfrm>
+          <a:prstGeom prst="rect">
+            <a:avLst/>
+          </a:prstGeom>
+          <a:noFill/>
+        </p:spPr>
+        <p:txBody>
+          <a:bodyPr wrap="square" tIns="36576" bIns="36576" anchor="t">
+            <a:spAutoFit/>
+          </a:bodyPr>
+          <a:lstStyle/>
+          <a:p>
+            <a:pPr>
+              <a:lnSpc>
+                <a:spcPts val="2160"/>
+              </a:lnSpc>
+              <a:spcBef>
+                <a:spcPts val="0"/>
+              </a:spcBef>
+              <a:spcAft>
+                <a:spcPts val="0"/>
+              </a:spcAft>
+              <a:defRPr sz="2000" b="1">
+                <a:solidFill>
+                  <a:srgbClr val="FFFFFF"/>
+                </a:solidFill>
+                <a:latin typeface="Arial"/>
+              </a:defRPr>
+            </a:pPr>
+            <a:r>
+              <a:t>Confidence</a:t>
+            </a:r>
+          </a:p>
+        </p:txBody>
+      </p:sp>
+      <p:sp>
+        <p:nvSpPr>
+          <p:cNvPr id="54" name="Rectangle 53"/>
+          <p:cNvSpPr/>
+          <p:nvPr/>
+        </p:nvSpPr>
+        <p:spPr>
+          <a:xfrm>
+            <a:off x="9625584" y="1719072"/>
+            <a:ext cx="4588764" cy="1929384"/>
+          </a:xfrm>
+          <a:prstGeom prst="rect">
+            <a:avLst/>
+          </a:prstGeom>
+          <a:solidFill>
+            <a:srgbClr val="FFFFFF"/>
+          </a:solidFill>
+          <a:ln w="7620">
+            <a:solidFill>
+              <a:srgbClr val="D8E0E6"/>
+            </a:solidFill>
+          </a:ln>
+        </p:spPr>
+        <p:style>
+          <a:lnRef idx="1">
+            <a:schemeClr val="accent1"/>
+          </a:lnRef>
+          <a:fillRef idx="3">
+            <a:schemeClr val="accent1"/>
+          </a:fillRef>
+          <a:effectRef idx="0">
+            <a:schemeClr val="accent1"/>
+          </a:effectRef>
+          <a:fontRef idx="minor">
+            <a:schemeClr val="lt1"/>
+          </a:fontRef>
+        </p:style>
+        <p:txBody>
+          <a:bodyPr rtlCol="0" anchor="ctr"/>
+          <a:lstStyle/>
+          <a:p>
+            <a:pPr algn="ctr"/>
+          </a:p>
+        </p:txBody>
+      </p:sp>
+      <p:sp>
+        <p:nvSpPr>
+          <p:cNvPr id="55" name="TextBox 54"/>
+          <p:cNvSpPr txBox="1"/>
+          <p:nvPr/>
+        </p:nvSpPr>
+        <p:spPr>
+          <a:xfrm>
+            <a:off x="9717024" y="1755648"/>
+            <a:ext cx="4392168" cy="841248"/>
+          </a:xfrm>
+          <a:prstGeom prst="rect">
+            <a:avLst/>
+          </a:prstGeom>
+          <a:noFill/>
+        </p:spPr>
+        <p:txBody>
+          <a:bodyPr wrap="square" tIns="36576" bIns="36576" anchor="t">
+            <a:spAutoFit/>
+          </a:bodyPr>
+          <a:lstStyle/>
+          <a:p>
+            <a:pPr>
+              <a:lnSpc>
+                <a:spcPts val="1944"/>
+              </a:lnSpc>
+              <a:spcBef>
+                <a:spcPts val="0"/>
+              </a:spcBef>
+              <a:spcAft>
+                <a:spcPts val="0"/>
+              </a:spcAft>
+              <a:defRPr sz="1800" b="1">
+                <a:solidFill>
+                  <a:srgbClr val="182B3A"/>
+                </a:solidFill>
+                <a:latin typeface="Arial"/>
+              </a:defRPr>
+            </a:pPr>
+            <a:r>
+              <a:t>1.  A group has 65 people. Adults:children = 5:8. How many more children than adults?</a:t>
+            </a:r>
+          </a:p>
+        </p:txBody>
+      </p:sp>
+      <p:sp>
+        <p:nvSpPr>
+          <p:cNvPr id="56" name="TextBox 55"/>
+          <p:cNvSpPr txBox="1"/>
+          <p:nvPr/>
+        </p:nvSpPr>
+        <p:spPr>
+          <a:xfrm>
+            <a:off x="9835896" y="2578608"/>
+            <a:ext cx="2029968" cy="310896"/>
+          </a:xfrm>
+          <a:prstGeom prst="rect">
+            <a:avLst/>
+          </a:prstGeom>
+          <a:noFill/>
+        </p:spPr>
+        <p:txBody>
+          <a:bodyPr wrap="none" lIns="0" rIns="0" tIns="0" bIns="0">
+            <a:spAutoFit/>
+          </a:bodyPr>
+          <a:lstStyle/>
+          <a:p>
+            <a:pPr algn="l">
+              <a:lnSpc>
+                <a:spcPts val="2128"/>
+              </a:lnSpc>
+              <a:spcBef>
+                <a:spcPts val="0"/>
+              </a:spcBef>
+              <a:spcAft>
+                <a:spcPts val="0"/>
+              </a:spcAft>
+              <a:defRPr sz="1900" b="0">
+                <a:solidFill>
+                  <a:srgbClr val="182B3A"/>
+                </a:solidFill>
+                <a:latin typeface="Arial"/>
+              </a:defRPr>
+            </a:pPr>
+            <a:r>
+              <a:t>5 + 8 = 13 parts</a:t>
+            </a:r>
+          </a:p>
+        </p:txBody>
+      </p:sp>
+      <p:sp>
+        <p:nvSpPr>
+          <p:cNvPr id="57" name="TextBox 56"/>
+          <p:cNvSpPr txBox="1"/>
+          <p:nvPr/>
+        </p:nvSpPr>
+        <p:spPr>
+          <a:xfrm>
+            <a:off x="9835896" y="2862072"/>
+            <a:ext cx="2029968" cy="310896"/>
+          </a:xfrm>
+          <a:prstGeom prst="rect">
+            <a:avLst/>
+          </a:prstGeom>
+          <a:noFill/>
+        </p:spPr>
+        <p:txBody>
+          <a:bodyPr wrap="none" lIns="0" rIns="0" tIns="0" bIns="0">
+            <a:spAutoFit/>
+          </a:bodyPr>
+          <a:lstStyle/>
+          <a:p>
+            <a:pPr algn="l">
+              <a:lnSpc>
+                <a:spcPts val="2128"/>
+              </a:lnSpc>
+              <a:spcBef>
+                <a:spcPts val="0"/>
+              </a:spcBef>
+              <a:spcAft>
+                <a:spcPts val="0"/>
+              </a:spcAft>
+              <a:defRPr sz="1900" b="0">
+                <a:solidFill>
+                  <a:srgbClr val="182B3A"/>
+                </a:solidFill>
+                <a:latin typeface="Arial"/>
+              </a:defRPr>
+            </a:pPr>
+            <a:r>
+              <a:t>65 ÷ 13 = 5</a:t>
+            </a:r>
+          </a:p>
+        </p:txBody>
+      </p:sp>
+      <p:sp>
+        <p:nvSpPr>
+          <p:cNvPr id="58" name="TextBox 57"/>
+          <p:cNvSpPr txBox="1"/>
+          <p:nvPr/>
+        </p:nvSpPr>
+        <p:spPr>
+          <a:xfrm>
+            <a:off x="9835896" y="3145536"/>
+            <a:ext cx="2029968" cy="310896"/>
+          </a:xfrm>
+          <a:prstGeom prst="rect">
+            <a:avLst/>
+          </a:prstGeom>
+          <a:noFill/>
+        </p:spPr>
+        <p:txBody>
+          <a:bodyPr wrap="none" lIns="0" rIns="0" tIns="0" bIns="0">
+            <a:spAutoFit/>
+          </a:bodyPr>
+          <a:lstStyle/>
+          <a:p>
+            <a:pPr algn="l">
+              <a:lnSpc>
+                <a:spcPts val="2128"/>
+              </a:lnSpc>
+              <a:spcBef>
+                <a:spcPts val="0"/>
+              </a:spcBef>
+              <a:spcAft>
+                <a:spcPts val="0"/>
+              </a:spcAft>
+              <a:defRPr sz="1900" b="0">
+                <a:solidFill>
+                  <a:srgbClr val="182B3A"/>
+                </a:solidFill>
+                <a:latin typeface="Arial"/>
+              </a:defRPr>
+            </a:pPr>
+            <a:r>
+              <a:t>Adults = 5 × 5 = 25</a:t>
+            </a:r>
+          </a:p>
+        </p:txBody>
+      </p:sp>
+      <p:sp>
+        <p:nvSpPr>
+          <p:cNvPr id="59" name="TextBox 58"/>
+          <p:cNvSpPr txBox="1"/>
+          <p:nvPr/>
+        </p:nvSpPr>
+        <p:spPr>
+          <a:xfrm>
+            <a:off x="11975592" y="2578608"/>
+            <a:ext cx="2029968" cy="310896"/>
+          </a:xfrm>
+          <a:prstGeom prst="rect">
+            <a:avLst/>
+          </a:prstGeom>
+          <a:noFill/>
+        </p:spPr>
+        <p:txBody>
+          <a:bodyPr wrap="none" lIns="0" rIns="0" tIns="0" bIns="0">
+            <a:spAutoFit/>
+          </a:bodyPr>
+          <a:lstStyle/>
+          <a:p>
+            <a:pPr algn="l">
+              <a:lnSpc>
+                <a:spcPts val="2128"/>
+              </a:lnSpc>
+              <a:spcBef>
+                <a:spcPts val="0"/>
+              </a:spcBef>
+              <a:spcAft>
+                <a:spcPts val="0"/>
+              </a:spcAft>
+              <a:defRPr sz="1900" b="0">
+                <a:solidFill>
+                  <a:srgbClr val="182B3A"/>
+                </a:solidFill>
+                <a:latin typeface="Arial"/>
+              </a:defRPr>
+            </a:pPr>
+            <a:r>
+              <a:t>8 × 5 = 40</a:t>
+            </a:r>
+          </a:p>
+        </p:txBody>
+      </p:sp>
+      <p:sp>
+        <p:nvSpPr>
+          <p:cNvPr id="60" name="TextBox 59"/>
+          <p:cNvSpPr txBox="1"/>
+          <p:nvPr/>
+        </p:nvSpPr>
+        <p:spPr>
+          <a:xfrm>
+            <a:off x="11975592" y="2862072"/>
+            <a:ext cx="2029968" cy="310896"/>
+          </a:xfrm>
+          <a:prstGeom prst="rect">
+            <a:avLst/>
+          </a:prstGeom>
+          <a:noFill/>
+        </p:spPr>
+        <p:txBody>
+          <a:bodyPr wrap="none" lIns="0" rIns="0" tIns="0" bIns="0">
+            <a:spAutoFit/>
+          </a:bodyPr>
+          <a:lstStyle/>
+          <a:p>
+            <a:pPr algn="l">
+              <a:lnSpc>
+                <a:spcPts val="2128"/>
+              </a:lnSpc>
+              <a:spcBef>
+                <a:spcPts val="0"/>
+              </a:spcBef>
+              <a:spcAft>
+                <a:spcPts val="0"/>
+              </a:spcAft>
+              <a:defRPr sz="1900" b="0">
+                <a:solidFill>
+                  <a:srgbClr val="182B3A"/>
+                </a:solidFill>
+                <a:latin typeface="Arial"/>
+              </a:defRPr>
+            </a:pPr>
+            <a:r>
+              <a:t>8 − 5 = 3</a:t>
+            </a:r>
+          </a:p>
+        </p:txBody>
+      </p:sp>
+      <p:sp>
+        <p:nvSpPr>
+          <p:cNvPr id="61" name="TextBox 60"/>
+          <p:cNvSpPr txBox="1"/>
+          <p:nvPr/>
+        </p:nvSpPr>
+        <p:spPr>
+          <a:xfrm>
+            <a:off x="9835896" y="3392424"/>
+            <a:ext cx="4206240" cy="256032"/>
+          </a:xfrm>
+          <a:prstGeom prst="rect">
+            <a:avLst/>
+          </a:prstGeom>
+          <a:noFill/>
+        </p:spPr>
+        <p:txBody>
+          <a:bodyPr wrap="none" lIns="0" rIns="0" tIns="0" bIns="0">
+            <a:spAutoFit/>
+          </a:bodyPr>
+          <a:lstStyle/>
+          <a:p>
+            <a:pPr algn="l">
+              <a:lnSpc>
+                <a:spcPts val="2016"/>
+              </a:lnSpc>
+              <a:spcBef>
+                <a:spcPts val="0"/>
+              </a:spcBef>
+              <a:spcAft>
+                <a:spcPts val="0"/>
+              </a:spcAft>
+              <a:defRPr sz="1800" b="0">
+                <a:solidFill>
+                  <a:srgbClr val="182B3A"/>
+                </a:solidFill>
+                <a:latin typeface="Arial"/>
+              </a:defRPr>
+            </a:pPr>
+            <a:r>
+              <a:t>3 more children</a:t>
+            </a:r>
+          </a:p>
+        </p:txBody>
+      </p:sp>
+      <p:sp>
+        <p:nvSpPr>
+          <p:cNvPr id="62" name="Rectangle 61"/>
+          <p:cNvSpPr/>
+          <p:nvPr/>
+        </p:nvSpPr>
+        <p:spPr>
+          <a:xfrm>
+            <a:off x="9625584" y="3721608"/>
+            <a:ext cx="4588764" cy="1929384"/>
+          </a:xfrm>
+          <a:prstGeom prst="rect">
+            <a:avLst/>
+          </a:prstGeom>
+          <a:solidFill>
+            <a:srgbClr val="FFFFFF"/>
+          </a:solidFill>
+          <a:ln w="7620">
+            <a:solidFill>
+              <a:srgbClr val="D8E0E6"/>
+            </a:solidFill>
+          </a:ln>
+        </p:spPr>
+        <p:style>
+          <a:lnRef idx="1">
+            <a:schemeClr val="accent1"/>
+          </a:lnRef>
+          <a:fillRef idx="3">
+            <a:schemeClr val="accent1"/>
+          </a:fillRef>
+          <a:effectRef idx="0">
+            <a:schemeClr val="accent1"/>
+          </a:effectRef>
+          <a:fontRef idx="minor">
+            <a:schemeClr val="lt1"/>
+          </a:fontRef>
+        </p:style>
+        <p:txBody>
+          <a:bodyPr rtlCol="0" anchor="ctr"/>
+          <a:lstStyle/>
+          <a:p>
+            <a:pPr algn="ctr"/>
+          </a:p>
+        </p:txBody>
+      </p:sp>
+      <p:sp>
+        <p:nvSpPr>
+          <p:cNvPr id="63" name="TextBox 62"/>
+          <p:cNvSpPr txBox="1"/>
+          <p:nvPr/>
+        </p:nvSpPr>
+        <p:spPr>
+          <a:xfrm>
+            <a:off x="9717024" y="3758184"/>
+            <a:ext cx="4392168" cy="841248"/>
+          </a:xfrm>
+          <a:prstGeom prst="rect">
+            <a:avLst/>
+          </a:prstGeom>
+          <a:noFill/>
+        </p:spPr>
+        <p:txBody>
+          <a:bodyPr wrap="square" tIns="36576" bIns="36576" anchor="t">
+            <a:spAutoFit/>
+          </a:bodyPr>
+          <a:lstStyle/>
+          <a:p>
+            <a:pPr>
+              <a:lnSpc>
+                <a:spcPts val="1944"/>
+              </a:lnSpc>
+              <a:spcBef>
+                <a:spcPts val="0"/>
+              </a:spcBef>
+              <a:spcAft>
+                <a:spcPts val="0"/>
+              </a:spcAft>
+              <a:defRPr sz="1800" b="1">
+                <a:solidFill>
+                  <a:srgbClr val="182B3A"/>
+                </a:solidFill>
+                <a:latin typeface="Arial"/>
+              </a:defRPr>
+            </a:pPr>
+            <a:r>
+              <a:t>2.  Two ribbon lengths are in ratio 3:8 and differ by 35 cm. Find their total length.</a:t>
+            </a:r>
+          </a:p>
+        </p:txBody>
+      </p:sp>
+      <p:sp>
+        <p:nvSpPr>
+          <p:cNvPr id="64" name="TextBox 63"/>
+          <p:cNvSpPr txBox="1"/>
+          <p:nvPr/>
+        </p:nvSpPr>
+        <p:spPr>
+          <a:xfrm>
+            <a:off x="9835896" y="4581144"/>
+            <a:ext cx="2029968" cy="310896"/>
+          </a:xfrm>
+          <a:prstGeom prst="rect">
+            <a:avLst/>
+          </a:prstGeom>
+          <a:noFill/>
+        </p:spPr>
+        <p:txBody>
+          <a:bodyPr wrap="none" lIns="0" rIns="0" tIns="0" bIns="0">
+            <a:spAutoFit/>
+          </a:bodyPr>
+          <a:lstStyle/>
+          <a:p>
+            <a:pPr algn="l">
+              <a:lnSpc>
+                <a:spcPts val="2128"/>
+              </a:lnSpc>
+              <a:spcBef>
+                <a:spcPts val="0"/>
+              </a:spcBef>
+              <a:spcAft>
+                <a:spcPts val="0"/>
+              </a:spcAft>
+              <a:defRPr sz="1900" b="0">
+                <a:solidFill>
+                  <a:srgbClr val="182B3A"/>
+                </a:solidFill>
+                <a:latin typeface="Arial"/>
+              </a:defRPr>
+            </a:pPr>
+            <a:r>
+              <a:t>8 − 3 = 5 parts</a:t>
+            </a:r>
+          </a:p>
+        </p:txBody>
+      </p:sp>
+      <p:sp>
+        <p:nvSpPr>
+          <p:cNvPr id="65" name="TextBox 64"/>
+          <p:cNvSpPr txBox="1"/>
+          <p:nvPr/>
+        </p:nvSpPr>
+        <p:spPr>
+          <a:xfrm>
+            <a:off x="9835896" y="4864608"/>
+            <a:ext cx="2029968" cy="310896"/>
+          </a:xfrm>
+          <a:prstGeom prst="rect">
+            <a:avLst/>
+          </a:prstGeom>
+          <a:noFill/>
+        </p:spPr>
+        <p:txBody>
+          <a:bodyPr wrap="none" lIns="0" rIns="0" tIns="0" bIns="0">
+            <a:spAutoFit/>
+          </a:bodyPr>
+          <a:lstStyle/>
+          <a:p>
+            <a:pPr algn="l">
+              <a:lnSpc>
+                <a:spcPts val="2128"/>
+              </a:lnSpc>
+              <a:spcBef>
+                <a:spcPts val="0"/>
+              </a:spcBef>
+              <a:spcAft>
+                <a:spcPts val="0"/>
+              </a:spcAft>
+              <a:defRPr sz="1900" b="0">
+                <a:solidFill>
+                  <a:srgbClr val="182B3A"/>
+                </a:solidFill>
+                <a:latin typeface="Arial"/>
+              </a:defRPr>
+            </a:pPr>
+            <a:r>
+              <a:t>35 ÷ 5 = 7</a:t>
+            </a:r>
+          </a:p>
+        </p:txBody>
+      </p:sp>
+      <p:sp>
+        <p:nvSpPr>
+          <p:cNvPr id="66" name="TextBox 65"/>
+          <p:cNvSpPr txBox="1"/>
+          <p:nvPr/>
+        </p:nvSpPr>
+        <p:spPr>
+          <a:xfrm>
+            <a:off x="9835896" y="5148072"/>
+            <a:ext cx="2029968" cy="310896"/>
+          </a:xfrm>
+          <a:prstGeom prst="rect">
+            <a:avLst/>
+          </a:prstGeom>
+          <a:noFill/>
+        </p:spPr>
+        <p:txBody>
+          <a:bodyPr wrap="none" lIns="0" rIns="0" tIns="0" bIns="0">
+            <a:spAutoFit/>
+          </a:bodyPr>
+          <a:lstStyle/>
+          <a:p>
+            <a:pPr algn="l">
+              <a:lnSpc>
+                <a:spcPts val="2128"/>
+              </a:lnSpc>
+              <a:spcBef>
+                <a:spcPts val="0"/>
+              </a:spcBef>
+              <a:spcAft>
+                <a:spcPts val="0"/>
+              </a:spcAft>
+              <a:defRPr sz="1900" b="0">
+                <a:solidFill>
+                  <a:srgbClr val="182B3A"/>
+                </a:solidFill>
+                <a:latin typeface="Arial"/>
+              </a:defRPr>
+            </a:pPr>
+            <a:r>
+              <a:t>Short = 3 × 7 = 21</a:t>
+            </a:r>
+          </a:p>
+        </p:txBody>
+      </p:sp>
+      <p:sp>
+        <p:nvSpPr>
+          <p:cNvPr id="67" name="TextBox 66"/>
+          <p:cNvSpPr txBox="1"/>
+          <p:nvPr/>
+        </p:nvSpPr>
+        <p:spPr>
+          <a:xfrm>
+            <a:off x="11975592" y="4581144"/>
+            <a:ext cx="2029968" cy="310896"/>
+          </a:xfrm>
+          <a:prstGeom prst="rect">
+            <a:avLst/>
+          </a:prstGeom>
+          <a:noFill/>
+        </p:spPr>
+        <p:txBody>
+          <a:bodyPr wrap="none" lIns="0" rIns="0" tIns="0" bIns="0">
+            <a:spAutoFit/>
+          </a:bodyPr>
+          <a:lstStyle/>
+          <a:p>
+            <a:pPr algn="l">
+              <a:lnSpc>
+                <a:spcPts val="2128"/>
+              </a:lnSpc>
+              <a:spcBef>
+                <a:spcPts val="0"/>
+              </a:spcBef>
+              <a:spcAft>
+                <a:spcPts val="0"/>
+              </a:spcAft>
+              <a:defRPr sz="1900" b="0">
+                <a:solidFill>
+                  <a:srgbClr val="182B3A"/>
+                </a:solidFill>
+                <a:latin typeface="Arial"/>
+              </a:defRPr>
+            </a:pPr>
+            <a:r>
+              <a:t>Long = 8 × 7 = 56</a:t>
+            </a:r>
+          </a:p>
+        </p:txBody>
+      </p:sp>
+      <p:sp>
+        <p:nvSpPr>
+          <p:cNvPr id="68" name="TextBox 67"/>
+          <p:cNvSpPr txBox="1"/>
+          <p:nvPr/>
+        </p:nvSpPr>
+        <p:spPr>
+          <a:xfrm>
+            <a:off x="11975592" y="4864608"/>
+            <a:ext cx="2029968" cy="310896"/>
+          </a:xfrm>
+          <a:prstGeom prst="rect">
+            <a:avLst/>
+          </a:prstGeom>
+          <a:noFill/>
+        </p:spPr>
+        <p:txBody>
+          <a:bodyPr wrap="none" lIns="0" rIns="0" tIns="0" bIns="0">
+            <a:spAutoFit/>
+          </a:bodyPr>
+          <a:lstStyle/>
+          <a:p>
+            <a:pPr algn="l">
+              <a:lnSpc>
+                <a:spcPts val="2128"/>
+              </a:lnSpc>
+              <a:spcBef>
+                <a:spcPts val="0"/>
+              </a:spcBef>
+              <a:spcAft>
+                <a:spcPts val="0"/>
+              </a:spcAft>
+              <a:defRPr sz="1900" b="0">
+                <a:solidFill>
+                  <a:srgbClr val="182B3A"/>
+                </a:solidFill>
+                <a:latin typeface="Arial"/>
+              </a:defRPr>
+            </a:pPr>
+            <a:r>
+              <a:t>56 − 21 = 35</a:t>
+            </a:r>
+          </a:p>
+        </p:txBody>
+      </p:sp>
+      <p:sp>
+        <p:nvSpPr>
+          <p:cNvPr id="69" name="TextBox 68"/>
+          <p:cNvSpPr txBox="1"/>
+          <p:nvPr/>
+        </p:nvSpPr>
+        <p:spPr>
+          <a:xfrm>
+            <a:off x="9835896" y="5394960"/>
+            <a:ext cx="4206240" cy="256032"/>
+          </a:xfrm>
+          <a:prstGeom prst="rect">
+            <a:avLst/>
+          </a:prstGeom>
+          <a:noFill/>
+        </p:spPr>
+        <p:txBody>
+          <a:bodyPr wrap="none" lIns="0" rIns="0" tIns="0" bIns="0">
+            <a:spAutoFit/>
+          </a:bodyPr>
+          <a:lstStyle/>
+          <a:p>
+            <a:pPr algn="l">
+              <a:lnSpc>
+                <a:spcPts val="2016"/>
+              </a:lnSpc>
+              <a:spcBef>
+                <a:spcPts val="0"/>
+              </a:spcBef>
+              <a:spcAft>
+                <a:spcPts val="0"/>
+              </a:spcAft>
+              <a:defRPr sz="1800" b="0">
+                <a:solidFill>
+                  <a:srgbClr val="182B3A"/>
+                </a:solidFill>
+                <a:latin typeface="Arial"/>
+              </a:defRPr>
+            </a:pPr>
+            <a:r>
+              <a:t>Total length = 35 cm</a:t>
+            </a:r>
+          </a:p>
+        </p:txBody>
+      </p:sp>
+      <p:sp>
+        <p:nvSpPr>
+          <p:cNvPr id="70" name="Rectangle 69"/>
+          <p:cNvSpPr/>
+          <p:nvPr/>
+        </p:nvSpPr>
+        <p:spPr>
+          <a:xfrm>
+            <a:off x="9625584" y="5724144"/>
+            <a:ext cx="4588764" cy="1929384"/>
+          </a:xfrm>
+          <a:prstGeom prst="rect">
+            <a:avLst/>
+          </a:prstGeom>
+          <a:solidFill>
+            <a:srgbClr val="FFFFFF"/>
+          </a:solidFill>
+          <a:ln w="7620">
+            <a:solidFill>
+              <a:srgbClr val="D8E0E6"/>
+            </a:solidFill>
+          </a:ln>
+        </p:spPr>
+        <p:style>
+          <a:lnRef idx="1">
+            <a:schemeClr val="accent1"/>
+          </a:lnRef>
+          <a:fillRef idx="3">
+            <a:schemeClr val="accent1"/>
+          </a:fillRef>
+          <a:effectRef idx="0">
+            <a:schemeClr val="accent1"/>
+          </a:effectRef>
+          <a:fontRef idx="minor">
+            <a:schemeClr val="lt1"/>
+          </a:fontRef>
+        </p:style>
+        <p:txBody>
+          <a:bodyPr rtlCol="0" anchor="ctr"/>
+          <a:lstStyle/>
+          <a:p>
+            <a:pPr algn="ctr"/>
+          </a:p>
+        </p:txBody>
+      </p:sp>
+      <p:sp>
+        <p:nvSpPr>
+          <p:cNvPr id="71" name="TextBox 70"/>
+          <p:cNvSpPr txBox="1"/>
+          <p:nvPr/>
+        </p:nvSpPr>
+        <p:spPr>
+          <a:xfrm>
+            <a:off x="9717024" y="5760720"/>
+            <a:ext cx="4392168" cy="841248"/>
+          </a:xfrm>
+          <a:prstGeom prst="rect">
+            <a:avLst/>
+          </a:prstGeom>
+          <a:noFill/>
+        </p:spPr>
+        <p:txBody>
+          <a:bodyPr wrap="square" tIns="36576" bIns="36576" anchor="t">
+            <a:spAutoFit/>
+          </a:bodyPr>
+          <a:lstStyle/>
+          <a:p>
+            <a:pPr>
+              <a:lnSpc>
+                <a:spcPts val="1944"/>
+              </a:lnSpc>
+              <a:spcBef>
+                <a:spcPts val="0"/>
+              </a:spcBef>
+              <a:spcAft>
+                <a:spcPts val="0"/>
+              </a:spcAft>
+              <a:defRPr sz="1800" b="1">
+                <a:solidFill>
+                  <a:srgbClr val="182B3A"/>
+                </a:solidFill>
+                <a:latin typeface="Arial"/>
+              </a:defRPr>
+            </a:pPr>
+            <a:r>
+              <a:t>3.  A and B have tokens in ratio 7:4. A has 42. How many tokens in total?</a:t>
+            </a:r>
+          </a:p>
+        </p:txBody>
+      </p:sp>
+      <p:sp>
+        <p:nvSpPr>
+          <p:cNvPr id="72" name="TextBox 71"/>
+          <p:cNvSpPr txBox="1"/>
+          <p:nvPr/>
+        </p:nvSpPr>
+        <p:spPr>
+          <a:xfrm>
+            <a:off x="9835896" y="6583679"/>
+            <a:ext cx="2029968" cy="310896"/>
+          </a:xfrm>
+          <a:prstGeom prst="rect">
+            <a:avLst/>
+          </a:prstGeom>
+          <a:noFill/>
+        </p:spPr>
+        <p:txBody>
+          <a:bodyPr wrap="none" lIns="0" rIns="0" tIns="0" bIns="0">
+            <a:spAutoFit/>
+          </a:bodyPr>
+          <a:lstStyle/>
+          <a:p>
+            <a:pPr algn="l">
+              <a:lnSpc>
+                <a:spcPts val="2128"/>
+              </a:lnSpc>
+              <a:spcBef>
+                <a:spcPts val="0"/>
+              </a:spcBef>
+              <a:spcAft>
+                <a:spcPts val="0"/>
+              </a:spcAft>
+              <a:defRPr sz="1900" b="0">
+                <a:solidFill>
+                  <a:srgbClr val="182B3A"/>
+                </a:solidFill>
+                <a:latin typeface="Arial"/>
+              </a:defRPr>
+            </a:pPr>
+            <a:r>
+              <a:t>42 ÷ 7 = 6</a:t>
+            </a:r>
+          </a:p>
+        </p:txBody>
+      </p:sp>
+      <p:sp>
+        <p:nvSpPr>
+          <p:cNvPr id="73" name="TextBox 72"/>
+          <p:cNvSpPr txBox="1"/>
+          <p:nvPr/>
+        </p:nvSpPr>
+        <p:spPr>
+          <a:xfrm>
+            <a:off x="9835896" y="6867144"/>
+            <a:ext cx="2029968" cy="310896"/>
+          </a:xfrm>
+          <a:prstGeom prst="rect">
+            <a:avLst/>
+          </a:prstGeom>
+          <a:noFill/>
+        </p:spPr>
+        <p:txBody>
+          <a:bodyPr wrap="none" lIns="0" rIns="0" tIns="0" bIns="0">
+            <a:spAutoFit/>
+          </a:bodyPr>
+          <a:lstStyle/>
+          <a:p>
+            <a:pPr algn="l">
+              <a:lnSpc>
+                <a:spcPts val="2128"/>
+              </a:lnSpc>
+              <a:spcBef>
+                <a:spcPts val="0"/>
+              </a:spcBef>
+              <a:spcAft>
+                <a:spcPts val="0"/>
+              </a:spcAft>
+              <a:defRPr sz="1900" b="0">
+                <a:solidFill>
+                  <a:srgbClr val="182B3A"/>
+                </a:solidFill>
+                <a:latin typeface="Arial"/>
+              </a:defRPr>
+            </a:pPr>
+            <a:r>
+              <a:t>B = 4 × 6 = 24</a:t>
+            </a:r>
+          </a:p>
+        </p:txBody>
+      </p:sp>
+      <p:sp>
+        <p:nvSpPr>
+          <p:cNvPr id="74" name="TextBox 73"/>
+          <p:cNvSpPr txBox="1"/>
+          <p:nvPr/>
+        </p:nvSpPr>
+        <p:spPr>
+          <a:xfrm>
+            <a:off x="11975592" y="6583679"/>
+            <a:ext cx="2029968" cy="310896"/>
+          </a:xfrm>
+          <a:prstGeom prst="rect">
+            <a:avLst/>
+          </a:prstGeom>
+          <a:noFill/>
+        </p:spPr>
+        <p:txBody>
+          <a:bodyPr wrap="none" lIns="0" rIns="0" tIns="0" bIns="0">
+            <a:spAutoFit/>
+          </a:bodyPr>
+          <a:lstStyle/>
+          <a:p>
+            <a:pPr algn="l">
+              <a:lnSpc>
+                <a:spcPts val="2128"/>
+              </a:lnSpc>
+              <a:spcBef>
+                <a:spcPts val="0"/>
+              </a:spcBef>
+              <a:spcAft>
+                <a:spcPts val="0"/>
+              </a:spcAft>
+              <a:defRPr sz="1900" b="0">
+                <a:solidFill>
+                  <a:srgbClr val="182B3A"/>
+                </a:solidFill>
+                <a:latin typeface="Arial"/>
+              </a:defRPr>
+            </a:pPr>
+            <a:r>
+              <a:t>42 + 4 = 46</a:t>
+            </a:r>
+          </a:p>
+        </p:txBody>
+      </p:sp>
+      <p:sp>
+        <p:nvSpPr>
+          <p:cNvPr id="75" name="TextBox 74"/>
+          <p:cNvSpPr txBox="1"/>
+          <p:nvPr/>
+        </p:nvSpPr>
+        <p:spPr>
+          <a:xfrm>
+            <a:off x="9835896" y="7397496"/>
+            <a:ext cx="4206240" cy="256032"/>
+          </a:xfrm>
+          <a:prstGeom prst="rect">
+            <a:avLst/>
+          </a:prstGeom>
+          <a:noFill/>
+        </p:spPr>
+        <p:txBody>
+          <a:bodyPr wrap="none" lIns="0" rIns="0" tIns="0" bIns="0">
+            <a:spAutoFit/>
+          </a:bodyPr>
+          <a:lstStyle/>
+          <a:p>
+            <a:pPr algn="l">
+              <a:lnSpc>
+                <a:spcPts val="2016"/>
+              </a:lnSpc>
+              <a:spcBef>
+                <a:spcPts val="0"/>
+              </a:spcBef>
+              <a:spcAft>
+                <a:spcPts val="0"/>
+              </a:spcAft>
+              <a:defRPr sz="1800" b="0">
+                <a:solidFill>
+                  <a:srgbClr val="182B3A"/>
+                </a:solidFill>
+                <a:latin typeface="Arial"/>
+              </a:defRPr>
+            </a:pPr>
+            <a:r>
+              <a:t>Total = 46 tokens</a:t>
+            </a:r>
           </a:p>
         </p:txBody>
       </p:sp>
